--- a/RevFlare-Presentation.pptx
+++ b/RevFlare-Presentation.pptx
@@ -6700,7 +6700,7 @@
               </a:defRPr>
             </a:pPr>
             <a:r>
-              <a:t>15 Features + Competitive Intelligence</a:t>
+              <a:t>16 Features + Competitive Intelligence</a:t>
             </a:r>
           </a:p>
         </p:txBody>
@@ -6714,7 +6714,7 @@
         <p:spPr>
           <a:xfrm>
             <a:off x="457200" y="1234440"/>
-            <a:ext cx="1371600" cy="731520"/>
+            <a:ext cx="1371600" cy="640080"/>
           </a:xfrm>
           <a:prstGeom prst="roundRect">
             <a:avLst/>
@@ -6799,7 +6799,7 @@
         </p:nvSpPr>
         <p:spPr>
           <a:xfrm>
-            <a:off x="530352" y="1344168"/>
+            <a:off x="530352" y="1307592"/>
             <a:ext cx="1234440" cy="201168"/>
           </a:xfrm>
           <a:prstGeom prst="rect">
@@ -6835,7 +6835,7 @@
         </p:nvSpPr>
         <p:spPr>
           <a:xfrm>
-            <a:off x="530352" y="1581912"/>
+            <a:off x="530352" y="1527048"/>
             <a:ext cx="1234440" cy="274320"/>
           </a:xfrm>
           <a:prstGeom prst="rect">
@@ -6872,7 +6872,7 @@
         <p:spPr>
           <a:xfrm>
             <a:off x="1965960" y="1234440"/>
-            <a:ext cx="1371600" cy="731520"/>
+            <a:ext cx="1371600" cy="640080"/>
           </a:xfrm>
           <a:prstGeom prst="roundRect">
             <a:avLst/>
@@ -6957,7 +6957,7 @@
         </p:nvSpPr>
         <p:spPr>
           <a:xfrm>
-            <a:off x="2039112" y="1344168"/>
+            <a:off x="2039112" y="1307592"/>
             <a:ext cx="1234440" cy="201168"/>
           </a:xfrm>
           <a:prstGeom prst="rect">
@@ -6993,7 +6993,7 @@
         </p:nvSpPr>
         <p:spPr>
           <a:xfrm>
-            <a:off x="2039112" y="1581912"/>
+            <a:off x="2039112" y="1527048"/>
             <a:ext cx="1234440" cy="274320"/>
           </a:xfrm>
           <a:prstGeom prst="rect">
@@ -7030,7 +7030,7 @@
         <p:spPr>
           <a:xfrm>
             <a:off x="3474720" y="1234440"/>
-            <a:ext cx="1371600" cy="731520"/>
+            <a:ext cx="1371600" cy="640080"/>
           </a:xfrm>
           <a:prstGeom prst="roundRect">
             <a:avLst/>
@@ -7115,7 +7115,7 @@
         </p:nvSpPr>
         <p:spPr>
           <a:xfrm>
-            <a:off x="3547872" y="1344168"/>
+            <a:off x="3547872" y="1307592"/>
             <a:ext cx="1234440" cy="201168"/>
           </a:xfrm>
           <a:prstGeom prst="rect">
@@ -7151,7 +7151,7 @@
         </p:nvSpPr>
         <p:spPr>
           <a:xfrm>
-            <a:off x="3547872" y="1581912"/>
+            <a:off x="3547872" y="1527048"/>
             <a:ext cx="1234440" cy="274320"/>
           </a:xfrm>
           <a:prstGeom prst="rect">
@@ -7188,7 +7188,7 @@
         <p:spPr>
           <a:xfrm>
             <a:off x="4983479" y="1234440"/>
-            <a:ext cx="1371600" cy="731520"/>
+            <a:ext cx="1371600" cy="640080"/>
           </a:xfrm>
           <a:prstGeom prst="roundRect">
             <a:avLst/>
@@ -7273,7 +7273,7 @@
         </p:nvSpPr>
         <p:spPr>
           <a:xfrm>
-            <a:off x="5056631" y="1344168"/>
+            <a:off x="5056631" y="1307592"/>
             <a:ext cx="1234440" cy="201168"/>
           </a:xfrm>
           <a:prstGeom prst="rect">
@@ -7309,7 +7309,7 @@
         </p:nvSpPr>
         <p:spPr>
           <a:xfrm>
-            <a:off x="5056631" y="1581912"/>
+            <a:off x="5056631" y="1527048"/>
             <a:ext cx="1234440" cy="274320"/>
           </a:xfrm>
           <a:prstGeom prst="rect">
@@ -7346,7 +7346,7 @@
         <p:spPr>
           <a:xfrm>
             <a:off x="6492240" y="1234440"/>
-            <a:ext cx="1371600" cy="731520"/>
+            <a:ext cx="1371600" cy="640080"/>
           </a:xfrm>
           <a:prstGeom prst="roundRect">
             <a:avLst/>
@@ -7431,7 +7431,7 @@
         </p:nvSpPr>
         <p:spPr>
           <a:xfrm>
-            <a:off x="6565392" y="1344168"/>
+            <a:off x="6565392" y="1307592"/>
             <a:ext cx="1234440" cy="201168"/>
           </a:xfrm>
           <a:prstGeom prst="rect">
@@ -7467,7 +7467,7 @@
         </p:nvSpPr>
         <p:spPr>
           <a:xfrm>
-            <a:off x="6565392" y="1581912"/>
+            <a:off x="6565392" y="1527048"/>
             <a:ext cx="1234440" cy="274320"/>
           </a:xfrm>
           <a:prstGeom prst="rect">
@@ -7503,8 +7503,8 @@
         </p:nvSpPr>
         <p:spPr>
           <a:xfrm>
-            <a:off x="457200" y="2103120"/>
-            <a:ext cx="1371600" cy="731520"/>
+            <a:off x="457200" y="2011680"/>
+            <a:ext cx="1371600" cy="640080"/>
           </a:xfrm>
           <a:prstGeom prst="roundRect">
             <a:avLst/>
@@ -7546,7 +7546,7 @@
         </p:nvSpPr>
         <p:spPr>
           <a:xfrm>
-            <a:off x="457200" y="2103120"/>
+            <a:off x="457200" y="2011680"/>
             <a:ext cx="1371600" cy="38100"/>
           </a:xfrm>
           <a:prstGeom prst="rect">
@@ -7589,7 +7589,7 @@
         </p:nvSpPr>
         <p:spPr>
           <a:xfrm>
-            <a:off x="530352" y="2212848"/>
+            <a:off x="530352" y="2084832"/>
             <a:ext cx="1234440" cy="201168"/>
           </a:xfrm>
           <a:prstGeom prst="rect">
@@ -7625,7 +7625,7 @@
         </p:nvSpPr>
         <p:spPr>
           <a:xfrm>
-            <a:off x="530352" y="2450592"/>
+            <a:off x="530352" y="2304288"/>
             <a:ext cx="1234440" cy="274320"/>
           </a:xfrm>
           <a:prstGeom prst="rect">
@@ -7661,8 +7661,8 @@
         </p:nvSpPr>
         <p:spPr>
           <a:xfrm>
-            <a:off x="1965960" y="2103120"/>
-            <a:ext cx="1371600" cy="731520"/>
+            <a:off x="1965960" y="2011680"/>
+            <a:ext cx="1371600" cy="640080"/>
           </a:xfrm>
           <a:prstGeom prst="roundRect">
             <a:avLst/>
@@ -7704,7 +7704,7 @@
         </p:nvSpPr>
         <p:spPr>
           <a:xfrm>
-            <a:off x="1965960" y="2103120"/>
+            <a:off x="1965960" y="2011680"/>
             <a:ext cx="1371600" cy="38100"/>
           </a:xfrm>
           <a:prstGeom prst="rect">
@@ -7747,7 +7747,7 @@
         </p:nvSpPr>
         <p:spPr>
           <a:xfrm>
-            <a:off x="2039112" y="2212848"/>
+            <a:off x="2039112" y="2084832"/>
             <a:ext cx="1234440" cy="201168"/>
           </a:xfrm>
           <a:prstGeom prst="rect">
@@ -7783,7 +7783,7 @@
         </p:nvSpPr>
         <p:spPr>
           <a:xfrm>
-            <a:off x="2039112" y="2450592"/>
+            <a:off x="2039112" y="2304288"/>
             <a:ext cx="1234440" cy="274320"/>
           </a:xfrm>
           <a:prstGeom prst="rect">
@@ -7819,8 +7819,8 @@
         </p:nvSpPr>
         <p:spPr>
           <a:xfrm>
-            <a:off x="3474720" y="2103120"/>
-            <a:ext cx="1371600" cy="731520"/>
+            <a:off x="3474720" y="2011680"/>
+            <a:ext cx="1371600" cy="640080"/>
           </a:xfrm>
           <a:prstGeom prst="roundRect">
             <a:avLst/>
@@ -7862,7 +7862,7 @@
         </p:nvSpPr>
         <p:spPr>
           <a:xfrm>
-            <a:off x="3474720" y="2103120"/>
+            <a:off x="3474720" y="2011680"/>
             <a:ext cx="1371600" cy="38100"/>
           </a:xfrm>
           <a:prstGeom prst="rect">
@@ -7905,7 +7905,7 @@
         </p:nvSpPr>
         <p:spPr>
           <a:xfrm>
-            <a:off x="3547872" y="2212848"/>
+            <a:off x="3547872" y="2084832"/>
             <a:ext cx="1234440" cy="201168"/>
           </a:xfrm>
           <a:prstGeom prst="rect">
@@ -7941,7 +7941,7 @@
         </p:nvSpPr>
         <p:spPr>
           <a:xfrm>
-            <a:off x="3547872" y="2450592"/>
+            <a:off x="3547872" y="2304288"/>
             <a:ext cx="1234440" cy="274320"/>
           </a:xfrm>
           <a:prstGeom prst="rect">
@@ -7977,8 +7977,8 @@
         </p:nvSpPr>
         <p:spPr>
           <a:xfrm>
-            <a:off x="4983479" y="2103120"/>
-            <a:ext cx="1371600" cy="731520"/>
+            <a:off x="4983479" y="2011680"/>
+            <a:ext cx="1371600" cy="640080"/>
           </a:xfrm>
           <a:prstGeom prst="roundRect">
             <a:avLst/>
@@ -8020,7 +8020,7 @@
         </p:nvSpPr>
         <p:spPr>
           <a:xfrm>
-            <a:off x="4983479" y="2103120"/>
+            <a:off x="4983479" y="2011680"/>
             <a:ext cx="1371600" cy="38100"/>
           </a:xfrm>
           <a:prstGeom prst="rect">
@@ -8063,7 +8063,7 @@
         </p:nvSpPr>
         <p:spPr>
           <a:xfrm>
-            <a:off x="5056631" y="2212848"/>
+            <a:off x="5056631" y="2084832"/>
             <a:ext cx="1234440" cy="201168"/>
           </a:xfrm>
           <a:prstGeom prst="rect">
@@ -8099,7 +8099,7 @@
         </p:nvSpPr>
         <p:spPr>
           <a:xfrm>
-            <a:off x="5056631" y="2450592"/>
+            <a:off x="5056631" y="2304288"/>
             <a:ext cx="1234440" cy="274320"/>
           </a:xfrm>
           <a:prstGeom prst="rect">
@@ -8135,8 +8135,8 @@
         </p:nvSpPr>
         <p:spPr>
           <a:xfrm>
-            <a:off x="6492240" y="2103120"/>
-            <a:ext cx="1371600" cy="731520"/>
+            <a:off x="6492240" y="2011680"/>
+            <a:ext cx="1371600" cy="640080"/>
           </a:xfrm>
           <a:prstGeom prst="roundRect">
             <a:avLst/>
@@ -8178,7 +8178,7 @@
         </p:nvSpPr>
         <p:spPr>
           <a:xfrm>
-            <a:off x="6492240" y="2103120"/>
+            <a:off x="6492240" y="2011680"/>
             <a:ext cx="1371600" cy="38100"/>
           </a:xfrm>
           <a:prstGeom prst="rect">
@@ -8221,7 +8221,7 @@
         </p:nvSpPr>
         <p:spPr>
           <a:xfrm>
-            <a:off x="6565392" y="2212848"/>
+            <a:off x="6565392" y="2084832"/>
             <a:ext cx="1234440" cy="201168"/>
           </a:xfrm>
           <a:prstGeom prst="rect">
@@ -8257,7 +8257,7 @@
         </p:nvSpPr>
         <p:spPr>
           <a:xfrm>
-            <a:off x="6565392" y="2450592"/>
+            <a:off x="6565392" y="2304288"/>
             <a:ext cx="1234440" cy="274320"/>
           </a:xfrm>
           <a:prstGeom prst="rect">
@@ -8293,8 +8293,8 @@
         </p:nvSpPr>
         <p:spPr>
           <a:xfrm>
-            <a:off x="457200" y="2971800"/>
-            <a:ext cx="1371600" cy="731520"/>
+            <a:off x="457200" y="2788920"/>
+            <a:ext cx="1371600" cy="640080"/>
           </a:xfrm>
           <a:prstGeom prst="roundRect">
             <a:avLst/>
@@ -8336,7 +8336,7 @@
         </p:nvSpPr>
         <p:spPr>
           <a:xfrm>
-            <a:off x="457200" y="2971800"/>
+            <a:off x="457200" y="2788920"/>
             <a:ext cx="1371600" cy="38100"/>
           </a:xfrm>
           <a:prstGeom prst="rect">
@@ -8379,7 +8379,7 @@
         </p:nvSpPr>
         <p:spPr>
           <a:xfrm>
-            <a:off x="530352" y="3081528"/>
+            <a:off x="530352" y="2862072"/>
             <a:ext cx="1234440" cy="201168"/>
           </a:xfrm>
           <a:prstGeom prst="rect">
@@ -8415,7 +8415,7 @@
         </p:nvSpPr>
         <p:spPr>
           <a:xfrm>
-            <a:off x="530352" y="3319272"/>
+            <a:off x="530352" y="3081528"/>
             <a:ext cx="1234440" cy="274320"/>
           </a:xfrm>
           <a:prstGeom prst="rect">
@@ -8451,8 +8451,8 @@
         </p:nvSpPr>
         <p:spPr>
           <a:xfrm>
-            <a:off x="1965960" y="2971800"/>
-            <a:ext cx="1371600" cy="731520"/>
+            <a:off x="1965960" y="2788920"/>
+            <a:ext cx="1371600" cy="640080"/>
           </a:xfrm>
           <a:prstGeom prst="roundRect">
             <a:avLst/>
@@ -8494,7 +8494,7 @@
         </p:nvSpPr>
         <p:spPr>
           <a:xfrm>
-            <a:off x="1965960" y="2971800"/>
+            <a:off x="1965960" y="2788920"/>
             <a:ext cx="1371600" cy="38100"/>
           </a:xfrm>
           <a:prstGeom prst="rect">
@@ -8537,7 +8537,7 @@
         </p:nvSpPr>
         <p:spPr>
           <a:xfrm>
-            <a:off x="2039112" y="3081528"/>
+            <a:off x="2039112" y="2862072"/>
             <a:ext cx="1234440" cy="201168"/>
           </a:xfrm>
           <a:prstGeom prst="rect">
@@ -8573,7 +8573,7 @@
         </p:nvSpPr>
         <p:spPr>
           <a:xfrm>
-            <a:off x="2039112" y="3319272"/>
+            <a:off x="2039112" y="3081528"/>
             <a:ext cx="1234440" cy="274320"/>
           </a:xfrm>
           <a:prstGeom prst="rect">
@@ -8609,8 +8609,8 @@
         </p:nvSpPr>
         <p:spPr>
           <a:xfrm>
-            <a:off x="3474720" y="2971800"/>
-            <a:ext cx="1371600" cy="731520"/>
+            <a:off x="3474720" y="2788920"/>
+            <a:ext cx="1371600" cy="640080"/>
           </a:xfrm>
           <a:prstGeom prst="roundRect">
             <a:avLst/>
@@ -8652,7 +8652,7 @@
         </p:nvSpPr>
         <p:spPr>
           <a:xfrm>
-            <a:off x="3474720" y="2971800"/>
+            <a:off x="3474720" y="2788920"/>
             <a:ext cx="1371600" cy="38100"/>
           </a:xfrm>
           <a:prstGeom prst="rect">
@@ -8695,7 +8695,7 @@
         </p:nvSpPr>
         <p:spPr>
           <a:xfrm>
-            <a:off x="3547872" y="3081528"/>
+            <a:off x="3547872" y="2862072"/>
             <a:ext cx="1234440" cy="201168"/>
           </a:xfrm>
           <a:prstGeom prst="rect">
@@ -8731,7 +8731,7 @@
         </p:nvSpPr>
         <p:spPr>
           <a:xfrm>
-            <a:off x="3547872" y="3319272"/>
+            <a:off x="3547872" y="3081528"/>
             <a:ext cx="1234440" cy="274320"/>
           </a:xfrm>
           <a:prstGeom prst="rect">
@@ -8767,8 +8767,8 @@
         </p:nvSpPr>
         <p:spPr>
           <a:xfrm>
-            <a:off x="4983479" y="2971800"/>
-            <a:ext cx="1371600" cy="731520"/>
+            <a:off x="4983479" y="2788920"/>
+            <a:ext cx="1371600" cy="640080"/>
           </a:xfrm>
           <a:prstGeom prst="roundRect">
             <a:avLst/>
@@ -8810,7 +8810,7 @@
         </p:nvSpPr>
         <p:spPr>
           <a:xfrm>
-            <a:off x="4983479" y="2971800"/>
+            <a:off x="4983479" y="2788920"/>
             <a:ext cx="1371600" cy="38100"/>
           </a:xfrm>
           <a:prstGeom prst="rect">
@@ -8853,7 +8853,7 @@
         </p:nvSpPr>
         <p:spPr>
           <a:xfrm>
-            <a:off x="5056631" y="3081528"/>
+            <a:off x="5056631" y="2862072"/>
             <a:ext cx="1234440" cy="201168"/>
           </a:xfrm>
           <a:prstGeom prst="rect">
@@ -8889,7 +8889,7 @@
         </p:nvSpPr>
         <p:spPr>
           <a:xfrm>
-            <a:off x="5056631" y="3319272"/>
+            <a:off x="5056631" y="3081528"/>
             <a:ext cx="1234440" cy="274320"/>
           </a:xfrm>
           <a:prstGeom prst="rect">
@@ -8925,8 +8925,8 @@
         </p:nvSpPr>
         <p:spPr>
           <a:xfrm>
-            <a:off x="6492240" y="2971800"/>
-            <a:ext cx="1371600" cy="731520"/>
+            <a:off x="6492240" y="2788920"/>
+            <a:ext cx="1371600" cy="640080"/>
           </a:xfrm>
           <a:prstGeom prst="roundRect">
             <a:avLst/>
@@ -8968,7 +8968,7 @@
         </p:nvSpPr>
         <p:spPr>
           <a:xfrm>
-            <a:off x="6492240" y="2971800"/>
+            <a:off x="6492240" y="2788920"/>
             <a:ext cx="1371600" cy="38100"/>
           </a:xfrm>
           <a:prstGeom prst="rect">
@@ -9011,7 +9011,7 @@
         </p:nvSpPr>
         <p:spPr>
           <a:xfrm>
-            <a:off x="6565392" y="3081528"/>
+            <a:off x="6565392" y="2862072"/>
             <a:ext cx="1234440" cy="201168"/>
           </a:xfrm>
           <a:prstGeom prst="rect">
@@ -9047,7 +9047,7 @@
         </p:nvSpPr>
         <p:spPr>
           <a:xfrm>
-            <a:off x="6565392" y="3319272"/>
+            <a:off x="6565392" y="3081528"/>
             <a:ext cx="1234440" cy="274320"/>
           </a:xfrm>
           <a:prstGeom prst="rect">
@@ -9077,50 +9077,14 @@
       </p:sp>
       <p:sp>
         <p:nvSpPr>
-          <p:cNvPr id="64" name="TextBox 63"/>
-          <p:cNvSpPr txBox="1"/>
-          <p:nvPr/>
-        </p:nvSpPr>
-        <p:spPr>
-          <a:xfrm>
-            <a:off x="8001000" y="1143000"/>
-            <a:ext cx="3657600" cy="228600"/>
-          </a:xfrm>
-          <a:prstGeom prst="rect">
-            <a:avLst/>
-          </a:prstGeom>
-          <a:noFill/>
-        </p:spPr>
-        <p:txBody>
-          <a:bodyPr wrap="square">
-            <a:spAutoFit/>
-          </a:bodyPr>
-          <a:lstStyle/>
-          <a:p>
-            <a:pPr algn="l">
-              <a:defRPr sz="900" b="1">
-                <a:solidFill>
-                  <a:srgbClr val="5A5E66"/>
-                </a:solidFill>
-                <a:latin typeface="Calibri"/>
-              </a:defRPr>
-            </a:pPr>
-            <a:r>
-              <a:t>COMPETITIVE (12 CATEGORIES, 40+ RIVALS)</a:t>
-            </a:r>
-          </a:p>
-        </p:txBody>
-      </p:sp>
-      <p:sp>
-        <p:nvSpPr>
-          <p:cNvPr id="65" name="Rounded Rectangle 64"/>
+          <p:cNvPr id="64" name="Rounded Rectangle 63"/>
           <p:cNvSpPr/>
           <p:nvPr/>
         </p:nvSpPr>
         <p:spPr>
           <a:xfrm>
-            <a:off x="8001000" y="1463040"/>
-            <a:ext cx="3749039" cy="292608"/>
+            <a:off x="457200" y="3566160"/>
+            <a:ext cx="1371600" cy="640080"/>
           </a:xfrm>
           <a:prstGeom prst="roundRect">
             <a:avLst/>
@@ -9156,56 +9120,20 @@
       </p:sp>
       <p:sp>
         <p:nvSpPr>
-          <p:cNvPr id="66" name="TextBox 65"/>
-          <p:cNvSpPr txBox="1"/>
-          <p:nvPr/>
-        </p:nvSpPr>
-        <p:spPr>
-          <a:xfrm>
-            <a:off x="8119872" y="1499616"/>
-            <a:ext cx="3520440" cy="201168"/>
-          </a:xfrm>
-          <a:prstGeom prst="rect">
-            <a:avLst/>
-          </a:prstGeom>
-          <a:noFill/>
-        </p:spPr>
-        <p:txBody>
-          <a:bodyPr wrap="square">
-            <a:spAutoFit/>
-          </a:bodyPr>
-          <a:lstStyle/>
-          <a:p>
-            <a:pPr algn="l">
-              <a:defRPr sz="900" b="0">
-                <a:solidFill>
-                  <a:srgbClr val="C4C9D4"/>
-                </a:solidFill>
-                <a:latin typeface="Calibri"/>
-              </a:defRPr>
-            </a:pPr>
-            <a:r>
-              <a:t>CDN -- Akamai, CloudFront, Fastly</a:t>
-            </a:r>
-          </a:p>
-        </p:txBody>
-      </p:sp>
-      <p:sp>
-        <p:nvSpPr>
-          <p:cNvPr id="67" name="Rounded Rectangle 66"/>
+          <p:cNvPr id="65" name="Rectangle 64"/>
           <p:cNvSpPr/>
           <p:nvPr/>
         </p:nvSpPr>
         <p:spPr>
           <a:xfrm>
-            <a:off x="8001000" y="1847088"/>
-            <a:ext cx="3749039" cy="292608"/>
-          </a:xfrm>
-          <a:prstGeom prst="roundRect">
-            <a:avLst/>
-          </a:prstGeom>
-          <a:solidFill>
-            <a:srgbClr val="161718"/>
+            <a:off x="457200" y="3566160"/>
+            <a:ext cx="1371600" cy="38100"/>
+          </a:xfrm>
+          <a:prstGeom prst="rect">
+            <a:avLst/>
+          </a:prstGeom>
+          <a:solidFill>
+            <a:srgbClr val="34D399"/>
           </a:solidFill>
           <a:ln>
             <a:noFill/>
@@ -9235,14 +9163,14 @@
       </p:sp>
       <p:sp>
         <p:nvSpPr>
-          <p:cNvPr id="68" name="TextBox 67"/>
+          <p:cNvPr id="66" name="TextBox 65"/>
           <p:cNvSpPr txBox="1"/>
           <p:nvPr/>
         </p:nvSpPr>
         <p:spPr>
           <a:xfrm>
-            <a:off x="8119872" y="1883664"/>
-            <a:ext cx="3520440" cy="201168"/>
+            <a:off x="530352" y="3639312"/>
+            <a:ext cx="1234440" cy="201168"/>
           </a:xfrm>
           <a:prstGeom prst="rect">
             <a:avLst/>
@@ -9256,15 +9184,87 @@
           <a:lstStyle/>
           <a:p>
             <a:pPr algn="l">
-              <a:defRPr sz="900" b="0">
-                <a:solidFill>
-                  <a:srgbClr val="C4C9D4"/>
+              <a:defRPr sz="1000" b="1">
+                <a:solidFill>
+                  <a:srgbClr val="34D399"/>
                 </a:solidFill>
                 <a:latin typeface="Calibri"/>
               </a:defRPr>
             </a:pPr>
             <a:r>
-              <a:t>WAF -- Imperva, AWS WAF, F5</a:t>
+              <a:t>Email Approval</a:t>
+            </a:r>
+          </a:p>
+        </p:txBody>
+      </p:sp>
+      <p:sp>
+        <p:nvSpPr>
+          <p:cNvPr id="67" name="TextBox 66"/>
+          <p:cNvSpPr txBox="1"/>
+          <p:nvPr/>
+        </p:nvSpPr>
+        <p:spPr>
+          <a:xfrm>
+            <a:off x="530352" y="3858768"/>
+            <a:ext cx="1234440" cy="274320"/>
+          </a:xfrm>
+          <a:prstGeom prst="rect">
+            <a:avLst/>
+          </a:prstGeom>
+          <a:noFill/>
+        </p:spPr>
+        <p:txBody>
+          <a:bodyPr wrap="square">
+            <a:spAutoFit/>
+          </a:bodyPr>
+          <a:lstStyle/>
+          <a:p>
+            <a:pPr algn="l">
+              <a:defRPr sz="800" b="0">
+                <a:solidFill>
+                  <a:srgbClr val="8A8F98"/>
+                </a:solidFill>
+                <a:latin typeface="Calibri"/>
+              </a:defRPr>
+            </a:pPr>
+            <a:r>
+              <a:t>Review &amp; gate</a:t>
+            </a:r>
+          </a:p>
+        </p:txBody>
+      </p:sp>
+      <p:sp>
+        <p:nvSpPr>
+          <p:cNvPr id="68" name="TextBox 67"/>
+          <p:cNvSpPr txBox="1"/>
+          <p:nvPr/>
+        </p:nvSpPr>
+        <p:spPr>
+          <a:xfrm>
+            <a:off x="8001000" y="1143000"/>
+            <a:ext cx="3657600" cy="228600"/>
+          </a:xfrm>
+          <a:prstGeom prst="rect">
+            <a:avLst/>
+          </a:prstGeom>
+          <a:noFill/>
+        </p:spPr>
+        <p:txBody>
+          <a:bodyPr wrap="square">
+            <a:spAutoFit/>
+          </a:bodyPr>
+          <a:lstStyle/>
+          <a:p>
+            <a:pPr algn="l">
+              <a:defRPr sz="900" b="1">
+                <a:solidFill>
+                  <a:srgbClr val="5A5E66"/>
+                </a:solidFill>
+                <a:latin typeface="Calibri"/>
+              </a:defRPr>
+            </a:pPr>
+            <a:r>
+              <a:t>COMPETITIVE (12 CATEGORIES, 40+ RIVALS)</a:t>
             </a:r>
           </a:p>
         </p:txBody>
@@ -9277,7 +9277,7 @@
         </p:nvSpPr>
         <p:spPr>
           <a:xfrm>
-            <a:off x="8001000" y="2231136"/>
+            <a:off x="8001000" y="1463040"/>
             <a:ext cx="3749039" cy="292608"/>
           </a:xfrm>
           <a:prstGeom prst="roundRect">
@@ -9320,7 +9320,7 @@
         </p:nvSpPr>
         <p:spPr>
           <a:xfrm>
-            <a:off x="8119872" y="2267712"/>
+            <a:off x="8119872" y="1499616"/>
             <a:ext cx="3520440" cy="201168"/>
           </a:xfrm>
           <a:prstGeom prst="rect">
@@ -9343,7 +9343,7 @@
               </a:defRPr>
             </a:pPr>
             <a:r>
-              <a:t>DDoS -- Prolexic, AWS Shield</a:t>
+              <a:t>CDN -- Akamai, CloudFront, Fastly</a:t>
             </a:r>
           </a:p>
         </p:txBody>
@@ -9356,7 +9356,7 @@
         </p:nvSpPr>
         <p:spPr>
           <a:xfrm>
-            <a:off x="8001000" y="2615184"/>
+            <a:off x="8001000" y="1847088"/>
             <a:ext cx="3749039" cy="292608"/>
           </a:xfrm>
           <a:prstGeom prst="roundRect">
@@ -9399,7 +9399,7 @@
         </p:nvSpPr>
         <p:spPr>
           <a:xfrm>
-            <a:off x="8119872" y="2651760"/>
+            <a:off x="8119872" y="1883664"/>
             <a:ext cx="3520440" cy="201168"/>
           </a:xfrm>
           <a:prstGeom prst="rect">
@@ -9422,7 +9422,7 @@
               </a:defRPr>
             </a:pPr>
             <a:r>
-              <a:t>Zero Trust -- Zscaler, Palo Alto</a:t>
+              <a:t>WAF -- Imperva, AWS WAF, F5</a:t>
             </a:r>
           </a:p>
         </p:txBody>
@@ -9435,7 +9435,7 @@
         </p:nvSpPr>
         <p:spPr>
           <a:xfrm>
-            <a:off x="8001000" y="2999232"/>
+            <a:off x="8001000" y="2231136"/>
             <a:ext cx="3749039" cy="292608"/>
           </a:xfrm>
           <a:prstGeom prst="roundRect">
@@ -9478,7 +9478,7 @@
         </p:nvSpPr>
         <p:spPr>
           <a:xfrm>
-            <a:off x="8119872" y="3035808"/>
+            <a:off x="8119872" y="2267712"/>
             <a:ext cx="3520440" cy="201168"/>
           </a:xfrm>
           <a:prstGeom prst="rect">
@@ -9501,7 +9501,7 @@
               </a:defRPr>
             </a:pPr>
             <a:r>
-              <a:t>Edge Compute -- Lambda@Edge, Vercel</a:t>
+              <a:t>DDoS -- Prolexic, AWS Shield</a:t>
             </a:r>
           </a:p>
         </p:txBody>
@@ -9514,7 +9514,7 @@
         </p:nvSpPr>
         <p:spPr>
           <a:xfrm>
-            <a:off x="8001000" y="3383280"/>
+            <a:off x="8001000" y="2615184"/>
             <a:ext cx="3749039" cy="292608"/>
           </a:xfrm>
           <a:prstGeom prst="roundRect">
@@ -9557,7 +9557,7 @@
         </p:nvSpPr>
         <p:spPr>
           <a:xfrm>
-            <a:off x="8119872" y="3419856"/>
+            <a:off x="8119872" y="2651760"/>
             <a:ext cx="3520440" cy="201168"/>
           </a:xfrm>
           <a:prstGeom prst="rect">
@@ -9580,57 +9580,21 @@
               </a:defRPr>
             </a:pPr>
             <a:r>
-              <a:t>DNS -- Route 53, NS1, Google</a:t>
-            </a:r>
-          </a:p>
-        </p:txBody>
-      </p:sp>
-      <p:sp>
-        <p:nvSpPr>
-          <p:cNvPr id="77" name="TextBox 76"/>
-          <p:cNvSpPr txBox="1"/>
-          <p:nvPr/>
-        </p:nvSpPr>
-        <p:spPr>
-          <a:xfrm>
-            <a:off x="457200" y="3977639"/>
-            <a:ext cx="4572000" cy="228600"/>
-          </a:xfrm>
-          <a:prstGeom prst="rect">
-            <a:avLst/>
-          </a:prstGeom>
-          <a:noFill/>
-        </p:spPr>
-        <p:txBody>
-          <a:bodyPr wrap="square">
-            <a:spAutoFit/>
-          </a:bodyPr>
-          <a:lstStyle/>
-          <a:p>
-            <a:pPr algn="l">
-              <a:defRPr sz="900" b="1">
-                <a:solidFill>
-                  <a:srgbClr val="5A5E66"/>
-                </a:solidFill>
-                <a:latin typeface="Calibri"/>
-              </a:defRPr>
-            </a:pPr>
-            <a:r>
-              <a:t>THREAT INTELLIGENCE</a:t>
-            </a:r>
-          </a:p>
-        </p:txBody>
-      </p:sp>
-      <p:sp>
-        <p:nvSpPr>
-          <p:cNvPr id="78" name="Rounded Rectangle 77"/>
+              <a:t>Zero Trust -- Zscaler, Palo Alto</a:t>
+            </a:r>
+          </a:p>
+        </p:txBody>
+      </p:sp>
+      <p:sp>
+        <p:nvSpPr>
+          <p:cNvPr id="77" name="Rounded Rectangle 76"/>
           <p:cNvSpPr/>
           <p:nvPr/>
         </p:nvSpPr>
         <p:spPr>
           <a:xfrm>
-            <a:off x="457200" y="4251960"/>
-            <a:ext cx="2194560" cy="594360"/>
+            <a:off x="8001000" y="2999232"/>
+            <a:ext cx="3749039" cy="292608"/>
           </a:xfrm>
           <a:prstGeom prst="roundRect">
             <a:avLst/>
@@ -9666,20 +9630,56 @@
       </p:sp>
       <p:sp>
         <p:nvSpPr>
-          <p:cNvPr id="79" name="Rectangle 78"/>
+          <p:cNvPr id="78" name="TextBox 77"/>
+          <p:cNvSpPr txBox="1"/>
+          <p:nvPr/>
+        </p:nvSpPr>
+        <p:spPr>
+          <a:xfrm>
+            <a:off x="8119872" y="3035808"/>
+            <a:ext cx="3520440" cy="201168"/>
+          </a:xfrm>
+          <a:prstGeom prst="rect">
+            <a:avLst/>
+          </a:prstGeom>
+          <a:noFill/>
+        </p:spPr>
+        <p:txBody>
+          <a:bodyPr wrap="square">
+            <a:spAutoFit/>
+          </a:bodyPr>
+          <a:lstStyle/>
+          <a:p>
+            <a:pPr algn="l">
+              <a:defRPr sz="900" b="0">
+                <a:solidFill>
+                  <a:srgbClr val="C4C9D4"/>
+                </a:solidFill>
+                <a:latin typeface="Calibri"/>
+              </a:defRPr>
+            </a:pPr>
+            <a:r>
+              <a:t>Edge Compute -- Lambda@Edge, Vercel</a:t>
+            </a:r>
+          </a:p>
+        </p:txBody>
+      </p:sp>
+      <p:sp>
+        <p:nvSpPr>
+          <p:cNvPr id="79" name="Rounded Rectangle 78"/>
           <p:cNvSpPr/>
           <p:nvPr/>
         </p:nvSpPr>
         <p:spPr>
           <a:xfrm>
-            <a:off x="457200" y="4251960"/>
-            <a:ext cx="38100" cy="594360"/>
-          </a:xfrm>
-          <a:prstGeom prst="rect">
-            <a:avLst/>
-          </a:prstGeom>
-          <a:solidFill>
-            <a:srgbClr val="F87171"/>
+            <a:off x="8001000" y="3383280"/>
+            <a:ext cx="3749039" cy="292608"/>
+          </a:xfrm>
+          <a:prstGeom prst="roundRect">
+            <a:avLst/>
+          </a:prstGeom>
+          <a:solidFill>
+            <a:srgbClr val="161718"/>
           </a:solidFill>
           <a:ln>
             <a:noFill/>
@@ -9715,8 +9715,8 @@
         </p:nvSpPr>
         <p:spPr>
           <a:xfrm>
-            <a:off x="594360" y="4297680"/>
-            <a:ext cx="1920240" cy="182880"/>
+            <a:off x="8119872" y="3419856"/>
+            <a:ext cx="3520440" cy="201168"/>
           </a:xfrm>
           <a:prstGeom prst="rect">
             <a:avLst/>
@@ -9730,15 +9730,15 @@
           <a:lstStyle/>
           <a:p>
             <a:pPr algn="l">
-              <a:defRPr sz="1000" b="1">
-                <a:solidFill>
-                  <a:srgbClr val="F87171"/>
+              <a:defRPr sz="900" b="0">
+                <a:solidFill>
+                  <a:srgbClr val="C4C9D4"/>
                 </a:solidFill>
                 <a:latin typeface="Calibri"/>
               </a:defRPr>
             </a:pPr>
             <a:r>
-              <a:t>26 RSS Feeds</a:t>
+              <a:t>DNS -- Route 53, NS1, Google</a:t>
             </a:r>
           </a:p>
         </p:txBody>
@@ -9751,8 +9751,8 @@
         </p:nvSpPr>
         <p:spPr>
           <a:xfrm>
-            <a:off x="594360" y="4526280"/>
-            <a:ext cx="1920240" cy="182880"/>
+            <a:off x="457200" y="3977639"/>
+            <a:ext cx="4572000" cy="228600"/>
           </a:xfrm>
           <a:prstGeom prst="rect">
             <a:avLst/>
@@ -9766,15 +9766,15 @@
           <a:lstStyle/>
           <a:p>
             <a:pPr algn="l">
-              <a:defRPr sz="800" b="0">
-                <a:solidFill>
-                  <a:srgbClr val="8A8F98"/>
+              <a:defRPr sz="900" b="1">
+                <a:solidFill>
+                  <a:srgbClr val="5A5E66"/>
                 </a:solidFill>
                 <a:latin typeface="Calibri"/>
               </a:defRPr>
             </a:pPr>
             <a:r>
-              <a:t>Real-time incidents</a:t>
+              <a:t>THREAT INTELLIGENCE</a:t>
             </a:r>
           </a:p>
         </p:txBody>
@@ -9787,7 +9787,7 @@
         </p:nvSpPr>
         <p:spPr>
           <a:xfrm>
-            <a:off x="2788920" y="4251960"/>
+            <a:off x="457200" y="4251960"/>
             <a:ext cx="2194560" cy="594360"/>
           </a:xfrm>
           <a:prstGeom prst="roundRect">
@@ -9830,14 +9830,14 @@
         </p:nvSpPr>
         <p:spPr>
           <a:xfrm>
-            <a:off x="2788920" y="4251960"/>
+            <a:off x="457200" y="4251960"/>
             <a:ext cx="38100" cy="594360"/>
           </a:xfrm>
           <a:prstGeom prst="rect">
             <a:avLst/>
           </a:prstGeom>
           <a:solidFill>
-            <a:srgbClr val="FBBF24"/>
+            <a:srgbClr val="F87171"/>
           </a:solidFill>
           <a:ln>
             <a:noFill/>
@@ -9873,7 +9873,7 @@
         </p:nvSpPr>
         <p:spPr>
           <a:xfrm>
-            <a:off x="2926080" y="4297680"/>
+            <a:off x="594360" y="4297680"/>
             <a:ext cx="1920240" cy="182880"/>
           </a:xfrm>
           <a:prstGeom prst="rect">
@@ -9890,13 +9890,13 @@
             <a:pPr algn="l">
               <a:defRPr sz="1000" b="1">
                 <a:solidFill>
-                  <a:srgbClr val="FBBF24"/>
+                  <a:srgbClr val="F87171"/>
                 </a:solidFill>
                 <a:latin typeface="Calibri"/>
               </a:defRPr>
             </a:pPr>
             <a:r>
-              <a:t>GDELT + 5 News APIs</a:t>
+              <a:t>26 RSS Feeds</a:t>
             </a:r>
           </a:p>
         </p:txBody>
@@ -9909,7 +9909,7 @@
         </p:nvSpPr>
         <p:spPr>
           <a:xfrm>
-            <a:off x="2926080" y="4526280"/>
+            <a:off x="594360" y="4526280"/>
             <a:ext cx="1920240" cy="182880"/>
           </a:xfrm>
           <a:prstGeom prst="rect">
@@ -9932,7 +9932,7 @@
               </a:defRPr>
             </a:pPr>
             <a:r>
-              <a:t>Google, Bing, NewsAPI, GNews, MediaStack</a:t>
+              <a:t>Real-time incidents</a:t>
             </a:r>
           </a:p>
         </p:txBody>
@@ -9945,7 +9945,7 @@
         </p:nvSpPr>
         <p:spPr>
           <a:xfrm>
-            <a:off x="5120640" y="4251960"/>
+            <a:off x="2788920" y="4251960"/>
             <a:ext cx="2194560" cy="594360"/>
           </a:xfrm>
           <a:prstGeom prst="roundRect">
@@ -9988,14 +9988,14 @@
         </p:nvSpPr>
         <p:spPr>
           <a:xfrm>
-            <a:off x="5120640" y="4251960"/>
+            <a:off x="2788920" y="4251960"/>
             <a:ext cx="38100" cy="594360"/>
           </a:xfrm>
           <a:prstGeom prst="rect">
             <a:avLst/>
           </a:prstGeom>
           <a:solidFill>
-            <a:srgbClr val="60A5FA"/>
+            <a:srgbClr val="FBBF24"/>
           </a:solidFill>
           <a:ln>
             <a:noFill/>
@@ -10031,7 +10031,7 @@
         </p:nvSpPr>
         <p:spPr>
           <a:xfrm>
-            <a:off x="5257800" y="4297680"/>
+            <a:off x="2926080" y="4297680"/>
             <a:ext cx="1920240" cy="182880"/>
           </a:xfrm>
           <a:prstGeom prst="rect">
@@ -10048,13 +10048,13 @@
             <a:pPr algn="l">
               <a:defRPr sz="1000" b="1">
                 <a:solidFill>
-                  <a:srgbClr val="60A5FA"/>
+                  <a:srgbClr val="FBBF24"/>
                 </a:solidFill>
                 <a:latin typeface="Calibri"/>
               </a:defRPr>
             </a:pPr>
             <a:r>
-              <a:t>Auto-Match</a:t>
+              <a:t>GDELT + 5 News APIs</a:t>
             </a:r>
           </a:p>
         </p:txBody>
@@ -10067,7 +10067,7 @@
         </p:nvSpPr>
         <p:spPr>
           <a:xfrm>
-            <a:off x="5257800" y="4526280"/>
+            <a:off x="2926080" y="4526280"/>
             <a:ext cx="1920240" cy="182880"/>
           </a:xfrm>
           <a:prstGeom prst="rect">
@@ -10090,7 +10090,7 @@
               </a:defRPr>
             </a:pPr>
             <a:r>
-              <a:t>By industry &amp; country</a:t>
+              <a:t>Google, Bing, NewsAPI, GNews, MediaStack</a:t>
             </a:r>
           </a:p>
         </p:txBody>
@@ -10103,7 +10103,7 @@
         </p:nvSpPr>
         <p:spPr>
           <a:xfrm>
-            <a:off x="7452359" y="4251960"/>
+            <a:off x="5120640" y="4251960"/>
             <a:ext cx="2194560" cy="594360"/>
           </a:xfrm>
           <a:prstGeom prst="roundRect">
@@ -10146,14 +10146,14 @@
         </p:nvSpPr>
         <p:spPr>
           <a:xfrm>
-            <a:off x="7452359" y="4251960"/>
+            <a:off x="5120640" y="4251960"/>
             <a:ext cx="38100" cy="594360"/>
           </a:xfrm>
           <a:prstGeom prst="rect">
             <a:avLst/>
           </a:prstGeom>
           <a:solidFill>
-            <a:srgbClr val="34D399"/>
+            <a:srgbClr val="60A5FA"/>
           </a:solidFill>
           <a:ln>
             <a:noFill/>
@@ -10189,7 +10189,7 @@
         </p:nvSpPr>
         <p:spPr>
           <a:xfrm>
-            <a:off x="7589519" y="4297680"/>
+            <a:off x="5257800" y="4297680"/>
             <a:ext cx="1920240" cy="182880"/>
           </a:xfrm>
           <a:prstGeom prst="rect">
@@ -10206,13 +10206,13 @@
             <a:pPr algn="l">
               <a:defRPr sz="1000" b="1">
                 <a:solidFill>
-                  <a:srgbClr val="34D399"/>
+                  <a:srgbClr val="60A5FA"/>
                 </a:solidFill>
                 <a:latin typeface="Calibri"/>
               </a:defRPr>
             </a:pPr>
             <a:r>
-              <a:t>Trigger Emails</a:t>
+              <a:t>Auto-Match</a:t>
             </a:r>
           </a:p>
         </p:txBody>
@@ -10225,7 +10225,7 @@
         </p:nvSpPr>
         <p:spPr>
           <a:xfrm>
-            <a:off x="7589519" y="4526280"/>
+            <a:off x="5257800" y="4526280"/>
             <a:ext cx="1920240" cy="182880"/>
           </a:xfrm>
           <a:prstGeom prst="rect">
@@ -10248,7 +10248,7 @@
               </a:defRPr>
             </a:pPr>
             <a:r>
-              <a:t>Incident outreach</a:t>
+              <a:t>By industry &amp; country</a:t>
             </a:r>
           </a:p>
         </p:txBody>
@@ -10261,7 +10261,7 @@
         </p:nvSpPr>
         <p:spPr>
           <a:xfrm>
-            <a:off x="9784080" y="4251960"/>
+            <a:off x="7452359" y="4251960"/>
             <a:ext cx="2194560" cy="594360"/>
           </a:xfrm>
           <a:prstGeom prst="roundRect">
@@ -10304,14 +10304,14 @@
         </p:nvSpPr>
         <p:spPr>
           <a:xfrm>
-            <a:off x="9784080" y="4251960"/>
+            <a:off x="7452359" y="4251960"/>
             <a:ext cx="38100" cy="594360"/>
           </a:xfrm>
           <a:prstGeom prst="rect">
             <a:avLst/>
           </a:prstGeom>
           <a:solidFill>
-            <a:srgbClr val="A78BFA"/>
+            <a:srgbClr val="34D399"/>
           </a:solidFill>
           <a:ln>
             <a:noFill/>
@@ -10347,7 +10347,7 @@
         </p:nvSpPr>
         <p:spPr>
           <a:xfrm>
-            <a:off x="9921240" y="4297680"/>
+            <a:off x="7589519" y="4297680"/>
             <a:ext cx="1920240" cy="182880"/>
           </a:xfrm>
           <a:prstGeom prst="rect">
@@ -10364,13 +10364,13 @@
             <a:pPr algn="l">
               <a:defRPr sz="1000" b="1">
                 <a:solidFill>
-                  <a:srgbClr val="A78BFA"/>
+                  <a:srgbClr val="34D399"/>
                 </a:solidFill>
                 <a:latin typeface="Calibri"/>
               </a:defRPr>
             </a:pPr>
             <a:r>
-              <a:t>Nightly Cron</a:t>
+              <a:t>Trigger Emails</a:t>
             </a:r>
           </a:p>
         </p:txBody>
@@ -10383,7 +10383,7 @@
         </p:nvSpPr>
         <p:spPr>
           <a:xfrm>
-            <a:off x="9921240" y="4526280"/>
+            <a:off x="7589519" y="4526280"/>
             <a:ext cx="1920240" cy="182880"/>
           </a:xfrm>
           <a:prstGeom prst="rect">
@@ -10406,57 +10406,21 @@
               </a:defRPr>
             </a:pPr>
             <a:r>
-              <a:t>Daily scan + alerts</a:t>
-            </a:r>
-          </a:p>
-        </p:txBody>
-      </p:sp>
-      <p:sp>
-        <p:nvSpPr>
-          <p:cNvPr id="98" name="TextBox 97"/>
-          <p:cNvSpPr txBox="1"/>
-          <p:nvPr/>
-        </p:nvSpPr>
-        <p:spPr>
-          <a:xfrm>
-            <a:off x="457200" y="5074920"/>
-            <a:ext cx="4572000" cy="228600"/>
-          </a:xfrm>
-          <a:prstGeom prst="rect">
-            <a:avLst/>
-          </a:prstGeom>
-          <a:noFill/>
-        </p:spPr>
-        <p:txBody>
-          <a:bodyPr wrap="square">
-            <a:spAutoFit/>
-          </a:bodyPr>
-          <a:lstStyle/>
-          <a:p>
-            <a:pPr algn="l">
-              <a:defRPr sz="900" b="1">
-                <a:solidFill>
-                  <a:srgbClr val="5A5E66"/>
-                </a:solidFill>
-                <a:latin typeface="Calibri"/>
-              </a:defRPr>
-            </a:pPr>
-            <a:r>
-              <a:t>SECURITY &amp; INTEGRATIONS</a:t>
-            </a:r>
-          </a:p>
-        </p:txBody>
-      </p:sp>
-      <p:sp>
-        <p:nvSpPr>
-          <p:cNvPr id="99" name="Rounded Rectangle 98"/>
+              <a:t>Incident outreach</a:t>
+            </a:r>
+          </a:p>
+        </p:txBody>
+      </p:sp>
+      <p:sp>
+        <p:nvSpPr>
+          <p:cNvPr id="98" name="Rounded Rectangle 97"/>
           <p:cNvSpPr/>
           <p:nvPr/>
         </p:nvSpPr>
         <p:spPr>
           <a:xfrm>
-            <a:off x="457200" y="5349240"/>
-            <a:ext cx="1188720" cy="365760"/>
+            <a:off x="9784080" y="4251960"/>
+            <a:ext cx="2194560" cy="594360"/>
           </a:xfrm>
           <a:prstGeom prst="roundRect">
             <a:avLst/>
@@ -10492,20 +10456,20 @@
       </p:sp>
       <p:sp>
         <p:nvSpPr>
-          <p:cNvPr id="100" name="Rectangle 99"/>
+          <p:cNvPr id="99" name="Rectangle 98"/>
           <p:cNvSpPr/>
           <p:nvPr/>
         </p:nvSpPr>
         <p:spPr>
           <a:xfrm>
-            <a:off x="457200" y="5349240"/>
-            <a:ext cx="1188720" cy="38100"/>
-          </a:xfrm>
-          <a:prstGeom prst="rect">
-            <a:avLst/>
-          </a:prstGeom>
-          <a:solidFill>
-            <a:srgbClr val="34D399"/>
+            <a:off x="9784080" y="4251960"/>
+            <a:ext cx="38100" cy="594360"/>
+          </a:xfrm>
+          <a:prstGeom prst="rect">
+            <a:avLst/>
+          </a:prstGeom>
+          <a:solidFill>
+            <a:srgbClr val="A78BFA"/>
           </a:solidFill>
           <a:ln>
             <a:noFill/>
@@ -10535,14 +10499,14 @@
       </p:sp>
       <p:sp>
         <p:nvSpPr>
-          <p:cNvPr id="101" name="TextBox 100"/>
+          <p:cNvPr id="100" name="TextBox 99"/>
           <p:cNvSpPr txBox="1"/>
           <p:nvPr/>
         </p:nvSpPr>
         <p:spPr>
           <a:xfrm>
-            <a:off x="530352" y="5422392"/>
-            <a:ext cx="1097280" cy="228600"/>
+            <a:off x="9921240" y="4297680"/>
+            <a:ext cx="1920240" cy="182880"/>
           </a:xfrm>
           <a:prstGeom prst="rect">
             <a:avLst/>
@@ -10556,28 +10520,100 @@
           <a:lstStyle/>
           <a:p>
             <a:pPr algn="l">
-              <a:defRPr sz="800" b="1">
-                <a:solidFill>
-                  <a:srgbClr val="34D399"/>
+              <a:defRPr sz="1000" b="1">
+                <a:solidFill>
+                  <a:srgbClr val="A78BFA"/>
                 </a:solidFill>
                 <a:latin typeface="Calibri"/>
               </a:defRPr>
             </a:pPr>
             <a:r>
-              <a:t>Zero Trust Auth</a:t>
-            </a:r>
-          </a:p>
-        </p:txBody>
-      </p:sp>
-      <p:sp>
-        <p:nvSpPr>
-          <p:cNvPr id="102" name="Rounded Rectangle 101"/>
+              <a:t>Nightly Cron</a:t>
+            </a:r>
+          </a:p>
+        </p:txBody>
+      </p:sp>
+      <p:sp>
+        <p:nvSpPr>
+          <p:cNvPr id="101" name="TextBox 100"/>
+          <p:cNvSpPr txBox="1"/>
+          <p:nvPr/>
+        </p:nvSpPr>
+        <p:spPr>
+          <a:xfrm>
+            <a:off x="9921240" y="4526280"/>
+            <a:ext cx="1920240" cy="182880"/>
+          </a:xfrm>
+          <a:prstGeom prst="rect">
+            <a:avLst/>
+          </a:prstGeom>
+          <a:noFill/>
+        </p:spPr>
+        <p:txBody>
+          <a:bodyPr wrap="square">
+            <a:spAutoFit/>
+          </a:bodyPr>
+          <a:lstStyle/>
+          <a:p>
+            <a:pPr algn="l">
+              <a:defRPr sz="800" b="0">
+                <a:solidFill>
+                  <a:srgbClr val="8A8F98"/>
+                </a:solidFill>
+                <a:latin typeface="Calibri"/>
+              </a:defRPr>
+            </a:pPr>
+            <a:r>
+              <a:t>Daily scan + alerts</a:t>
+            </a:r>
+          </a:p>
+        </p:txBody>
+      </p:sp>
+      <p:sp>
+        <p:nvSpPr>
+          <p:cNvPr id="102" name="TextBox 101"/>
+          <p:cNvSpPr txBox="1"/>
+          <p:nvPr/>
+        </p:nvSpPr>
+        <p:spPr>
+          <a:xfrm>
+            <a:off x="457200" y="5074920"/>
+            <a:ext cx="4572000" cy="228600"/>
+          </a:xfrm>
+          <a:prstGeom prst="rect">
+            <a:avLst/>
+          </a:prstGeom>
+          <a:noFill/>
+        </p:spPr>
+        <p:txBody>
+          <a:bodyPr wrap="square">
+            <a:spAutoFit/>
+          </a:bodyPr>
+          <a:lstStyle/>
+          <a:p>
+            <a:pPr algn="l">
+              <a:defRPr sz="900" b="1">
+                <a:solidFill>
+                  <a:srgbClr val="5A5E66"/>
+                </a:solidFill>
+                <a:latin typeface="Calibri"/>
+              </a:defRPr>
+            </a:pPr>
+            <a:r>
+              <a:t>SECURITY &amp; INTEGRATIONS</a:t>
+            </a:r>
+          </a:p>
+        </p:txBody>
+      </p:sp>
+      <p:sp>
+        <p:nvSpPr>
+          <p:cNvPr id="103" name="Rounded Rectangle 102"/>
           <p:cNvSpPr/>
           <p:nvPr/>
         </p:nvSpPr>
         <p:spPr>
           <a:xfrm>
-            <a:off x="1737360" y="5349240"/>
+            <a:off x="457200" y="5349240"/>
             <a:ext cx="1188720" cy="365760"/>
           </a:xfrm>
           <a:prstGeom prst="roundRect">
@@ -10614,20 +10650,20 @@
       </p:sp>
       <p:sp>
         <p:nvSpPr>
-          <p:cNvPr id="103" name="Rectangle 102"/>
+          <p:cNvPr id="104" name="Rectangle 103"/>
           <p:cNvSpPr/>
           <p:nvPr/>
         </p:nvSpPr>
         <p:spPr>
           <a:xfrm>
-            <a:off x="1737360" y="5349240"/>
+            <a:off x="457200" y="5349240"/>
             <a:ext cx="1188720" cy="38100"/>
           </a:xfrm>
           <a:prstGeom prst="rect">
             <a:avLst/>
           </a:prstGeom>
           <a:solidFill>
-            <a:srgbClr val="60A5FA"/>
+            <a:srgbClr val="34D399"/>
           </a:solidFill>
           <a:ln>
             <a:noFill/>
@@ -10657,13 +10693,13 @@
       </p:sp>
       <p:sp>
         <p:nvSpPr>
-          <p:cNvPr id="104" name="TextBox 103"/>
+          <p:cNvPr id="105" name="TextBox 104"/>
           <p:cNvSpPr txBox="1"/>
           <p:nvPr/>
         </p:nvSpPr>
         <p:spPr>
           <a:xfrm>
-            <a:off x="1810512" y="5422392"/>
+            <a:off x="530352" y="5422392"/>
             <a:ext cx="1097280" cy="228600"/>
           </a:xfrm>
           <a:prstGeom prst="rect">
@@ -10680,26 +10716,26 @@
             <a:pPr algn="l">
               <a:defRPr sz="800" b="1">
                 <a:solidFill>
-                  <a:srgbClr val="60A5FA"/>
+                  <a:srgbClr val="34D399"/>
                 </a:solidFill>
                 <a:latin typeface="Calibri"/>
               </a:defRPr>
             </a:pPr>
             <a:r>
-              <a:t>AES-256-GCM</a:t>
-            </a:r>
-          </a:p>
-        </p:txBody>
-      </p:sp>
-      <p:sp>
-        <p:nvSpPr>
-          <p:cNvPr id="105" name="Rounded Rectangle 104"/>
+              <a:t>Zero Trust Auth</a:t>
+            </a:r>
+          </a:p>
+        </p:txBody>
+      </p:sp>
+      <p:sp>
+        <p:nvSpPr>
+          <p:cNvPr id="106" name="Rounded Rectangle 105"/>
           <p:cNvSpPr/>
           <p:nvPr/>
         </p:nvSpPr>
         <p:spPr>
           <a:xfrm>
-            <a:off x="3017520" y="5349240"/>
+            <a:off x="1737360" y="5349240"/>
             <a:ext cx="1188720" cy="365760"/>
           </a:xfrm>
           <a:prstGeom prst="roundRect">
@@ -10736,20 +10772,20 @@
       </p:sp>
       <p:sp>
         <p:nvSpPr>
-          <p:cNvPr id="106" name="Rectangle 105"/>
+          <p:cNvPr id="107" name="Rectangle 106"/>
           <p:cNvSpPr/>
           <p:nvPr/>
         </p:nvSpPr>
         <p:spPr>
           <a:xfrm>
-            <a:off x="3017520" y="5349240"/>
+            <a:off x="1737360" y="5349240"/>
             <a:ext cx="1188720" cy="38100"/>
           </a:xfrm>
           <a:prstGeom prst="rect">
             <a:avLst/>
           </a:prstGeom>
           <a:solidFill>
-            <a:srgbClr val="F87171"/>
+            <a:srgbClr val="60A5FA"/>
           </a:solidFill>
           <a:ln>
             <a:noFill/>
@@ -10779,13 +10815,13 @@
       </p:sp>
       <p:sp>
         <p:nvSpPr>
-          <p:cNvPr id="107" name="TextBox 106"/>
+          <p:cNvPr id="108" name="TextBox 107"/>
           <p:cNvSpPr txBox="1"/>
           <p:nvPr/>
         </p:nvSpPr>
         <p:spPr>
           <a:xfrm>
-            <a:off x="3090672" y="5422392"/>
+            <a:off x="1810512" y="5422392"/>
             <a:ext cx="1097280" cy="228600"/>
           </a:xfrm>
           <a:prstGeom prst="rect">
@@ -10802,26 +10838,26 @@
             <a:pPr algn="l">
               <a:defRPr sz="800" b="1">
                 <a:solidFill>
-                  <a:srgbClr val="F87171"/>
+                  <a:srgbClr val="60A5FA"/>
                 </a:solidFill>
                 <a:latin typeface="Calibri"/>
               </a:defRPr>
             </a:pPr>
             <a:r>
-              <a:t>SSRF Block</a:t>
-            </a:r>
-          </a:p>
-        </p:txBody>
-      </p:sp>
-      <p:sp>
-        <p:nvSpPr>
-          <p:cNvPr id="108" name="Rounded Rectangle 107"/>
+              <a:t>AES-256-GCM</a:t>
+            </a:r>
+          </a:p>
+        </p:txBody>
+      </p:sp>
+      <p:sp>
+        <p:nvSpPr>
+          <p:cNvPr id="109" name="Rounded Rectangle 108"/>
           <p:cNvSpPr/>
           <p:nvPr/>
         </p:nvSpPr>
         <p:spPr>
           <a:xfrm>
-            <a:off x="4297679" y="5349240"/>
+            <a:off x="3017520" y="5349240"/>
             <a:ext cx="1188720" cy="365760"/>
           </a:xfrm>
           <a:prstGeom prst="roundRect">
@@ -10858,20 +10894,20 @@
       </p:sp>
       <p:sp>
         <p:nvSpPr>
-          <p:cNvPr id="109" name="Rectangle 108"/>
+          <p:cNvPr id="110" name="Rectangle 109"/>
           <p:cNvSpPr/>
           <p:nvPr/>
         </p:nvSpPr>
         <p:spPr>
           <a:xfrm>
-            <a:off x="4297679" y="5349240"/>
+            <a:off x="3017520" y="5349240"/>
             <a:ext cx="1188720" cy="38100"/>
           </a:xfrm>
           <a:prstGeom prst="rect">
             <a:avLst/>
           </a:prstGeom>
           <a:solidFill>
-            <a:srgbClr val="FBBF24"/>
+            <a:srgbClr val="F87171"/>
           </a:solidFill>
           <a:ln>
             <a:noFill/>
@@ -10901,13 +10937,13 @@
       </p:sp>
       <p:sp>
         <p:nvSpPr>
-          <p:cNvPr id="110" name="TextBox 109"/>
+          <p:cNvPr id="111" name="TextBox 110"/>
           <p:cNvSpPr txBox="1"/>
           <p:nvPr/>
         </p:nvSpPr>
         <p:spPr>
           <a:xfrm>
-            <a:off x="4370831" y="5422392"/>
+            <a:off x="3090672" y="5422392"/>
             <a:ext cx="1097280" cy="228600"/>
           </a:xfrm>
           <a:prstGeom prst="rect">
@@ -10924,26 +10960,26 @@
             <a:pPr algn="l">
               <a:defRPr sz="800" b="1">
                 <a:solidFill>
-                  <a:srgbClr val="FBBF24"/>
+                  <a:srgbClr val="F87171"/>
                 </a:solidFill>
                 <a:latin typeface="Calibri"/>
               </a:defRPr>
             </a:pPr>
             <a:r>
-              <a:t>XSS Escaped</a:t>
-            </a:r>
-          </a:p>
-        </p:txBody>
-      </p:sp>
-      <p:sp>
-        <p:nvSpPr>
-          <p:cNvPr id="111" name="Rounded Rectangle 110"/>
+              <a:t>SSRF Block</a:t>
+            </a:r>
+          </a:p>
+        </p:txBody>
+      </p:sp>
+      <p:sp>
+        <p:nvSpPr>
+          <p:cNvPr id="112" name="Rounded Rectangle 111"/>
           <p:cNvSpPr/>
           <p:nvPr/>
         </p:nvSpPr>
         <p:spPr>
           <a:xfrm>
-            <a:off x="5577840" y="5349240"/>
+            <a:off x="4297679" y="5349240"/>
             <a:ext cx="1188720" cy="365760"/>
           </a:xfrm>
           <a:prstGeom prst="roundRect">
@@ -10980,20 +11016,20 @@
       </p:sp>
       <p:sp>
         <p:nvSpPr>
-          <p:cNvPr id="112" name="Rectangle 111"/>
+          <p:cNvPr id="113" name="Rectangle 112"/>
           <p:cNvSpPr/>
           <p:nvPr/>
         </p:nvSpPr>
         <p:spPr>
           <a:xfrm>
-            <a:off x="5577840" y="5349240"/>
+            <a:off x="4297679" y="5349240"/>
             <a:ext cx="1188720" cy="38100"/>
           </a:xfrm>
           <a:prstGeom prst="rect">
             <a:avLst/>
           </a:prstGeom>
           <a:solidFill>
-            <a:srgbClr val="A78BFA"/>
+            <a:srgbClr val="FBBF24"/>
           </a:solidFill>
           <a:ln>
             <a:noFill/>
@@ -11023,13 +11059,13 @@
       </p:sp>
       <p:sp>
         <p:nvSpPr>
-          <p:cNvPr id="113" name="TextBox 112"/>
+          <p:cNvPr id="114" name="TextBox 113"/>
           <p:cNvSpPr txBox="1"/>
           <p:nvPr/>
         </p:nvSpPr>
         <p:spPr>
           <a:xfrm>
-            <a:off x="5650992" y="5422392"/>
+            <a:off x="4370831" y="5422392"/>
             <a:ext cx="1097280" cy="228600"/>
           </a:xfrm>
           <a:prstGeom prst="rect">
@@ -11046,26 +11082,26 @@
             <a:pPr algn="l">
               <a:defRPr sz="800" b="1">
                 <a:solidFill>
-                  <a:srgbClr val="A78BFA"/>
+                  <a:srgbClr val="FBBF24"/>
                 </a:solidFill>
                 <a:latin typeface="Calibri"/>
               </a:defRPr>
             </a:pPr>
             <a:r>
-              <a:t>SOQL Safe</a:t>
-            </a:r>
-          </a:p>
-        </p:txBody>
-      </p:sp>
-      <p:sp>
-        <p:nvSpPr>
-          <p:cNvPr id="114" name="Rounded Rectangle 113"/>
+              <a:t>XSS Escaped</a:t>
+            </a:r>
+          </a:p>
+        </p:txBody>
+      </p:sp>
+      <p:sp>
+        <p:nvSpPr>
+          <p:cNvPr id="115" name="Rounded Rectangle 114"/>
           <p:cNvSpPr/>
           <p:nvPr/>
         </p:nvSpPr>
         <p:spPr>
           <a:xfrm>
-            <a:off x="6858000" y="5349240"/>
+            <a:off x="5577840" y="5349240"/>
             <a:ext cx="1188720" cy="365760"/>
           </a:xfrm>
           <a:prstGeom prst="roundRect">
@@ -11102,20 +11138,20 @@
       </p:sp>
       <p:sp>
         <p:nvSpPr>
-          <p:cNvPr id="115" name="Rectangle 114"/>
+          <p:cNvPr id="116" name="Rectangle 115"/>
           <p:cNvSpPr/>
           <p:nvPr/>
         </p:nvSpPr>
         <p:spPr>
           <a:xfrm>
-            <a:off x="6858000" y="5349240"/>
+            <a:off x="5577840" y="5349240"/>
             <a:ext cx="1188720" cy="38100"/>
           </a:xfrm>
           <a:prstGeom prst="rect">
             <a:avLst/>
           </a:prstGeom>
           <a:solidFill>
-            <a:srgbClr val="7C7FFF"/>
+            <a:srgbClr val="A78BFA"/>
           </a:solidFill>
           <a:ln>
             <a:noFill/>
@@ -11145,13 +11181,13 @@
       </p:sp>
       <p:sp>
         <p:nvSpPr>
-          <p:cNvPr id="116" name="TextBox 115"/>
+          <p:cNvPr id="117" name="TextBox 116"/>
           <p:cNvSpPr txBox="1"/>
           <p:nvPr/>
         </p:nvSpPr>
         <p:spPr>
           <a:xfrm>
-            <a:off x="6931152" y="5422392"/>
+            <a:off x="5650992" y="5422392"/>
             <a:ext cx="1097280" cy="228600"/>
           </a:xfrm>
           <a:prstGeom prst="rect">
@@ -11168,26 +11204,26 @@
             <a:pPr algn="l">
               <a:defRPr sz="800" b="1">
                 <a:solidFill>
-                  <a:srgbClr val="7C7FFF"/>
+                  <a:srgbClr val="A78BFA"/>
                 </a:solidFill>
                 <a:latin typeface="Calibri"/>
               </a:defRPr>
             </a:pPr>
             <a:r>
-              <a:t>CORS Locked</a:t>
-            </a:r>
-          </a:p>
-        </p:txBody>
-      </p:sp>
-      <p:sp>
-        <p:nvSpPr>
-          <p:cNvPr id="117" name="Rounded Rectangle 116"/>
+              <a:t>SOQL Safe</a:t>
+            </a:r>
+          </a:p>
+        </p:txBody>
+      </p:sp>
+      <p:sp>
+        <p:nvSpPr>
+          <p:cNvPr id="118" name="Rounded Rectangle 117"/>
           <p:cNvSpPr/>
           <p:nvPr/>
         </p:nvSpPr>
         <p:spPr>
           <a:xfrm>
-            <a:off x="8138159" y="5349240"/>
+            <a:off x="6858000" y="5349240"/>
             <a:ext cx="1188720" cy="365760"/>
           </a:xfrm>
           <a:prstGeom prst="roundRect">
@@ -11224,20 +11260,20 @@
       </p:sp>
       <p:sp>
         <p:nvSpPr>
-          <p:cNvPr id="118" name="Rectangle 117"/>
+          <p:cNvPr id="119" name="Rectangle 118"/>
           <p:cNvSpPr/>
           <p:nvPr/>
         </p:nvSpPr>
         <p:spPr>
           <a:xfrm>
-            <a:off x="8138159" y="5349240"/>
+            <a:off x="6858000" y="5349240"/>
             <a:ext cx="1188720" cy="38100"/>
           </a:xfrm>
           <a:prstGeom prst="rect">
             <a:avLst/>
           </a:prstGeom>
           <a:solidFill>
-            <a:srgbClr val="34D399"/>
+            <a:srgbClr val="7C7FFF"/>
           </a:solidFill>
           <a:ln>
             <a:noFill/>
@@ -11267,13 +11303,13 @@
       </p:sp>
       <p:sp>
         <p:nvSpPr>
-          <p:cNvPr id="119" name="TextBox 118"/>
+          <p:cNvPr id="120" name="TextBox 119"/>
           <p:cNvSpPr txBox="1"/>
           <p:nvPr/>
         </p:nvSpPr>
         <p:spPr>
           <a:xfrm>
-            <a:off x="8211311" y="5422392"/>
+            <a:off x="6931152" y="5422392"/>
             <a:ext cx="1097280" cy="228600"/>
           </a:xfrm>
           <a:prstGeom prst="rect">
@@ -11290,26 +11326,26 @@
             <a:pPr algn="l">
               <a:defRPr sz="800" b="1">
                 <a:solidFill>
-                  <a:srgbClr val="34D399"/>
+                  <a:srgbClr val="7C7FFF"/>
                 </a:solidFill>
                 <a:latin typeface="Calibri"/>
               </a:defRPr>
             </a:pPr>
             <a:r>
-              <a:t>Gmail OAuth</a:t>
-            </a:r>
-          </a:p>
-        </p:txBody>
-      </p:sp>
-      <p:sp>
-        <p:nvSpPr>
-          <p:cNvPr id="120" name="Rounded Rectangle 119"/>
+              <a:t>CORS Locked</a:t>
+            </a:r>
+          </a:p>
+        </p:txBody>
+      </p:sp>
+      <p:sp>
+        <p:nvSpPr>
+          <p:cNvPr id="121" name="Rounded Rectangle 120"/>
           <p:cNvSpPr/>
           <p:nvPr/>
         </p:nvSpPr>
         <p:spPr>
           <a:xfrm>
-            <a:off x="9418319" y="5349240"/>
+            <a:off x="8138159" y="5349240"/>
             <a:ext cx="1188720" cy="365760"/>
           </a:xfrm>
           <a:prstGeom prst="roundRect">
@@ -11346,20 +11382,20 @@
       </p:sp>
       <p:sp>
         <p:nvSpPr>
-          <p:cNvPr id="121" name="Rectangle 120"/>
+          <p:cNvPr id="122" name="Rectangle 121"/>
           <p:cNvSpPr/>
           <p:nvPr/>
         </p:nvSpPr>
         <p:spPr>
           <a:xfrm>
-            <a:off x="9418319" y="5349240"/>
+            <a:off x="8138159" y="5349240"/>
             <a:ext cx="1188720" cy="38100"/>
           </a:xfrm>
           <a:prstGeom prst="rect">
             <a:avLst/>
           </a:prstGeom>
           <a:solidFill>
-            <a:srgbClr val="60A5FA"/>
+            <a:srgbClr val="34D399"/>
           </a:solidFill>
           <a:ln>
             <a:noFill/>
@@ -11389,13 +11425,13 @@
       </p:sp>
       <p:sp>
         <p:nvSpPr>
-          <p:cNvPr id="122" name="TextBox 121"/>
+          <p:cNvPr id="123" name="TextBox 122"/>
           <p:cNvSpPr txBox="1"/>
           <p:nvPr/>
         </p:nvSpPr>
         <p:spPr>
           <a:xfrm>
-            <a:off x="9491471" y="5422392"/>
+            <a:off x="8211311" y="5422392"/>
             <a:ext cx="1097280" cy="228600"/>
           </a:xfrm>
           <a:prstGeom prst="rect">
@@ -11412,26 +11448,26 @@
             <a:pPr algn="l">
               <a:defRPr sz="800" b="1">
                 <a:solidFill>
-                  <a:srgbClr val="60A5FA"/>
+                  <a:srgbClr val="34D399"/>
                 </a:solidFill>
                 <a:latin typeface="Calibri"/>
               </a:defRPr>
             </a:pPr>
             <a:r>
-              <a:t>Salesforce OAuth</a:t>
-            </a:r>
-          </a:p>
-        </p:txBody>
-      </p:sp>
-      <p:sp>
-        <p:nvSpPr>
-          <p:cNvPr id="123" name="Rounded Rectangle 122"/>
+              <a:t>Gmail OAuth</a:t>
+            </a:r>
+          </a:p>
+        </p:txBody>
+      </p:sp>
+      <p:sp>
+        <p:nvSpPr>
+          <p:cNvPr id="124" name="Rounded Rectangle 123"/>
           <p:cNvSpPr/>
           <p:nvPr/>
         </p:nvSpPr>
         <p:spPr>
           <a:xfrm>
-            <a:off x="10698480" y="5349240"/>
+            <a:off x="9418319" y="5349240"/>
             <a:ext cx="1188720" cy="365760"/>
           </a:xfrm>
           <a:prstGeom prst="roundRect">
@@ -11468,20 +11504,20 @@
       </p:sp>
       <p:sp>
         <p:nvSpPr>
-          <p:cNvPr id="124" name="Rectangle 123"/>
+          <p:cNvPr id="125" name="Rectangle 124"/>
           <p:cNvSpPr/>
           <p:nvPr/>
         </p:nvSpPr>
         <p:spPr>
           <a:xfrm>
-            <a:off x="10698480" y="5349240"/>
+            <a:off x="9418319" y="5349240"/>
             <a:ext cx="1188720" cy="38100"/>
           </a:xfrm>
           <a:prstGeom prst="rect">
             <a:avLst/>
           </a:prstGeom>
           <a:solidFill>
-            <a:srgbClr val="A78BFA"/>
+            <a:srgbClr val="60A5FA"/>
           </a:solidFill>
           <a:ln>
             <a:noFill/>
@@ -11511,7 +11547,129 @@
       </p:sp>
       <p:sp>
         <p:nvSpPr>
-          <p:cNvPr id="125" name="TextBox 124"/>
+          <p:cNvPr id="126" name="TextBox 125"/>
+          <p:cNvSpPr txBox="1"/>
+          <p:nvPr/>
+        </p:nvSpPr>
+        <p:spPr>
+          <a:xfrm>
+            <a:off x="9491471" y="5422392"/>
+            <a:ext cx="1097280" cy="228600"/>
+          </a:xfrm>
+          <a:prstGeom prst="rect">
+            <a:avLst/>
+          </a:prstGeom>
+          <a:noFill/>
+        </p:spPr>
+        <p:txBody>
+          <a:bodyPr wrap="square">
+            <a:spAutoFit/>
+          </a:bodyPr>
+          <a:lstStyle/>
+          <a:p>
+            <a:pPr algn="l">
+              <a:defRPr sz="800" b="1">
+                <a:solidFill>
+                  <a:srgbClr val="60A5FA"/>
+                </a:solidFill>
+                <a:latin typeface="Calibri"/>
+              </a:defRPr>
+            </a:pPr>
+            <a:r>
+              <a:t>Salesforce OAuth</a:t>
+            </a:r>
+          </a:p>
+        </p:txBody>
+      </p:sp>
+      <p:sp>
+        <p:nvSpPr>
+          <p:cNvPr id="127" name="Rounded Rectangle 126"/>
+          <p:cNvSpPr/>
+          <p:nvPr/>
+        </p:nvSpPr>
+        <p:spPr>
+          <a:xfrm>
+            <a:off x="10698480" y="5349240"/>
+            <a:ext cx="1188720" cy="365760"/>
+          </a:xfrm>
+          <a:prstGeom prst="roundRect">
+            <a:avLst/>
+          </a:prstGeom>
+          <a:solidFill>
+            <a:srgbClr val="161718"/>
+          </a:solidFill>
+          <a:ln>
+            <a:noFill/>
+          </a:ln>
+        </p:spPr>
+        <p:style>
+          <a:lnRef idx="1">
+            <a:schemeClr val="accent1"/>
+          </a:lnRef>
+          <a:fillRef idx="3">
+            <a:schemeClr val="accent1"/>
+          </a:fillRef>
+          <a:effectRef idx="2">
+            <a:schemeClr val="accent1"/>
+          </a:effectRef>
+          <a:fontRef idx="minor">
+            <a:schemeClr val="lt1"/>
+          </a:fontRef>
+        </p:style>
+        <p:txBody>
+          <a:bodyPr rtlCol="0" anchor="ctr"/>
+          <a:lstStyle/>
+          <a:p>
+            <a:pPr algn="ctr"/>
+          </a:p>
+        </p:txBody>
+      </p:sp>
+      <p:sp>
+        <p:nvSpPr>
+          <p:cNvPr id="128" name="Rectangle 127"/>
+          <p:cNvSpPr/>
+          <p:nvPr/>
+        </p:nvSpPr>
+        <p:spPr>
+          <a:xfrm>
+            <a:off x="10698480" y="5349240"/>
+            <a:ext cx="1188720" cy="38100"/>
+          </a:xfrm>
+          <a:prstGeom prst="rect">
+            <a:avLst/>
+          </a:prstGeom>
+          <a:solidFill>
+            <a:srgbClr val="A78BFA"/>
+          </a:solidFill>
+          <a:ln>
+            <a:noFill/>
+          </a:ln>
+        </p:spPr>
+        <p:style>
+          <a:lnRef idx="1">
+            <a:schemeClr val="accent1"/>
+          </a:lnRef>
+          <a:fillRef idx="3">
+            <a:schemeClr val="accent1"/>
+          </a:fillRef>
+          <a:effectRef idx="2">
+            <a:schemeClr val="accent1"/>
+          </a:effectRef>
+          <a:fontRef idx="minor">
+            <a:schemeClr val="lt1"/>
+          </a:fontRef>
+        </p:style>
+        <p:txBody>
+          <a:bodyPr rtlCol="0" anchor="ctr"/>
+          <a:lstStyle/>
+          <a:p>
+            <a:pPr algn="ctr"/>
+          </a:p>
+        </p:txBody>
+      </p:sp>
+      <p:sp>
+        <p:nvSpPr>
+          <p:cNvPr id="129" name="TextBox 128"/>
           <p:cNvSpPr txBox="1"/>
           <p:nvPr/>
         </p:nvSpPr>

--- a/RevFlare-Presentation.pptx
+++ b/RevFlare-Presentation.pptx
@@ -12,6 +12,7 @@
     <p:sldId id="260" r:id="rId11"/>
     <p:sldId id="261" r:id="rId12"/>
     <p:sldId id="262" r:id="rId13"/>
+    <p:sldId id="263" r:id="rId14"/>
   </p:sldIdLst>
   <p:sldSz cx="12191695" cy="6858000" type="screen4x3"/>
   <p:notesSz cx="6858000" cy="9144000"/>
@@ -3248,7 +3249,7 @@
               </a:defRPr>
             </a:pPr>
             <a:r>
-              <a:t>A single Cloudflare Worker powering deep account research, persona-curated outreach, competitive intelligence, threat monitoring, and autonomous pipeline generation.</a:t>
+              <a:t>A single Cloudflare Worker powering deep account research, persona-curated outreach, competitive intelligence, threat monitoring, autonomous pipeline generation, MCP integrations, and compliant email execution.</a:t>
             </a:r>
           </a:p>
         </p:txBody>
@@ -3425,7 +3426,7 @@
               </a:defRPr>
             </a:pPr>
             <a:r>
-              <a:t>RevFlare transforms how sales teams prospect, research, and close deals.</a:t>
+              <a:t>RevFlare transforms how sales teams prospect, research, approve, and close deals.</a:t>
             </a:r>
           </a:p>
         </p:txBody>
@@ -3741,7 +3742,7 @@
               </a:defRPr>
             </a:pPr>
             <a:r>
-              <a:t>25 persona-specific variants with live data. Not templates.</a:t>
+              <a:t>25 persona variants + AI chat refinement. Not templates.</a:t>
             </a:r>
           </a:p>
         </p:txBody>
@@ -4021,7 +4022,7 @@
               </a:defRPr>
             </a:pPr>
             <a:r>
-              <a:t>$0 Infrastructure Cost</a:t>
+              <a:t>Open Ecosystem</a:t>
             </a:r>
           </a:p>
         </p:txBody>
@@ -4057,7 +4058,7 @@
               </a:defRPr>
             </a:pPr>
             <a:r>
-              <a:t>Runs entirely on Cloudflare. No servers, no SaaS fees.</a:t>
+              <a:t>MCP client + server. Bring your own tools &amp; agents.</a:t>
             </a:r>
           </a:p>
         </p:txBody>
@@ -5480,7 +5481,7 @@
               </a:defRPr>
             </a:pPr>
             <a:r>
-              <a:t>Database</a:t>
+              <a:t>29 tables</a:t>
             </a:r>
           </a:p>
         </p:txBody>
@@ -6076,7 +6077,7 @@
               </a:defRPr>
             </a:pPr>
             <a:r>
-              <a:t>Access</a:t>
+              <a:t>Cron</a:t>
             </a:r>
           </a:p>
         </p:txBody>
@@ -6112,7 +6113,7 @@
               </a:defRPr>
             </a:pPr>
             <a:r>
-              <a:t>Auth</a:t>
+              <a:t>Auto-send</a:t>
             </a:r>
           </a:p>
         </p:txBody>
@@ -6700,7 +6701,7 @@
               </a:defRPr>
             </a:pPr>
             <a:r>
-              <a:t>16 Features + Competitive Intelligence</a:t>
+              <a:t>20 Features + Competitive Intelligence</a:t>
             </a:r>
           </a:p>
         </p:txBody>
@@ -6714,7 +6715,7 @@
         <p:spPr>
           <a:xfrm>
             <a:off x="457200" y="1234440"/>
-            <a:ext cx="1371600" cy="640080"/>
+            <a:ext cx="1371600" cy="566928"/>
           </a:xfrm>
           <a:prstGeom prst="roundRect">
             <a:avLst/>
@@ -6799,7 +6800,7 @@
         </p:nvSpPr>
         <p:spPr>
           <a:xfrm>
-            <a:off x="530352" y="1307592"/>
+            <a:off x="530352" y="1289304"/>
             <a:ext cx="1234440" cy="201168"/>
           </a:xfrm>
           <a:prstGeom prst="rect">
@@ -6835,7 +6836,7 @@
         </p:nvSpPr>
         <p:spPr>
           <a:xfrm>
-            <a:off x="530352" y="1527048"/>
+            <a:off x="530352" y="1490472"/>
             <a:ext cx="1234440" cy="274320"/>
           </a:xfrm>
           <a:prstGeom prst="rect">
@@ -6872,7 +6873,7 @@
         <p:spPr>
           <a:xfrm>
             <a:off x="1965960" y="1234440"/>
-            <a:ext cx="1371600" cy="640080"/>
+            <a:ext cx="1371600" cy="566928"/>
           </a:xfrm>
           <a:prstGeom prst="roundRect">
             <a:avLst/>
@@ -6957,7 +6958,7 @@
         </p:nvSpPr>
         <p:spPr>
           <a:xfrm>
-            <a:off x="2039112" y="1307592"/>
+            <a:off x="2039112" y="1289304"/>
             <a:ext cx="1234440" cy="201168"/>
           </a:xfrm>
           <a:prstGeom prst="rect">
@@ -6993,7 +6994,7 @@
         </p:nvSpPr>
         <p:spPr>
           <a:xfrm>
-            <a:off x="2039112" y="1527048"/>
+            <a:off x="2039112" y="1490472"/>
             <a:ext cx="1234440" cy="274320"/>
           </a:xfrm>
           <a:prstGeom prst="rect">
@@ -7030,7 +7031,7 @@
         <p:spPr>
           <a:xfrm>
             <a:off x="3474720" y="1234440"/>
-            <a:ext cx="1371600" cy="640080"/>
+            <a:ext cx="1371600" cy="566928"/>
           </a:xfrm>
           <a:prstGeom prst="roundRect">
             <a:avLst/>
@@ -7115,7 +7116,7 @@
         </p:nvSpPr>
         <p:spPr>
           <a:xfrm>
-            <a:off x="3547872" y="1307592"/>
+            <a:off x="3547872" y="1289304"/>
             <a:ext cx="1234440" cy="201168"/>
           </a:xfrm>
           <a:prstGeom prst="rect">
@@ -7151,7 +7152,7 @@
         </p:nvSpPr>
         <p:spPr>
           <a:xfrm>
-            <a:off x="3547872" y="1527048"/>
+            <a:off x="3547872" y="1490472"/>
             <a:ext cx="1234440" cy="274320"/>
           </a:xfrm>
           <a:prstGeom prst="rect">
@@ -7188,7 +7189,7 @@
         <p:spPr>
           <a:xfrm>
             <a:off x="4983479" y="1234440"/>
-            <a:ext cx="1371600" cy="640080"/>
+            <a:ext cx="1371600" cy="566928"/>
           </a:xfrm>
           <a:prstGeom prst="roundRect">
             <a:avLst/>
@@ -7273,7 +7274,7 @@
         </p:nvSpPr>
         <p:spPr>
           <a:xfrm>
-            <a:off x="5056631" y="1307592"/>
+            <a:off x="5056631" y="1289304"/>
             <a:ext cx="1234440" cy="201168"/>
           </a:xfrm>
           <a:prstGeom prst="rect">
@@ -7309,7 +7310,7 @@
         </p:nvSpPr>
         <p:spPr>
           <a:xfrm>
-            <a:off x="5056631" y="1527048"/>
+            <a:off x="5056631" y="1490472"/>
             <a:ext cx="1234440" cy="274320"/>
           </a:xfrm>
           <a:prstGeom prst="rect">
@@ -7346,7 +7347,7 @@
         <p:spPr>
           <a:xfrm>
             <a:off x="6492240" y="1234440"/>
-            <a:ext cx="1371600" cy="640080"/>
+            <a:ext cx="1371600" cy="566928"/>
           </a:xfrm>
           <a:prstGeom prst="roundRect">
             <a:avLst/>
@@ -7431,7 +7432,7 @@
         </p:nvSpPr>
         <p:spPr>
           <a:xfrm>
-            <a:off x="6565392" y="1307592"/>
+            <a:off x="6565392" y="1289304"/>
             <a:ext cx="1234440" cy="201168"/>
           </a:xfrm>
           <a:prstGeom prst="rect">
@@ -7467,7 +7468,7 @@
         </p:nvSpPr>
         <p:spPr>
           <a:xfrm>
-            <a:off x="6565392" y="1527048"/>
+            <a:off x="6565392" y="1490472"/>
             <a:ext cx="1234440" cy="274320"/>
           </a:xfrm>
           <a:prstGeom prst="rect">
@@ -7490,7 +7491,7 @@
               </a:defRPr>
             </a:pPr>
             <a:r>
-              <a:t>Multi-touch</a:t>
+              <a:t>Auto-execute</a:t>
             </a:r>
           </a:p>
         </p:txBody>
@@ -7503,8 +7504,8 @@
         </p:nvSpPr>
         <p:spPr>
           <a:xfrm>
-            <a:off x="457200" y="2011680"/>
-            <a:ext cx="1371600" cy="640080"/>
+            <a:off x="457200" y="1920240"/>
+            <a:ext cx="1371600" cy="566928"/>
           </a:xfrm>
           <a:prstGeom prst="roundRect">
             <a:avLst/>
@@ -7546,7 +7547,7 @@
         </p:nvSpPr>
         <p:spPr>
           <a:xfrm>
-            <a:off x="457200" y="2011680"/>
+            <a:off x="457200" y="1920240"/>
             <a:ext cx="1371600" cy="38100"/>
           </a:xfrm>
           <a:prstGeom prst="rect">
@@ -7589,7 +7590,7 @@
         </p:nvSpPr>
         <p:spPr>
           <a:xfrm>
-            <a:off x="530352" y="2084832"/>
+            <a:off x="530352" y="1975104"/>
             <a:ext cx="1234440" cy="201168"/>
           </a:xfrm>
           <a:prstGeom prst="rect">
@@ -7625,7 +7626,7 @@
         </p:nvSpPr>
         <p:spPr>
           <a:xfrm>
-            <a:off x="530352" y="2304288"/>
+            <a:off x="530352" y="2176272"/>
             <a:ext cx="1234440" cy="274320"/>
           </a:xfrm>
           <a:prstGeom prst="rect">
@@ -7661,8 +7662,8 @@
         </p:nvSpPr>
         <p:spPr>
           <a:xfrm>
-            <a:off x="1965960" y="2011680"/>
-            <a:ext cx="1371600" cy="640080"/>
+            <a:off x="1965960" y="1920240"/>
+            <a:ext cx="1371600" cy="566928"/>
           </a:xfrm>
           <a:prstGeom prst="roundRect">
             <a:avLst/>
@@ -7704,7 +7705,7 @@
         </p:nvSpPr>
         <p:spPr>
           <a:xfrm>
-            <a:off x="1965960" y="2011680"/>
+            <a:off x="1965960" y="1920240"/>
             <a:ext cx="1371600" cy="38100"/>
           </a:xfrm>
           <a:prstGeom prst="rect">
@@ -7747,7 +7748,7 @@
         </p:nvSpPr>
         <p:spPr>
           <a:xfrm>
-            <a:off x="2039112" y="2084832"/>
+            <a:off x="2039112" y="1975104"/>
             <a:ext cx="1234440" cy="201168"/>
           </a:xfrm>
           <a:prstGeom prst="rect">
@@ -7783,7 +7784,7 @@
         </p:nvSpPr>
         <p:spPr>
           <a:xfrm>
-            <a:off x="2039112" y="2304288"/>
+            <a:off x="2039112" y="2176272"/>
             <a:ext cx="1234440" cy="274320"/>
           </a:xfrm>
           <a:prstGeom prst="rect">
@@ -7819,8 +7820,8 @@
         </p:nvSpPr>
         <p:spPr>
           <a:xfrm>
-            <a:off x="3474720" y="2011680"/>
-            <a:ext cx="1371600" cy="640080"/>
+            <a:off x="3474720" y="1920240"/>
+            <a:ext cx="1371600" cy="566928"/>
           </a:xfrm>
           <a:prstGeom prst="roundRect">
             <a:avLst/>
@@ -7862,7 +7863,7 @@
         </p:nvSpPr>
         <p:spPr>
           <a:xfrm>
-            <a:off x="3474720" y="2011680"/>
+            <a:off x="3474720" y="1920240"/>
             <a:ext cx="1371600" cy="38100"/>
           </a:xfrm>
           <a:prstGeom prst="rect">
@@ -7905,7 +7906,7 @@
         </p:nvSpPr>
         <p:spPr>
           <a:xfrm>
-            <a:off x="3547872" y="2084832"/>
+            <a:off x="3547872" y="1975104"/>
             <a:ext cx="1234440" cy="201168"/>
           </a:xfrm>
           <a:prstGeom prst="rect">
@@ -7941,7 +7942,7 @@
         </p:nvSpPr>
         <p:spPr>
           <a:xfrm>
-            <a:off x="3547872" y="2304288"/>
+            <a:off x="3547872" y="2176272"/>
             <a:ext cx="1234440" cy="274320"/>
           </a:xfrm>
           <a:prstGeom prst="rect">
@@ -7977,8 +7978,8 @@
         </p:nvSpPr>
         <p:spPr>
           <a:xfrm>
-            <a:off x="4983479" y="2011680"/>
-            <a:ext cx="1371600" cy="640080"/>
+            <a:off x="4983479" y="1920240"/>
+            <a:ext cx="1371600" cy="566928"/>
           </a:xfrm>
           <a:prstGeom prst="roundRect">
             <a:avLst/>
@@ -8020,7 +8021,7 @@
         </p:nvSpPr>
         <p:spPr>
           <a:xfrm>
-            <a:off x="4983479" y="2011680"/>
+            <a:off x="4983479" y="1920240"/>
             <a:ext cx="1371600" cy="38100"/>
           </a:xfrm>
           <a:prstGeom prst="rect">
@@ -8063,7 +8064,7 @@
         </p:nvSpPr>
         <p:spPr>
           <a:xfrm>
-            <a:off x="5056631" y="2084832"/>
+            <a:off x="5056631" y="1975104"/>
             <a:ext cx="1234440" cy="201168"/>
           </a:xfrm>
           <a:prstGeom prst="rect">
@@ -8099,7 +8100,7 @@
         </p:nvSpPr>
         <p:spPr>
           <a:xfrm>
-            <a:off x="5056631" y="2304288"/>
+            <a:off x="5056631" y="2176272"/>
             <a:ext cx="1234440" cy="274320"/>
           </a:xfrm>
           <a:prstGeom prst="rect">
@@ -8122,7 +8123,7 @@
               </a:defRPr>
             </a:pPr>
             <a:r>
-              <a:t>Signals</a:t>
+              <a:t>+ AI products</a:t>
             </a:r>
           </a:p>
         </p:txBody>
@@ -8135,8 +8136,8 @@
         </p:nvSpPr>
         <p:spPr>
           <a:xfrm>
-            <a:off x="6492240" y="2011680"/>
-            <a:ext cx="1371600" cy="640080"/>
+            <a:off x="6492240" y="1920240"/>
+            <a:ext cx="1371600" cy="566928"/>
           </a:xfrm>
           <a:prstGeom prst="roundRect">
             <a:avLst/>
@@ -8178,7 +8179,7 @@
         </p:nvSpPr>
         <p:spPr>
           <a:xfrm>
-            <a:off x="6492240" y="2011680"/>
+            <a:off x="6492240" y="1920240"/>
             <a:ext cx="1371600" cy="38100"/>
           </a:xfrm>
           <a:prstGeom prst="rect">
@@ -8221,7 +8222,7 @@
         </p:nvSpPr>
         <p:spPr>
           <a:xfrm>
-            <a:off x="6565392" y="2084832"/>
+            <a:off x="6565392" y="1975104"/>
             <a:ext cx="1234440" cy="201168"/>
           </a:xfrm>
           <a:prstGeom prst="rect">
@@ -8257,7 +8258,7 @@
         </p:nvSpPr>
         <p:spPr>
           <a:xfrm>
-            <a:off x="6565392" y="2304288"/>
+            <a:off x="6565392" y="2176272"/>
             <a:ext cx="1234440" cy="274320"/>
           </a:xfrm>
           <a:prstGeom prst="rect">
@@ -8293,8 +8294,8 @@
         </p:nvSpPr>
         <p:spPr>
           <a:xfrm>
-            <a:off x="457200" y="2788920"/>
-            <a:ext cx="1371600" cy="640080"/>
+            <a:off x="457200" y="2606040"/>
+            <a:ext cx="1371600" cy="566928"/>
           </a:xfrm>
           <a:prstGeom prst="roundRect">
             <a:avLst/>
@@ -8336,7 +8337,7 @@
         </p:nvSpPr>
         <p:spPr>
           <a:xfrm>
-            <a:off x="457200" y="2788920"/>
+            <a:off x="457200" y="2606040"/>
             <a:ext cx="1371600" cy="38100"/>
           </a:xfrm>
           <a:prstGeom prst="rect">
@@ -8379,43 +8380,43 @@
         </p:nvSpPr>
         <p:spPr>
           <a:xfrm>
+            <a:off x="530352" y="2660904"/>
+            <a:ext cx="1234440" cy="201168"/>
+          </a:xfrm>
+          <a:prstGeom prst="rect">
+            <a:avLst/>
+          </a:prstGeom>
+          <a:noFill/>
+        </p:spPr>
+        <p:txBody>
+          <a:bodyPr wrap="square">
+            <a:spAutoFit/>
+          </a:bodyPr>
+          <a:lstStyle/>
+          <a:p>
+            <a:pPr algn="l">
+              <a:defRPr sz="1000" b="1">
+                <a:solidFill>
+                  <a:srgbClr val="A78BFA"/>
+                </a:solidFill>
+                <a:latin typeface="Calibri"/>
+              </a:defRPr>
+            </a:pPr>
+            <a:r>
+              <a:t>Playbooks</a:t>
+            </a:r>
+          </a:p>
+        </p:txBody>
+      </p:sp>
+      <p:sp>
+        <p:nvSpPr>
+          <p:cNvPr id="47" name="TextBox 46"/>
+          <p:cNvSpPr txBox="1"/>
+          <p:nvPr/>
+        </p:nvSpPr>
+        <p:spPr>
+          <a:xfrm>
             <a:off x="530352" y="2862072"/>
-            <a:ext cx="1234440" cy="201168"/>
-          </a:xfrm>
-          <a:prstGeom prst="rect">
-            <a:avLst/>
-          </a:prstGeom>
-          <a:noFill/>
-        </p:spPr>
-        <p:txBody>
-          <a:bodyPr wrap="square">
-            <a:spAutoFit/>
-          </a:bodyPr>
-          <a:lstStyle/>
-          <a:p>
-            <a:pPr algn="l">
-              <a:defRPr sz="1000" b="1">
-                <a:solidFill>
-                  <a:srgbClr val="A78BFA"/>
-                </a:solidFill>
-                <a:latin typeface="Calibri"/>
-              </a:defRPr>
-            </a:pPr>
-            <a:r>
-              <a:t>Playbooks</a:t>
-            </a:r>
-          </a:p>
-        </p:txBody>
-      </p:sp>
-      <p:sp>
-        <p:nvSpPr>
-          <p:cNvPr id="47" name="TextBox 46"/>
-          <p:cNvSpPr txBox="1"/>
-          <p:nvPr/>
-        </p:nvSpPr>
-        <p:spPr>
-          <a:xfrm>
-            <a:off x="530352" y="3081528"/>
             <a:ext cx="1234440" cy="274320"/>
           </a:xfrm>
           <a:prstGeom prst="rect">
@@ -8451,8 +8452,8 @@
         </p:nvSpPr>
         <p:spPr>
           <a:xfrm>
-            <a:off x="1965960" y="2788920"/>
-            <a:ext cx="1371600" cy="640080"/>
+            <a:off x="1965960" y="2606040"/>
+            <a:ext cx="1371600" cy="566928"/>
           </a:xfrm>
           <a:prstGeom prst="roundRect">
             <a:avLst/>
@@ -8494,7 +8495,7 @@
         </p:nvSpPr>
         <p:spPr>
           <a:xfrm>
-            <a:off x="1965960" y="2788920"/>
+            <a:off x="1965960" y="2606040"/>
             <a:ext cx="1371600" cy="38100"/>
           </a:xfrm>
           <a:prstGeom prst="rect">
@@ -8537,43 +8538,43 @@
         </p:nvSpPr>
         <p:spPr>
           <a:xfrm>
+            <a:off x="2039112" y="2660904"/>
+            <a:ext cx="1234440" cy="201168"/>
+          </a:xfrm>
+          <a:prstGeom prst="rect">
+            <a:avLst/>
+          </a:prstGeom>
+          <a:noFill/>
+        </p:spPr>
+        <p:txBody>
+          <a:bodyPr wrap="square">
+            <a:spAutoFit/>
+          </a:bodyPr>
+          <a:lstStyle/>
+          <a:p>
+            <a:pPr algn="l">
+              <a:defRPr sz="1000" b="1">
+                <a:solidFill>
+                  <a:srgbClr val="FBBF24"/>
+                </a:solidFill>
+                <a:latin typeface="Calibri"/>
+              </a:defRPr>
+            </a:pPr>
+            <a:r>
+              <a:t>Search</a:t>
+            </a:r>
+          </a:p>
+        </p:txBody>
+      </p:sp>
+      <p:sp>
+        <p:nvSpPr>
+          <p:cNvPr id="51" name="TextBox 50"/>
+          <p:cNvSpPr txBox="1"/>
+          <p:nvPr/>
+        </p:nvSpPr>
+        <p:spPr>
+          <a:xfrm>
             <a:off x="2039112" y="2862072"/>
-            <a:ext cx="1234440" cy="201168"/>
-          </a:xfrm>
-          <a:prstGeom prst="rect">
-            <a:avLst/>
-          </a:prstGeom>
-          <a:noFill/>
-        </p:spPr>
-        <p:txBody>
-          <a:bodyPr wrap="square">
-            <a:spAutoFit/>
-          </a:bodyPr>
-          <a:lstStyle/>
-          <a:p>
-            <a:pPr algn="l">
-              <a:defRPr sz="1000" b="1">
-                <a:solidFill>
-                  <a:srgbClr val="FBBF24"/>
-                </a:solidFill>
-                <a:latin typeface="Calibri"/>
-              </a:defRPr>
-            </a:pPr>
-            <a:r>
-              <a:t>Search</a:t>
-            </a:r>
-          </a:p>
-        </p:txBody>
-      </p:sp>
-      <p:sp>
-        <p:nvSpPr>
-          <p:cNvPr id="51" name="TextBox 50"/>
-          <p:cNvSpPr txBox="1"/>
-          <p:nvPr/>
-        </p:nvSpPr>
-        <p:spPr>
-          <a:xfrm>
-            <a:off x="2039112" y="3081528"/>
             <a:ext cx="1234440" cy="274320"/>
           </a:xfrm>
           <a:prstGeom prst="rect">
@@ -8609,8 +8610,8 @@
         </p:nvSpPr>
         <p:spPr>
           <a:xfrm>
-            <a:off x="3474720" y="2788920"/>
-            <a:ext cx="1371600" cy="640080"/>
+            <a:off x="3474720" y="2606040"/>
+            <a:ext cx="1371600" cy="566928"/>
           </a:xfrm>
           <a:prstGeom prst="roundRect">
             <a:avLst/>
@@ -8652,7 +8653,7 @@
         </p:nvSpPr>
         <p:spPr>
           <a:xfrm>
-            <a:off x="3474720" y="2788920"/>
+            <a:off x="3474720" y="2606040"/>
             <a:ext cx="1371600" cy="38100"/>
           </a:xfrm>
           <a:prstGeom prst="rect">
@@ -8695,43 +8696,43 @@
         </p:nvSpPr>
         <p:spPr>
           <a:xfrm>
+            <a:off x="3547872" y="2660904"/>
+            <a:ext cx="1234440" cy="201168"/>
+          </a:xfrm>
+          <a:prstGeom prst="rect">
+            <a:avLst/>
+          </a:prstGeom>
+          <a:noFill/>
+        </p:spPr>
+        <p:txBody>
+          <a:bodyPr wrap="square">
+            <a:spAutoFit/>
+          </a:bodyPr>
+          <a:lstStyle/>
+          <a:p>
+            <a:pPr algn="l">
+              <a:defRPr sz="1000" b="1">
+                <a:solidFill>
+                  <a:srgbClr val="34D399"/>
+                </a:solidFill>
+                <a:latin typeface="Calibri"/>
+              </a:defRPr>
+            </a:pPr>
+            <a:r>
+              <a:t>Pipeline</a:t>
+            </a:r>
+          </a:p>
+        </p:txBody>
+      </p:sp>
+      <p:sp>
+        <p:nvSpPr>
+          <p:cNvPr id="55" name="TextBox 54"/>
+          <p:cNvSpPr txBox="1"/>
+          <p:nvPr/>
+        </p:nvSpPr>
+        <p:spPr>
+          <a:xfrm>
             <a:off x="3547872" y="2862072"/>
-            <a:ext cx="1234440" cy="201168"/>
-          </a:xfrm>
-          <a:prstGeom prst="rect">
-            <a:avLst/>
-          </a:prstGeom>
-          <a:noFill/>
-        </p:spPr>
-        <p:txBody>
-          <a:bodyPr wrap="square">
-            <a:spAutoFit/>
-          </a:bodyPr>
-          <a:lstStyle/>
-          <a:p>
-            <a:pPr algn="l">
-              <a:defRPr sz="1000" b="1">
-                <a:solidFill>
-                  <a:srgbClr val="34D399"/>
-                </a:solidFill>
-                <a:latin typeface="Calibri"/>
-              </a:defRPr>
-            </a:pPr>
-            <a:r>
-              <a:t>Pipeline</a:t>
-            </a:r>
-          </a:p>
-        </p:txBody>
-      </p:sp>
-      <p:sp>
-        <p:nvSpPr>
-          <p:cNvPr id="55" name="TextBox 54"/>
-          <p:cNvSpPr txBox="1"/>
-          <p:nvPr/>
-        </p:nvSpPr>
-        <p:spPr>
-          <a:xfrm>
-            <a:off x="3547872" y="3081528"/>
             <a:ext cx="1234440" cy="274320"/>
           </a:xfrm>
           <a:prstGeom prst="rect">
@@ -8767,8 +8768,8 @@
         </p:nvSpPr>
         <p:spPr>
           <a:xfrm>
-            <a:off x="4983479" y="2788920"/>
-            <a:ext cx="1371600" cy="640080"/>
+            <a:off x="4983479" y="2606040"/>
+            <a:ext cx="1371600" cy="566928"/>
           </a:xfrm>
           <a:prstGeom prst="roundRect">
             <a:avLst/>
@@ -8810,7 +8811,7 @@
         </p:nvSpPr>
         <p:spPr>
           <a:xfrm>
-            <a:off x="4983479" y="2788920"/>
+            <a:off x="4983479" y="2606040"/>
             <a:ext cx="1371600" cy="38100"/>
           </a:xfrm>
           <a:prstGeom prst="rect">
@@ -8853,43 +8854,43 @@
         </p:nvSpPr>
         <p:spPr>
           <a:xfrm>
+            <a:off x="5056631" y="2660904"/>
+            <a:ext cx="1234440" cy="201168"/>
+          </a:xfrm>
+          <a:prstGeom prst="rect">
+            <a:avLst/>
+          </a:prstGeom>
+          <a:noFill/>
+        </p:spPr>
+        <p:txBody>
+          <a:bodyPr wrap="square">
+            <a:spAutoFit/>
+          </a:bodyPr>
+          <a:lstStyle/>
+          <a:p>
+            <a:pPr algn="l">
+              <a:defRPr sz="1000" b="1">
+                <a:solidFill>
+                  <a:srgbClr val="FB923C"/>
+                </a:solidFill>
+                <a:latin typeface="Calibri"/>
+              </a:defRPr>
+            </a:pPr>
+            <a:r>
+              <a:t>Win/Loss</a:t>
+            </a:r>
+          </a:p>
+        </p:txBody>
+      </p:sp>
+      <p:sp>
+        <p:nvSpPr>
+          <p:cNvPr id="59" name="TextBox 58"/>
+          <p:cNvSpPr txBox="1"/>
+          <p:nvPr/>
+        </p:nvSpPr>
+        <p:spPr>
+          <a:xfrm>
             <a:off x="5056631" y="2862072"/>
-            <a:ext cx="1234440" cy="201168"/>
-          </a:xfrm>
-          <a:prstGeom prst="rect">
-            <a:avLst/>
-          </a:prstGeom>
-          <a:noFill/>
-        </p:spPr>
-        <p:txBody>
-          <a:bodyPr wrap="square">
-            <a:spAutoFit/>
-          </a:bodyPr>
-          <a:lstStyle/>
-          <a:p>
-            <a:pPr algn="l">
-              <a:defRPr sz="1000" b="1">
-                <a:solidFill>
-                  <a:srgbClr val="FB923C"/>
-                </a:solidFill>
-                <a:latin typeface="Calibri"/>
-              </a:defRPr>
-            </a:pPr>
-            <a:r>
-              <a:t>Win/Loss</a:t>
-            </a:r>
-          </a:p>
-        </p:txBody>
-      </p:sp>
-      <p:sp>
-        <p:nvSpPr>
-          <p:cNvPr id="59" name="TextBox 58"/>
-          <p:cNvSpPr txBox="1"/>
-          <p:nvPr/>
-        </p:nvSpPr>
-        <p:spPr>
-          <a:xfrm>
-            <a:off x="5056631" y="3081528"/>
             <a:ext cx="1234440" cy="274320"/>
           </a:xfrm>
           <a:prstGeom prst="rect">
@@ -8925,8 +8926,8 @@
         </p:nvSpPr>
         <p:spPr>
           <a:xfrm>
-            <a:off x="6492240" y="2788920"/>
-            <a:ext cx="1371600" cy="640080"/>
+            <a:off x="6492240" y="2606040"/>
+            <a:ext cx="1371600" cy="566928"/>
           </a:xfrm>
           <a:prstGeom prst="roundRect">
             <a:avLst/>
@@ -8968,7 +8969,7 @@
         </p:nvSpPr>
         <p:spPr>
           <a:xfrm>
-            <a:off x="6492240" y="2788920"/>
+            <a:off x="6492240" y="2606040"/>
             <a:ext cx="1371600" cy="38100"/>
           </a:xfrm>
           <a:prstGeom prst="rect">
@@ -9011,43 +9012,43 @@
         </p:nvSpPr>
         <p:spPr>
           <a:xfrm>
+            <a:off x="6565392" y="2660904"/>
+            <a:ext cx="1234440" cy="201168"/>
+          </a:xfrm>
+          <a:prstGeom prst="rect">
+            <a:avLst/>
+          </a:prstGeom>
+          <a:noFill/>
+        </p:spPr>
+        <p:txBody>
+          <a:bodyPr wrap="square">
+            <a:spAutoFit/>
+          </a:bodyPr>
+          <a:lstStyle/>
+          <a:p>
+            <a:pPr algn="l">
+              <a:defRPr sz="1000" b="1">
+                <a:solidFill>
+                  <a:srgbClr val="7C7FFF"/>
+                </a:solidFill>
+                <a:latin typeface="Calibri"/>
+              </a:defRPr>
+            </a:pPr>
+            <a:r>
+              <a:t>Opp Agent</a:t>
+            </a:r>
+          </a:p>
+        </p:txBody>
+      </p:sp>
+      <p:sp>
+        <p:nvSpPr>
+          <p:cNvPr id="63" name="TextBox 62"/>
+          <p:cNvSpPr txBox="1"/>
+          <p:nvPr/>
+        </p:nvSpPr>
+        <p:spPr>
+          <a:xfrm>
             <a:off x="6565392" y="2862072"/>
-            <a:ext cx="1234440" cy="201168"/>
-          </a:xfrm>
-          <a:prstGeom prst="rect">
-            <a:avLst/>
-          </a:prstGeom>
-          <a:noFill/>
-        </p:spPr>
-        <p:txBody>
-          <a:bodyPr wrap="square">
-            <a:spAutoFit/>
-          </a:bodyPr>
-          <a:lstStyle/>
-          <a:p>
-            <a:pPr algn="l">
-              <a:defRPr sz="1000" b="1">
-                <a:solidFill>
-                  <a:srgbClr val="7C7FFF"/>
-                </a:solidFill>
-                <a:latin typeface="Calibri"/>
-              </a:defRPr>
-            </a:pPr>
-            <a:r>
-              <a:t>Opp Agent</a:t>
-            </a:r>
-          </a:p>
-        </p:txBody>
-      </p:sp>
-      <p:sp>
-        <p:nvSpPr>
-          <p:cNvPr id="63" name="TextBox 62"/>
-          <p:cNvSpPr txBox="1"/>
-          <p:nvPr/>
-        </p:nvSpPr>
-        <p:spPr>
-          <a:xfrm>
-            <a:off x="6565392" y="3081528"/>
             <a:ext cx="1234440" cy="274320"/>
           </a:xfrm>
           <a:prstGeom prst="rect">
@@ -9083,8 +9084,8 @@
         </p:nvSpPr>
         <p:spPr>
           <a:xfrm>
-            <a:off x="457200" y="3566160"/>
-            <a:ext cx="1371600" cy="640080"/>
+            <a:off x="457200" y="3291840"/>
+            <a:ext cx="1371600" cy="566928"/>
           </a:xfrm>
           <a:prstGeom prst="roundRect">
             <a:avLst/>
@@ -9126,7 +9127,7 @@
         </p:nvSpPr>
         <p:spPr>
           <a:xfrm>
-            <a:off x="457200" y="3566160"/>
+            <a:off x="457200" y="3291840"/>
             <a:ext cx="1371600" cy="38100"/>
           </a:xfrm>
           <a:prstGeom prst="rect">
@@ -9169,7 +9170,7 @@
         </p:nvSpPr>
         <p:spPr>
           <a:xfrm>
-            <a:off x="530352" y="3639312"/>
+            <a:off x="530352" y="3346704"/>
             <a:ext cx="1234440" cy="201168"/>
           </a:xfrm>
           <a:prstGeom prst="rect">
@@ -9205,7 +9206,7 @@
         </p:nvSpPr>
         <p:spPr>
           <a:xfrm>
-            <a:off x="530352" y="3858768"/>
+            <a:off x="530352" y="3547872"/>
             <a:ext cx="1234440" cy="274320"/>
           </a:xfrm>
           <a:prstGeom prst="rect">
@@ -9235,50 +9236,14 @@
       </p:sp>
       <p:sp>
         <p:nvSpPr>
-          <p:cNvPr id="68" name="TextBox 67"/>
-          <p:cNvSpPr txBox="1"/>
-          <p:nvPr/>
-        </p:nvSpPr>
-        <p:spPr>
-          <a:xfrm>
-            <a:off x="8001000" y="1143000"/>
-            <a:ext cx="3657600" cy="228600"/>
-          </a:xfrm>
-          <a:prstGeom prst="rect">
-            <a:avLst/>
-          </a:prstGeom>
-          <a:noFill/>
-        </p:spPr>
-        <p:txBody>
-          <a:bodyPr wrap="square">
-            <a:spAutoFit/>
-          </a:bodyPr>
-          <a:lstStyle/>
-          <a:p>
-            <a:pPr algn="l">
-              <a:defRPr sz="900" b="1">
-                <a:solidFill>
-                  <a:srgbClr val="5A5E66"/>
-                </a:solidFill>
-                <a:latin typeface="Calibri"/>
-              </a:defRPr>
-            </a:pPr>
-            <a:r>
-              <a:t>COMPETITIVE (12 CATEGORIES, 40+ RIVALS)</a:t>
-            </a:r>
-          </a:p>
-        </p:txBody>
-      </p:sp>
-      <p:sp>
-        <p:nvSpPr>
-          <p:cNvPr id="69" name="Rounded Rectangle 68"/>
+          <p:cNvPr id="68" name="Rounded Rectangle 67"/>
           <p:cNvSpPr/>
           <p:nvPr/>
         </p:nvSpPr>
         <p:spPr>
           <a:xfrm>
-            <a:off x="8001000" y="1463040"/>
-            <a:ext cx="3749039" cy="292608"/>
+            <a:off x="1965960" y="3291840"/>
+            <a:ext cx="1371600" cy="566928"/>
           </a:xfrm>
           <a:prstGeom prst="roundRect">
             <a:avLst/>
@@ -9314,56 +9279,20 @@
       </p:sp>
       <p:sp>
         <p:nvSpPr>
-          <p:cNvPr id="70" name="TextBox 69"/>
-          <p:cNvSpPr txBox="1"/>
-          <p:nvPr/>
-        </p:nvSpPr>
-        <p:spPr>
-          <a:xfrm>
-            <a:off x="8119872" y="1499616"/>
-            <a:ext cx="3520440" cy="201168"/>
-          </a:xfrm>
-          <a:prstGeom prst="rect">
-            <a:avLst/>
-          </a:prstGeom>
-          <a:noFill/>
-        </p:spPr>
-        <p:txBody>
-          <a:bodyPr wrap="square">
-            <a:spAutoFit/>
-          </a:bodyPr>
-          <a:lstStyle/>
-          <a:p>
-            <a:pPr algn="l">
-              <a:defRPr sz="900" b="0">
-                <a:solidFill>
-                  <a:srgbClr val="C4C9D4"/>
-                </a:solidFill>
-                <a:latin typeface="Calibri"/>
-              </a:defRPr>
-            </a:pPr>
-            <a:r>
-              <a:t>CDN -- Akamai, CloudFront, Fastly</a:t>
-            </a:r>
-          </a:p>
-        </p:txBody>
-      </p:sp>
-      <p:sp>
-        <p:nvSpPr>
-          <p:cNvPr id="71" name="Rounded Rectangle 70"/>
+          <p:cNvPr id="69" name="Rectangle 68"/>
           <p:cNvSpPr/>
           <p:nvPr/>
         </p:nvSpPr>
         <p:spPr>
           <a:xfrm>
-            <a:off x="8001000" y="1847088"/>
-            <a:ext cx="3749039" cy="292608"/>
-          </a:xfrm>
-          <a:prstGeom prst="roundRect">
-            <a:avLst/>
-          </a:prstGeom>
-          <a:solidFill>
-            <a:srgbClr val="161718"/>
+            <a:off x="1965960" y="3291840"/>
+            <a:ext cx="1371600" cy="38100"/>
+          </a:xfrm>
+          <a:prstGeom prst="rect">
+            <a:avLst/>
+          </a:prstGeom>
+          <a:solidFill>
+            <a:srgbClr val="60A5FA"/>
           </a:solidFill>
           <a:ln>
             <a:noFill/>
@@ -9393,50 +9322,86 @@
       </p:sp>
       <p:sp>
         <p:nvSpPr>
-          <p:cNvPr id="72" name="TextBox 71"/>
-          <p:cNvSpPr txBox="1"/>
-          <p:nvPr/>
-        </p:nvSpPr>
-        <p:spPr>
-          <a:xfrm>
-            <a:off x="8119872" y="1883664"/>
-            <a:ext cx="3520440" cy="201168"/>
-          </a:xfrm>
-          <a:prstGeom prst="rect">
-            <a:avLst/>
-          </a:prstGeom>
-          <a:noFill/>
-        </p:spPr>
-        <p:txBody>
-          <a:bodyPr wrap="square">
-            <a:spAutoFit/>
-          </a:bodyPr>
-          <a:lstStyle/>
-          <a:p>
-            <a:pPr algn="l">
-              <a:defRPr sz="900" b="0">
-                <a:solidFill>
-                  <a:srgbClr val="C4C9D4"/>
-                </a:solidFill>
-                <a:latin typeface="Calibri"/>
-              </a:defRPr>
-            </a:pPr>
-            <a:r>
-              <a:t>WAF -- Imperva, AWS WAF, F5</a:t>
-            </a:r>
-          </a:p>
-        </p:txBody>
-      </p:sp>
-      <p:sp>
-        <p:nvSpPr>
-          <p:cNvPr id="73" name="Rounded Rectangle 72"/>
+          <p:cNvPr id="70" name="TextBox 69"/>
+          <p:cNvSpPr txBox="1"/>
+          <p:nvPr/>
+        </p:nvSpPr>
+        <p:spPr>
+          <a:xfrm>
+            <a:off x="2039112" y="3346704"/>
+            <a:ext cx="1234440" cy="201168"/>
+          </a:xfrm>
+          <a:prstGeom prst="rect">
+            <a:avLst/>
+          </a:prstGeom>
+          <a:noFill/>
+        </p:spPr>
+        <p:txBody>
+          <a:bodyPr wrap="square">
+            <a:spAutoFit/>
+          </a:bodyPr>
+          <a:lstStyle/>
+          <a:p>
+            <a:pPr algn="l">
+              <a:defRPr sz="1000" b="1">
+                <a:solidFill>
+                  <a:srgbClr val="60A5FA"/>
+                </a:solidFill>
+                <a:latin typeface="Calibri"/>
+              </a:defRPr>
+            </a:pPr>
+            <a:r>
+              <a:t>AI Chat Refine</a:t>
+            </a:r>
+          </a:p>
+        </p:txBody>
+      </p:sp>
+      <p:sp>
+        <p:nvSpPr>
+          <p:cNvPr id="71" name="TextBox 70"/>
+          <p:cNvSpPr txBox="1"/>
+          <p:nvPr/>
+        </p:nvSpPr>
+        <p:spPr>
+          <a:xfrm>
+            <a:off x="2039112" y="3547872"/>
+            <a:ext cx="1234440" cy="274320"/>
+          </a:xfrm>
+          <a:prstGeom prst="rect">
+            <a:avLst/>
+          </a:prstGeom>
+          <a:noFill/>
+        </p:spPr>
+        <p:txBody>
+          <a:bodyPr wrap="square">
+            <a:spAutoFit/>
+          </a:bodyPr>
+          <a:lstStyle/>
+          <a:p>
+            <a:pPr algn="l">
+              <a:defRPr sz="800" b="0">
+                <a:solidFill>
+                  <a:srgbClr val="8A8F98"/>
+                </a:solidFill>
+                <a:latin typeface="Calibri"/>
+              </a:defRPr>
+            </a:pPr>
+            <a:r>
+              <a:t>Rewrite in place</a:t>
+            </a:r>
+          </a:p>
+        </p:txBody>
+      </p:sp>
+      <p:sp>
+        <p:nvSpPr>
+          <p:cNvPr id="72" name="Rounded Rectangle 71"/>
           <p:cNvSpPr/>
           <p:nvPr/>
         </p:nvSpPr>
         <p:spPr>
           <a:xfrm>
-            <a:off x="8001000" y="2231136"/>
-            <a:ext cx="3749039" cy="292608"/>
+            <a:off x="3474720" y="3291840"/>
+            <a:ext cx="1371600" cy="566928"/>
           </a:xfrm>
           <a:prstGeom prst="roundRect">
             <a:avLst/>
@@ -9472,56 +9437,20 @@
       </p:sp>
       <p:sp>
         <p:nvSpPr>
-          <p:cNvPr id="74" name="TextBox 73"/>
-          <p:cNvSpPr txBox="1"/>
-          <p:nvPr/>
-        </p:nvSpPr>
-        <p:spPr>
-          <a:xfrm>
-            <a:off x="8119872" y="2267712"/>
-            <a:ext cx="3520440" cy="201168"/>
-          </a:xfrm>
-          <a:prstGeom prst="rect">
-            <a:avLst/>
-          </a:prstGeom>
-          <a:noFill/>
-        </p:spPr>
-        <p:txBody>
-          <a:bodyPr wrap="square">
-            <a:spAutoFit/>
-          </a:bodyPr>
-          <a:lstStyle/>
-          <a:p>
-            <a:pPr algn="l">
-              <a:defRPr sz="900" b="0">
-                <a:solidFill>
-                  <a:srgbClr val="C4C9D4"/>
-                </a:solidFill>
-                <a:latin typeface="Calibri"/>
-              </a:defRPr>
-            </a:pPr>
-            <a:r>
-              <a:t>DDoS -- Prolexic, AWS Shield</a:t>
-            </a:r>
-          </a:p>
-        </p:txBody>
-      </p:sp>
-      <p:sp>
-        <p:nvSpPr>
-          <p:cNvPr id="75" name="Rounded Rectangle 74"/>
+          <p:cNvPr id="73" name="Rectangle 72"/>
           <p:cNvSpPr/>
           <p:nvPr/>
         </p:nvSpPr>
         <p:spPr>
           <a:xfrm>
-            <a:off x="8001000" y="2615184"/>
-            <a:ext cx="3749039" cy="292608"/>
-          </a:xfrm>
-          <a:prstGeom prst="roundRect">
-            <a:avLst/>
-          </a:prstGeom>
-          <a:solidFill>
-            <a:srgbClr val="161718"/>
+            <a:off x="3474720" y="3291840"/>
+            <a:ext cx="1371600" cy="38100"/>
+          </a:xfrm>
+          <a:prstGeom prst="rect">
+            <a:avLst/>
+          </a:prstGeom>
+          <a:solidFill>
+            <a:srgbClr val="A78BFA"/>
           </a:solidFill>
           <a:ln>
             <a:noFill/>
@@ -9551,50 +9480,86 @@
       </p:sp>
       <p:sp>
         <p:nvSpPr>
-          <p:cNvPr id="76" name="TextBox 75"/>
-          <p:cNvSpPr txBox="1"/>
-          <p:nvPr/>
-        </p:nvSpPr>
-        <p:spPr>
-          <a:xfrm>
-            <a:off x="8119872" y="2651760"/>
-            <a:ext cx="3520440" cy="201168"/>
-          </a:xfrm>
-          <a:prstGeom prst="rect">
-            <a:avLst/>
-          </a:prstGeom>
-          <a:noFill/>
-        </p:spPr>
-        <p:txBody>
-          <a:bodyPr wrap="square">
-            <a:spAutoFit/>
-          </a:bodyPr>
-          <a:lstStyle/>
-          <a:p>
-            <a:pPr algn="l">
-              <a:defRPr sz="900" b="0">
-                <a:solidFill>
-                  <a:srgbClr val="C4C9D4"/>
-                </a:solidFill>
-                <a:latin typeface="Calibri"/>
-              </a:defRPr>
-            </a:pPr>
-            <a:r>
-              <a:t>Zero Trust -- Zscaler, Palo Alto</a:t>
-            </a:r>
-          </a:p>
-        </p:txBody>
-      </p:sp>
-      <p:sp>
-        <p:nvSpPr>
-          <p:cNvPr id="77" name="Rounded Rectangle 76"/>
+          <p:cNvPr id="74" name="TextBox 73"/>
+          <p:cNvSpPr txBox="1"/>
+          <p:nvPr/>
+        </p:nvSpPr>
+        <p:spPr>
+          <a:xfrm>
+            <a:off x="3547872" y="3346704"/>
+            <a:ext cx="1234440" cy="201168"/>
+          </a:xfrm>
+          <a:prstGeom prst="rect">
+            <a:avLst/>
+          </a:prstGeom>
+          <a:noFill/>
+        </p:spPr>
+        <p:txBody>
+          <a:bodyPr wrap="square">
+            <a:spAutoFit/>
+          </a:bodyPr>
+          <a:lstStyle/>
+          <a:p>
+            <a:pPr algn="l">
+              <a:defRPr sz="1000" b="1">
+                <a:solidFill>
+                  <a:srgbClr val="A78BFA"/>
+                </a:solidFill>
+                <a:latin typeface="Calibri"/>
+              </a:defRPr>
+            </a:pPr>
+            <a:r>
+              <a:t>Open Tracking</a:t>
+            </a:r>
+          </a:p>
+        </p:txBody>
+      </p:sp>
+      <p:sp>
+        <p:nvSpPr>
+          <p:cNvPr id="75" name="TextBox 74"/>
+          <p:cNvSpPr txBox="1"/>
+          <p:nvPr/>
+        </p:nvSpPr>
+        <p:spPr>
+          <a:xfrm>
+            <a:off x="3547872" y="3547872"/>
+            <a:ext cx="1234440" cy="274320"/>
+          </a:xfrm>
+          <a:prstGeom prst="rect">
+            <a:avLst/>
+          </a:prstGeom>
+          <a:noFill/>
+        </p:spPr>
+        <p:txBody>
+          <a:bodyPr wrap="square">
+            <a:spAutoFit/>
+          </a:bodyPr>
+          <a:lstStyle/>
+          <a:p>
+            <a:pPr algn="l">
+              <a:defRPr sz="800" b="0">
+                <a:solidFill>
+                  <a:srgbClr val="8A8F98"/>
+                </a:solidFill>
+                <a:latin typeface="Calibri"/>
+              </a:defRPr>
+            </a:pPr>
+            <a:r>
+              <a:t>Pixel + stats</a:t>
+            </a:r>
+          </a:p>
+        </p:txBody>
+      </p:sp>
+      <p:sp>
+        <p:nvSpPr>
+          <p:cNvPr id="76" name="Rounded Rectangle 75"/>
           <p:cNvSpPr/>
           <p:nvPr/>
         </p:nvSpPr>
         <p:spPr>
           <a:xfrm>
-            <a:off x="8001000" y="2999232"/>
-            <a:ext cx="3749039" cy="292608"/>
+            <a:off x="4983479" y="3291840"/>
+            <a:ext cx="1371600" cy="566928"/>
           </a:xfrm>
           <a:prstGeom prst="roundRect">
             <a:avLst/>
@@ -9630,56 +9595,20 @@
       </p:sp>
       <p:sp>
         <p:nvSpPr>
-          <p:cNvPr id="78" name="TextBox 77"/>
-          <p:cNvSpPr txBox="1"/>
-          <p:nvPr/>
-        </p:nvSpPr>
-        <p:spPr>
-          <a:xfrm>
-            <a:off x="8119872" y="3035808"/>
-            <a:ext cx="3520440" cy="201168"/>
-          </a:xfrm>
-          <a:prstGeom prst="rect">
-            <a:avLst/>
-          </a:prstGeom>
-          <a:noFill/>
-        </p:spPr>
-        <p:txBody>
-          <a:bodyPr wrap="square">
-            <a:spAutoFit/>
-          </a:bodyPr>
-          <a:lstStyle/>
-          <a:p>
-            <a:pPr algn="l">
-              <a:defRPr sz="900" b="0">
-                <a:solidFill>
-                  <a:srgbClr val="C4C9D4"/>
-                </a:solidFill>
-                <a:latin typeface="Calibri"/>
-              </a:defRPr>
-            </a:pPr>
-            <a:r>
-              <a:t>Edge Compute -- Lambda@Edge, Vercel</a:t>
-            </a:r>
-          </a:p>
-        </p:txBody>
-      </p:sp>
-      <p:sp>
-        <p:nvSpPr>
-          <p:cNvPr id="79" name="Rounded Rectangle 78"/>
+          <p:cNvPr id="77" name="Rectangle 76"/>
           <p:cNvSpPr/>
           <p:nvPr/>
         </p:nvSpPr>
         <p:spPr>
           <a:xfrm>
-            <a:off x="8001000" y="3383280"/>
-            <a:ext cx="3749039" cy="292608"/>
-          </a:xfrm>
-          <a:prstGeom prst="roundRect">
-            <a:avLst/>
-          </a:prstGeom>
-          <a:solidFill>
-            <a:srgbClr val="161718"/>
+            <a:off x="4983479" y="3291840"/>
+            <a:ext cx="1371600" cy="38100"/>
+          </a:xfrm>
+          <a:prstGeom prst="rect">
+            <a:avLst/>
+          </a:prstGeom>
+          <a:solidFill>
+            <a:srgbClr val="FBBF24"/>
           </a:solidFill>
           <a:ln>
             <a:noFill/>
@@ -9709,86 +9638,86 @@
       </p:sp>
       <p:sp>
         <p:nvSpPr>
-          <p:cNvPr id="80" name="TextBox 79"/>
-          <p:cNvSpPr txBox="1"/>
-          <p:nvPr/>
-        </p:nvSpPr>
-        <p:spPr>
-          <a:xfrm>
-            <a:off x="8119872" y="3419856"/>
-            <a:ext cx="3520440" cy="201168"/>
-          </a:xfrm>
-          <a:prstGeom prst="rect">
-            <a:avLst/>
-          </a:prstGeom>
-          <a:noFill/>
-        </p:spPr>
-        <p:txBody>
-          <a:bodyPr wrap="square">
-            <a:spAutoFit/>
-          </a:bodyPr>
-          <a:lstStyle/>
-          <a:p>
-            <a:pPr algn="l">
-              <a:defRPr sz="900" b="0">
-                <a:solidFill>
-                  <a:srgbClr val="C4C9D4"/>
-                </a:solidFill>
-                <a:latin typeface="Calibri"/>
-              </a:defRPr>
-            </a:pPr>
-            <a:r>
-              <a:t>DNS -- Route 53, NS1, Google</a:t>
-            </a:r>
-          </a:p>
-        </p:txBody>
-      </p:sp>
-      <p:sp>
-        <p:nvSpPr>
-          <p:cNvPr id="81" name="TextBox 80"/>
-          <p:cNvSpPr txBox="1"/>
-          <p:nvPr/>
-        </p:nvSpPr>
-        <p:spPr>
-          <a:xfrm>
-            <a:off x="457200" y="3977639"/>
-            <a:ext cx="4572000" cy="228600"/>
-          </a:xfrm>
-          <a:prstGeom prst="rect">
-            <a:avLst/>
-          </a:prstGeom>
-          <a:noFill/>
-        </p:spPr>
-        <p:txBody>
-          <a:bodyPr wrap="square">
-            <a:spAutoFit/>
-          </a:bodyPr>
-          <a:lstStyle/>
-          <a:p>
-            <a:pPr algn="l">
-              <a:defRPr sz="900" b="1">
-                <a:solidFill>
-                  <a:srgbClr val="5A5E66"/>
-                </a:solidFill>
-                <a:latin typeface="Calibri"/>
-              </a:defRPr>
-            </a:pPr>
-            <a:r>
-              <a:t>THREAT INTELLIGENCE</a:t>
-            </a:r>
-          </a:p>
-        </p:txBody>
-      </p:sp>
-      <p:sp>
-        <p:nvSpPr>
-          <p:cNvPr id="82" name="Rounded Rectangle 81"/>
+          <p:cNvPr id="78" name="TextBox 77"/>
+          <p:cNvSpPr txBox="1"/>
+          <p:nvPr/>
+        </p:nvSpPr>
+        <p:spPr>
+          <a:xfrm>
+            <a:off x="5056631" y="3346704"/>
+            <a:ext cx="1234440" cy="201168"/>
+          </a:xfrm>
+          <a:prstGeom prst="rect">
+            <a:avLst/>
+          </a:prstGeom>
+          <a:noFill/>
+        </p:spPr>
+        <p:txBody>
+          <a:bodyPr wrap="square">
+            <a:spAutoFit/>
+          </a:bodyPr>
+          <a:lstStyle/>
+          <a:p>
+            <a:pPr algn="l">
+              <a:defRPr sz="1000" b="1">
+                <a:solidFill>
+                  <a:srgbClr val="FBBF24"/>
+                </a:solidFill>
+                <a:latin typeface="Calibri"/>
+              </a:defRPr>
+            </a:pPr>
+            <a:r>
+              <a:t>CAN-SPAM</a:t>
+            </a:r>
+          </a:p>
+        </p:txBody>
+      </p:sp>
+      <p:sp>
+        <p:nvSpPr>
+          <p:cNvPr id="79" name="TextBox 78"/>
+          <p:cNvSpPr txBox="1"/>
+          <p:nvPr/>
+        </p:nvSpPr>
+        <p:spPr>
+          <a:xfrm>
+            <a:off x="5056631" y="3547872"/>
+            <a:ext cx="1234440" cy="274320"/>
+          </a:xfrm>
+          <a:prstGeom prst="rect">
+            <a:avLst/>
+          </a:prstGeom>
+          <a:noFill/>
+        </p:spPr>
+        <p:txBody>
+          <a:bodyPr wrap="square">
+            <a:spAutoFit/>
+          </a:bodyPr>
+          <a:lstStyle/>
+          <a:p>
+            <a:pPr algn="l">
+              <a:defRPr sz="800" b="0">
+                <a:solidFill>
+                  <a:srgbClr val="8A8F98"/>
+                </a:solidFill>
+                <a:latin typeface="Calibri"/>
+              </a:defRPr>
+            </a:pPr>
+            <a:r>
+              <a:t>Unsubscribe</a:t>
+            </a:r>
+          </a:p>
+        </p:txBody>
+      </p:sp>
+      <p:sp>
+        <p:nvSpPr>
+          <p:cNvPr id="80" name="Rounded Rectangle 79"/>
           <p:cNvSpPr/>
           <p:nvPr/>
         </p:nvSpPr>
         <p:spPr>
           <a:xfrm>
-            <a:off x="457200" y="4251960"/>
-            <a:ext cx="2194560" cy="594360"/>
+            <a:off x="6492240" y="3291840"/>
+            <a:ext cx="1371600" cy="566928"/>
           </a:xfrm>
           <a:prstGeom prst="roundRect">
             <a:avLst/>
@@ -9824,20 +9753,20 @@
       </p:sp>
       <p:sp>
         <p:nvSpPr>
-          <p:cNvPr id="83" name="Rectangle 82"/>
+          <p:cNvPr id="81" name="Rectangle 80"/>
           <p:cNvSpPr/>
           <p:nvPr/>
         </p:nvSpPr>
         <p:spPr>
           <a:xfrm>
-            <a:off x="457200" y="4251960"/>
-            <a:ext cx="38100" cy="594360"/>
-          </a:xfrm>
-          <a:prstGeom prst="rect">
-            <a:avLst/>
-          </a:prstGeom>
-          <a:solidFill>
-            <a:srgbClr val="F87171"/>
+            <a:off x="6492240" y="3291840"/>
+            <a:ext cx="1371600" cy="38100"/>
+          </a:xfrm>
+          <a:prstGeom prst="rect">
+            <a:avLst/>
+          </a:prstGeom>
+          <a:solidFill>
+            <a:srgbClr val="FB923C"/>
           </a:solidFill>
           <a:ln>
             <a:noFill/>
@@ -9867,86 +9796,122 @@
       </p:sp>
       <p:sp>
         <p:nvSpPr>
+          <p:cNvPr id="82" name="TextBox 81"/>
+          <p:cNvSpPr txBox="1"/>
+          <p:nvPr/>
+        </p:nvSpPr>
+        <p:spPr>
+          <a:xfrm>
+            <a:off x="6565392" y="3346704"/>
+            <a:ext cx="1234440" cy="201168"/>
+          </a:xfrm>
+          <a:prstGeom prst="rect">
+            <a:avLst/>
+          </a:prstGeom>
+          <a:noFill/>
+        </p:spPr>
+        <p:txBody>
+          <a:bodyPr wrap="square">
+            <a:spAutoFit/>
+          </a:bodyPr>
+          <a:lstStyle/>
+          <a:p>
+            <a:pPr algn="l">
+              <a:defRPr sz="1000" b="1">
+                <a:solidFill>
+                  <a:srgbClr val="FB923C"/>
+                </a:solidFill>
+                <a:latin typeface="Calibri"/>
+              </a:defRPr>
+            </a:pPr>
+            <a:r>
+              <a:t>MCP Gateway</a:t>
+            </a:r>
+          </a:p>
+        </p:txBody>
+      </p:sp>
+      <p:sp>
+        <p:nvSpPr>
+          <p:cNvPr id="83" name="TextBox 82"/>
+          <p:cNvSpPr txBox="1"/>
+          <p:nvPr/>
+        </p:nvSpPr>
+        <p:spPr>
+          <a:xfrm>
+            <a:off x="6565392" y="3547872"/>
+            <a:ext cx="1234440" cy="274320"/>
+          </a:xfrm>
+          <a:prstGeom prst="rect">
+            <a:avLst/>
+          </a:prstGeom>
+          <a:noFill/>
+        </p:spPr>
+        <p:txBody>
+          <a:bodyPr wrap="square">
+            <a:spAutoFit/>
+          </a:bodyPr>
+          <a:lstStyle/>
+          <a:p>
+            <a:pPr algn="l">
+              <a:defRPr sz="800" b="0">
+                <a:solidFill>
+                  <a:srgbClr val="8A8F98"/>
+                </a:solidFill>
+                <a:latin typeface="Calibri"/>
+              </a:defRPr>
+            </a:pPr>
+            <a:r>
+              <a:t>Client + server</a:t>
+            </a:r>
+          </a:p>
+        </p:txBody>
+      </p:sp>
+      <p:sp>
+        <p:nvSpPr>
           <p:cNvPr id="84" name="TextBox 83"/>
           <p:cNvSpPr txBox="1"/>
           <p:nvPr/>
         </p:nvSpPr>
         <p:spPr>
           <a:xfrm>
-            <a:off x="594360" y="4297680"/>
-            <a:ext cx="1920240" cy="182880"/>
-          </a:xfrm>
-          <a:prstGeom prst="rect">
-            <a:avLst/>
-          </a:prstGeom>
-          <a:noFill/>
-        </p:spPr>
-        <p:txBody>
-          <a:bodyPr wrap="square">
-            <a:spAutoFit/>
-          </a:bodyPr>
-          <a:lstStyle/>
-          <a:p>
-            <a:pPr algn="l">
-              <a:defRPr sz="1000" b="1">
-                <a:solidFill>
-                  <a:srgbClr val="F87171"/>
-                </a:solidFill>
-                <a:latin typeface="Calibri"/>
-              </a:defRPr>
-            </a:pPr>
-            <a:r>
-              <a:t>26 RSS Feeds</a:t>
-            </a:r>
-          </a:p>
-        </p:txBody>
-      </p:sp>
-      <p:sp>
-        <p:nvSpPr>
-          <p:cNvPr id="85" name="TextBox 84"/>
-          <p:cNvSpPr txBox="1"/>
-          <p:nvPr/>
-        </p:nvSpPr>
-        <p:spPr>
-          <a:xfrm>
-            <a:off x="594360" y="4526280"/>
-            <a:ext cx="1920240" cy="182880"/>
-          </a:xfrm>
-          <a:prstGeom prst="rect">
-            <a:avLst/>
-          </a:prstGeom>
-          <a:noFill/>
-        </p:spPr>
-        <p:txBody>
-          <a:bodyPr wrap="square">
-            <a:spAutoFit/>
-          </a:bodyPr>
-          <a:lstStyle/>
-          <a:p>
-            <a:pPr algn="l">
-              <a:defRPr sz="800" b="0">
-                <a:solidFill>
-                  <a:srgbClr val="8A8F98"/>
-                </a:solidFill>
-                <a:latin typeface="Calibri"/>
-              </a:defRPr>
-            </a:pPr>
-            <a:r>
-              <a:t>Real-time incidents</a:t>
-            </a:r>
-          </a:p>
-        </p:txBody>
-      </p:sp>
-      <p:sp>
-        <p:nvSpPr>
-          <p:cNvPr id="86" name="Rounded Rectangle 85"/>
+            <a:off x="8001000" y="1143000"/>
+            <a:ext cx="3657600" cy="228600"/>
+          </a:xfrm>
+          <a:prstGeom prst="rect">
+            <a:avLst/>
+          </a:prstGeom>
+          <a:noFill/>
+        </p:spPr>
+        <p:txBody>
+          <a:bodyPr wrap="square">
+            <a:spAutoFit/>
+          </a:bodyPr>
+          <a:lstStyle/>
+          <a:p>
+            <a:pPr algn="l">
+              <a:defRPr sz="900" b="1">
+                <a:solidFill>
+                  <a:srgbClr val="5A5E66"/>
+                </a:solidFill>
+                <a:latin typeface="Calibri"/>
+              </a:defRPr>
+            </a:pPr>
+            <a:r>
+              <a:t>COMPETITIVE (12 CATEGORIES, 40+ RIVALS)</a:t>
+            </a:r>
+          </a:p>
+        </p:txBody>
+      </p:sp>
+      <p:sp>
+        <p:nvSpPr>
+          <p:cNvPr id="85" name="Rounded Rectangle 84"/>
           <p:cNvSpPr/>
           <p:nvPr/>
         </p:nvSpPr>
         <p:spPr>
           <a:xfrm>
-            <a:off x="2788920" y="4251960"/>
-            <a:ext cx="2194560" cy="594360"/>
+            <a:off x="8001000" y="1463040"/>
+            <a:ext cx="3749039" cy="292608"/>
           </a:xfrm>
           <a:prstGeom prst="roundRect">
             <a:avLst/>
@@ -9982,20 +9947,56 @@
       </p:sp>
       <p:sp>
         <p:nvSpPr>
-          <p:cNvPr id="87" name="Rectangle 86"/>
+          <p:cNvPr id="86" name="TextBox 85"/>
+          <p:cNvSpPr txBox="1"/>
+          <p:nvPr/>
+        </p:nvSpPr>
+        <p:spPr>
+          <a:xfrm>
+            <a:off x="8119872" y="1499616"/>
+            <a:ext cx="3520440" cy="201168"/>
+          </a:xfrm>
+          <a:prstGeom prst="rect">
+            <a:avLst/>
+          </a:prstGeom>
+          <a:noFill/>
+        </p:spPr>
+        <p:txBody>
+          <a:bodyPr wrap="square">
+            <a:spAutoFit/>
+          </a:bodyPr>
+          <a:lstStyle/>
+          <a:p>
+            <a:pPr algn="l">
+              <a:defRPr sz="900" b="0">
+                <a:solidFill>
+                  <a:srgbClr val="C4C9D4"/>
+                </a:solidFill>
+                <a:latin typeface="Calibri"/>
+              </a:defRPr>
+            </a:pPr>
+            <a:r>
+              <a:t>CDN -- Akamai, CloudFront, Fastly</a:t>
+            </a:r>
+          </a:p>
+        </p:txBody>
+      </p:sp>
+      <p:sp>
+        <p:nvSpPr>
+          <p:cNvPr id="87" name="Rounded Rectangle 86"/>
           <p:cNvSpPr/>
           <p:nvPr/>
         </p:nvSpPr>
         <p:spPr>
           <a:xfrm>
-            <a:off x="2788920" y="4251960"/>
-            <a:ext cx="38100" cy="594360"/>
-          </a:xfrm>
-          <a:prstGeom prst="rect">
-            <a:avLst/>
-          </a:prstGeom>
-          <a:solidFill>
-            <a:srgbClr val="FBBF24"/>
+            <a:off x="8001000" y="1847088"/>
+            <a:ext cx="3749039" cy="292608"/>
+          </a:xfrm>
+          <a:prstGeom prst="roundRect">
+            <a:avLst/>
+          </a:prstGeom>
+          <a:solidFill>
+            <a:srgbClr val="161718"/>
           </a:solidFill>
           <a:ln>
             <a:noFill/>
@@ -10031,80 +10032,44 @@
         </p:nvSpPr>
         <p:spPr>
           <a:xfrm>
-            <a:off x="2926080" y="4297680"/>
-            <a:ext cx="1920240" cy="182880"/>
-          </a:xfrm>
-          <a:prstGeom prst="rect">
-            <a:avLst/>
-          </a:prstGeom>
-          <a:noFill/>
-        </p:spPr>
-        <p:txBody>
-          <a:bodyPr wrap="square">
-            <a:spAutoFit/>
-          </a:bodyPr>
-          <a:lstStyle/>
-          <a:p>
-            <a:pPr algn="l">
-              <a:defRPr sz="1000" b="1">
-                <a:solidFill>
-                  <a:srgbClr val="FBBF24"/>
-                </a:solidFill>
-                <a:latin typeface="Calibri"/>
-              </a:defRPr>
-            </a:pPr>
-            <a:r>
-              <a:t>GDELT + 5 News APIs</a:t>
-            </a:r>
-          </a:p>
-        </p:txBody>
-      </p:sp>
-      <p:sp>
-        <p:nvSpPr>
-          <p:cNvPr id="89" name="TextBox 88"/>
-          <p:cNvSpPr txBox="1"/>
-          <p:nvPr/>
-        </p:nvSpPr>
-        <p:spPr>
-          <a:xfrm>
-            <a:off x="2926080" y="4526280"/>
-            <a:ext cx="1920240" cy="182880"/>
-          </a:xfrm>
-          <a:prstGeom prst="rect">
-            <a:avLst/>
-          </a:prstGeom>
-          <a:noFill/>
-        </p:spPr>
-        <p:txBody>
-          <a:bodyPr wrap="square">
-            <a:spAutoFit/>
-          </a:bodyPr>
-          <a:lstStyle/>
-          <a:p>
-            <a:pPr algn="l">
-              <a:defRPr sz="800" b="0">
-                <a:solidFill>
-                  <a:srgbClr val="8A8F98"/>
-                </a:solidFill>
-                <a:latin typeface="Calibri"/>
-              </a:defRPr>
-            </a:pPr>
-            <a:r>
-              <a:t>Google, Bing, NewsAPI, GNews, MediaStack</a:t>
-            </a:r>
-          </a:p>
-        </p:txBody>
-      </p:sp>
-      <p:sp>
-        <p:nvSpPr>
-          <p:cNvPr id="90" name="Rounded Rectangle 89"/>
+            <a:off x="8119872" y="1883664"/>
+            <a:ext cx="3520440" cy="201168"/>
+          </a:xfrm>
+          <a:prstGeom prst="rect">
+            <a:avLst/>
+          </a:prstGeom>
+          <a:noFill/>
+        </p:spPr>
+        <p:txBody>
+          <a:bodyPr wrap="square">
+            <a:spAutoFit/>
+          </a:bodyPr>
+          <a:lstStyle/>
+          <a:p>
+            <a:pPr algn="l">
+              <a:defRPr sz="900" b="0">
+                <a:solidFill>
+                  <a:srgbClr val="C4C9D4"/>
+                </a:solidFill>
+                <a:latin typeface="Calibri"/>
+              </a:defRPr>
+            </a:pPr>
+            <a:r>
+              <a:t>WAF -- Imperva, AWS WAF, F5</a:t>
+            </a:r>
+          </a:p>
+        </p:txBody>
+      </p:sp>
+      <p:sp>
+        <p:nvSpPr>
+          <p:cNvPr id="89" name="Rounded Rectangle 88"/>
           <p:cNvSpPr/>
           <p:nvPr/>
         </p:nvSpPr>
         <p:spPr>
           <a:xfrm>
-            <a:off x="5120640" y="4251960"/>
-            <a:ext cx="2194560" cy="594360"/>
+            <a:off x="8001000" y="2231136"/>
+            <a:ext cx="3749039" cy="292608"/>
           </a:xfrm>
           <a:prstGeom prst="roundRect">
             <a:avLst/>
@@ -10140,20 +10105,56 @@
       </p:sp>
       <p:sp>
         <p:nvSpPr>
-          <p:cNvPr id="91" name="Rectangle 90"/>
+          <p:cNvPr id="90" name="TextBox 89"/>
+          <p:cNvSpPr txBox="1"/>
+          <p:nvPr/>
+        </p:nvSpPr>
+        <p:spPr>
+          <a:xfrm>
+            <a:off x="8119872" y="2267712"/>
+            <a:ext cx="3520440" cy="201168"/>
+          </a:xfrm>
+          <a:prstGeom prst="rect">
+            <a:avLst/>
+          </a:prstGeom>
+          <a:noFill/>
+        </p:spPr>
+        <p:txBody>
+          <a:bodyPr wrap="square">
+            <a:spAutoFit/>
+          </a:bodyPr>
+          <a:lstStyle/>
+          <a:p>
+            <a:pPr algn="l">
+              <a:defRPr sz="900" b="0">
+                <a:solidFill>
+                  <a:srgbClr val="C4C9D4"/>
+                </a:solidFill>
+                <a:latin typeface="Calibri"/>
+              </a:defRPr>
+            </a:pPr>
+            <a:r>
+              <a:t>DDoS -- Prolexic, AWS Shield</a:t>
+            </a:r>
+          </a:p>
+        </p:txBody>
+      </p:sp>
+      <p:sp>
+        <p:nvSpPr>
+          <p:cNvPr id="91" name="Rounded Rectangle 90"/>
           <p:cNvSpPr/>
           <p:nvPr/>
         </p:nvSpPr>
         <p:spPr>
           <a:xfrm>
-            <a:off x="5120640" y="4251960"/>
-            <a:ext cx="38100" cy="594360"/>
-          </a:xfrm>
-          <a:prstGeom prst="rect">
-            <a:avLst/>
-          </a:prstGeom>
-          <a:solidFill>
-            <a:srgbClr val="60A5FA"/>
+            <a:off x="8001000" y="2615184"/>
+            <a:ext cx="3749039" cy="292608"/>
+          </a:xfrm>
+          <a:prstGeom prst="roundRect">
+            <a:avLst/>
+          </a:prstGeom>
+          <a:solidFill>
+            <a:srgbClr val="161718"/>
           </a:solidFill>
           <a:ln>
             <a:noFill/>
@@ -10189,80 +10190,44 @@
         </p:nvSpPr>
         <p:spPr>
           <a:xfrm>
-            <a:off x="5257800" y="4297680"/>
-            <a:ext cx="1920240" cy="182880"/>
-          </a:xfrm>
-          <a:prstGeom prst="rect">
-            <a:avLst/>
-          </a:prstGeom>
-          <a:noFill/>
-        </p:spPr>
-        <p:txBody>
-          <a:bodyPr wrap="square">
-            <a:spAutoFit/>
-          </a:bodyPr>
-          <a:lstStyle/>
-          <a:p>
-            <a:pPr algn="l">
-              <a:defRPr sz="1000" b="1">
-                <a:solidFill>
-                  <a:srgbClr val="60A5FA"/>
-                </a:solidFill>
-                <a:latin typeface="Calibri"/>
-              </a:defRPr>
-            </a:pPr>
-            <a:r>
-              <a:t>Auto-Match</a:t>
-            </a:r>
-          </a:p>
-        </p:txBody>
-      </p:sp>
-      <p:sp>
-        <p:nvSpPr>
-          <p:cNvPr id="93" name="TextBox 92"/>
-          <p:cNvSpPr txBox="1"/>
-          <p:nvPr/>
-        </p:nvSpPr>
-        <p:spPr>
-          <a:xfrm>
-            <a:off x="5257800" y="4526280"/>
-            <a:ext cx="1920240" cy="182880"/>
-          </a:xfrm>
-          <a:prstGeom prst="rect">
-            <a:avLst/>
-          </a:prstGeom>
-          <a:noFill/>
-        </p:spPr>
-        <p:txBody>
-          <a:bodyPr wrap="square">
-            <a:spAutoFit/>
-          </a:bodyPr>
-          <a:lstStyle/>
-          <a:p>
-            <a:pPr algn="l">
-              <a:defRPr sz="800" b="0">
-                <a:solidFill>
-                  <a:srgbClr val="8A8F98"/>
-                </a:solidFill>
-                <a:latin typeface="Calibri"/>
-              </a:defRPr>
-            </a:pPr>
-            <a:r>
-              <a:t>By industry &amp; country</a:t>
-            </a:r>
-          </a:p>
-        </p:txBody>
-      </p:sp>
-      <p:sp>
-        <p:nvSpPr>
-          <p:cNvPr id="94" name="Rounded Rectangle 93"/>
+            <a:off x="8119872" y="2651760"/>
+            <a:ext cx="3520440" cy="201168"/>
+          </a:xfrm>
+          <a:prstGeom prst="rect">
+            <a:avLst/>
+          </a:prstGeom>
+          <a:noFill/>
+        </p:spPr>
+        <p:txBody>
+          <a:bodyPr wrap="square">
+            <a:spAutoFit/>
+          </a:bodyPr>
+          <a:lstStyle/>
+          <a:p>
+            <a:pPr algn="l">
+              <a:defRPr sz="900" b="0">
+                <a:solidFill>
+                  <a:srgbClr val="C4C9D4"/>
+                </a:solidFill>
+                <a:latin typeface="Calibri"/>
+              </a:defRPr>
+            </a:pPr>
+            <a:r>
+              <a:t>Zero Trust -- Zscaler, Palo Alto</a:t>
+            </a:r>
+          </a:p>
+        </p:txBody>
+      </p:sp>
+      <p:sp>
+        <p:nvSpPr>
+          <p:cNvPr id="93" name="Rounded Rectangle 92"/>
           <p:cNvSpPr/>
           <p:nvPr/>
         </p:nvSpPr>
         <p:spPr>
           <a:xfrm>
-            <a:off x="7452359" y="4251960"/>
-            <a:ext cx="2194560" cy="594360"/>
+            <a:off x="8001000" y="2999232"/>
+            <a:ext cx="3749039" cy="292608"/>
           </a:xfrm>
           <a:prstGeom prst="roundRect">
             <a:avLst/>
@@ -10298,20 +10263,56 @@
       </p:sp>
       <p:sp>
         <p:nvSpPr>
-          <p:cNvPr id="95" name="Rectangle 94"/>
+          <p:cNvPr id="94" name="TextBox 93"/>
+          <p:cNvSpPr txBox="1"/>
+          <p:nvPr/>
+        </p:nvSpPr>
+        <p:spPr>
+          <a:xfrm>
+            <a:off x="8119872" y="3035808"/>
+            <a:ext cx="3520440" cy="201168"/>
+          </a:xfrm>
+          <a:prstGeom prst="rect">
+            <a:avLst/>
+          </a:prstGeom>
+          <a:noFill/>
+        </p:spPr>
+        <p:txBody>
+          <a:bodyPr wrap="square">
+            <a:spAutoFit/>
+          </a:bodyPr>
+          <a:lstStyle/>
+          <a:p>
+            <a:pPr algn="l">
+              <a:defRPr sz="900" b="0">
+                <a:solidFill>
+                  <a:srgbClr val="C4C9D4"/>
+                </a:solidFill>
+                <a:latin typeface="Calibri"/>
+              </a:defRPr>
+            </a:pPr>
+            <a:r>
+              <a:t>Edge Compute -- Lambda@Edge, Vercel</a:t>
+            </a:r>
+          </a:p>
+        </p:txBody>
+      </p:sp>
+      <p:sp>
+        <p:nvSpPr>
+          <p:cNvPr id="95" name="Rounded Rectangle 94"/>
           <p:cNvSpPr/>
           <p:nvPr/>
         </p:nvSpPr>
         <p:spPr>
           <a:xfrm>
-            <a:off x="7452359" y="4251960"/>
-            <a:ext cx="38100" cy="594360"/>
-          </a:xfrm>
-          <a:prstGeom prst="rect">
-            <a:avLst/>
-          </a:prstGeom>
-          <a:solidFill>
-            <a:srgbClr val="34D399"/>
+            <a:off x="8001000" y="3383280"/>
+            <a:ext cx="3749039" cy="292608"/>
+          </a:xfrm>
+          <a:prstGeom prst="roundRect">
+            <a:avLst/>
+          </a:prstGeom>
+          <a:solidFill>
+            <a:srgbClr val="161718"/>
           </a:solidFill>
           <a:ln>
             <a:noFill/>
@@ -10347,30 +10348,30 @@
         </p:nvSpPr>
         <p:spPr>
           <a:xfrm>
-            <a:off x="7589519" y="4297680"/>
-            <a:ext cx="1920240" cy="182880"/>
-          </a:xfrm>
-          <a:prstGeom prst="rect">
-            <a:avLst/>
-          </a:prstGeom>
-          <a:noFill/>
-        </p:spPr>
-        <p:txBody>
-          <a:bodyPr wrap="square">
-            <a:spAutoFit/>
-          </a:bodyPr>
-          <a:lstStyle/>
-          <a:p>
-            <a:pPr algn="l">
-              <a:defRPr sz="1000" b="1">
-                <a:solidFill>
-                  <a:srgbClr val="34D399"/>
-                </a:solidFill>
-                <a:latin typeface="Calibri"/>
-              </a:defRPr>
-            </a:pPr>
-            <a:r>
-              <a:t>Trigger Emails</a:t>
+            <a:off x="8119872" y="3419856"/>
+            <a:ext cx="3520440" cy="201168"/>
+          </a:xfrm>
+          <a:prstGeom prst="rect">
+            <a:avLst/>
+          </a:prstGeom>
+          <a:noFill/>
+        </p:spPr>
+        <p:txBody>
+          <a:bodyPr wrap="square">
+            <a:spAutoFit/>
+          </a:bodyPr>
+          <a:lstStyle/>
+          <a:p>
+            <a:pPr algn="l">
+              <a:defRPr sz="900" b="0">
+                <a:solidFill>
+                  <a:srgbClr val="C4C9D4"/>
+                </a:solidFill>
+                <a:latin typeface="Calibri"/>
+              </a:defRPr>
+            </a:pPr>
+            <a:r>
+              <a:t>DNS -- Route 53, NS1, Google</a:t>
             </a:r>
           </a:p>
         </p:txBody>
@@ -10383,30 +10384,30 @@
         </p:nvSpPr>
         <p:spPr>
           <a:xfrm>
-            <a:off x="7589519" y="4526280"/>
-            <a:ext cx="1920240" cy="182880"/>
-          </a:xfrm>
-          <a:prstGeom prst="rect">
-            <a:avLst/>
-          </a:prstGeom>
-          <a:noFill/>
-        </p:spPr>
-        <p:txBody>
-          <a:bodyPr wrap="square">
-            <a:spAutoFit/>
-          </a:bodyPr>
-          <a:lstStyle/>
-          <a:p>
-            <a:pPr algn="l">
-              <a:defRPr sz="800" b="0">
-                <a:solidFill>
-                  <a:srgbClr val="8A8F98"/>
-                </a:solidFill>
-                <a:latin typeface="Calibri"/>
-              </a:defRPr>
-            </a:pPr>
-            <a:r>
-              <a:t>Incident outreach</a:t>
+            <a:off x="457200" y="4160520"/>
+            <a:ext cx="4572000" cy="228600"/>
+          </a:xfrm>
+          <a:prstGeom prst="rect">
+            <a:avLst/>
+          </a:prstGeom>
+          <a:noFill/>
+        </p:spPr>
+        <p:txBody>
+          <a:bodyPr wrap="square">
+            <a:spAutoFit/>
+          </a:bodyPr>
+          <a:lstStyle/>
+          <a:p>
+            <a:pPr algn="l">
+              <a:defRPr sz="900" b="1">
+                <a:solidFill>
+                  <a:srgbClr val="5A5E66"/>
+                </a:solidFill>
+                <a:latin typeface="Calibri"/>
+              </a:defRPr>
+            </a:pPr>
+            <a:r>
+              <a:t>THREAT INTELLIGENCE</a:t>
             </a:r>
           </a:p>
         </p:txBody>
@@ -10419,8 +10420,8 @@
         </p:nvSpPr>
         <p:spPr>
           <a:xfrm>
-            <a:off x="9784080" y="4251960"/>
-            <a:ext cx="2194560" cy="594360"/>
+            <a:off x="457200" y="4434840"/>
+            <a:ext cx="2194560" cy="548640"/>
           </a:xfrm>
           <a:prstGeom prst="roundRect">
             <a:avLst/>
@@ -10462,14 +10463,14 @@
         </p:nvSpPr>
         <p:spPr>
           <a:xfrm>
-            <a:off x="9784080" y="4251960"/>
-            <a:ext cx="38100" cy="594360"/>
-          </a:xfrm>
-          <a:prstGeom prst="rect">
-            <a:avLst/>
-          </a:prstGeom>
-          <a:solidFill>
-            <a:srgbClr val="A78BFA"/>
+            <a:off x="457200" y="4434840"/>
+            <a:ext cx="38100" cy="548640"/>
+          </a:xfrm>
+          <a:prstGeom prst="rect">
+            <a:avLst/>
+          </a:prstGeom>
+          <a:solidFill>
+            <a:srgbClr val="F87171"/>
           </a:solidFill>
           <a:ln>
             <a:noFill/>
@@ -10505,7 +10506,7 @@
         </p:nvSpPr>
         <p:spPr>
           <a:xfrm>
-            <a:off x="9921240" y="4297680"/>
+            <a:off x="594360" y="4471416"/>
             <a:ext cx="1920240" cy="182880"/>
           </a:xfrm>
           <a:prstGeom prst="rect">
@@ -10522,13 +10523,13 @@
             <a:pPr algn="l">
               <a:defRPr sz="1000" b="1">
                 <a:solidFill>
-                  <a:srgbClr val="A78BFA"/>
-                </a:solidFill>
-                <a:latin typeface="Calibri"/>
-              </a:defRPr>
-            </a:pPr>
-            <a:r>
-              <a:t>Nightly Cron</a:t>
+                  <a:srgbClr val="F87171"/>
+                </a:solidFill>
+                <a:latin typeface="Calibri"/>
+              </a:defRPr>
+            </a:pPr>
+            <a:r>
+              <a:t>26 RSS Feeds</a:t>
             </a:r>
           </a:p>
         </p:txBody>
@@ -10541,7 +10542,7 @@
         </p:nvSpPr>
         <p:spPr>
           <a:xfrm>
-            <a:off x="9921240" y="4526280"/>
+            <a:off x="594360" y="4690872"/>
             <a:ext cx="1920240" cy="182880"/>
           </a:xfrm>
           <a:prstGeom prst="rect">
@@ -10564,57 +10565,21 @@
               </a:defRPr>
             </a:pPr>
             <a:r>
-              <a:t>Daily scan + alerts</a:t>
-            </a:r>
-          </a:p>
-        </p:txBody>
-      </p:sp>
-      <p:sp>
-        <p:nvSpPr>
-          <p:cNvPr id="102" name="TextBox 101"/>
-          <p:cNvSpPr txBox="1"/>
-          <p:nvPr/>
-        </p:nvSpPr>
-        <p:spPr>
-          <a:xfrm>
-            <a:off x="457200" y="5074920"/>
-            <a:ext cx="4572000" cy="228600"/>
-          </a:xfrm>
-          <a:prstGeom prst="rect">
-            <a:avLst/>
-          </a:prstGeom>
-          <a:noFill/>
-        </p:spPr>
-        <p:txBody>
-          <a:bodyPr wrap="square">
-            <a:spAutoFit/>
-          </a:bodyPr>
-          <a:lstStyle/>
-          <a:p>
-            <a:pPr algn="l">
-              <a:defRPr sz="900" b="1">
-                <a:solidFill>
-                  <a:srgbClr val="5A5E66"/>
-                </a:solidFill>
-                <a:latin typeface="Calibri"/>
-              </a:defRPr>
-            </a:pPr>
-            <a:r>
-              <a:t>SECURITY &amp; INTEGRATIONS</a:t>
-            </a:r>
-          </a:p>
-        </p:txBody>
-      </p:sp>
-      <p:sp>
-        <p:nvSpPr>
-          <p:cNvPr id="103" name="Rounded Rectangle 102"/>
+              <a:t>Real-time incidents</a:t>
+            </a:r>
+          </a:p>
+        </p:txBody>
+      </p:sp>
+      <p:sp>
+        <p:nvSpPr>
+          <p:cNvPr id="102" name="Rounded Rectangle 101"/>
           <p:cNvSpPr/>
           <p:nvPr/>
         </p:nvSpPr>
         <p:spPr>
           <a:xfrm>
-            <a:off x="457200" y="5349240"/>
-            <a:ext cx="1188720" cy="365760"/>
+            <a:off x="2788920" y="4434840"/>
+            <a:ext cx="2194560" cy="548640"/>
           </a:xfrm>
           <a:prstGeom prst="roundRect">
             <a:avLst/>
@@ -10650,20 +10615,20 @@
       </p:sp>
       <p:sp>
         <p:nvSpPr>
-          <p:cNvPr id="104" name="Rectangle 103"/>
+          <p:cNvPr id="103" name="Rectangle 102"/>
           <p:cNvSpPr/>
           <p:nvPr/>
         </p:nvSpPr>
         <p:spPr>
           <a:xfrm>
-            <a:off x="457200" y="5349240"/>
-            <a:ext cx="1188720" cy="38100"/>
-          </a:xfrm>
-          <a:prstGeom prst="rect">
-            <a:avLst/>
-          </a:prstGeom>
-          <a:solidFill>
-            <a:srgbClr val="34D399"/>
+            <a:off x="2788920" y="4434840"/>
+            <a:ext cx="38100" cy="548640"/>
+          </a:xfrm>
+          <a:prstGeom prst="rect">
+            <a:avLst/>
+          </a:prstGeom>
+          <a:solidFill>
+            <a:srgbClr val="FBBF24"/>
           </a:solidFill>
           <a:ln>
             <a:noFill/>
@@ -10693,36 +10658,72 @@
       </p:sp>
       <p:sp>
         <p:nvSpPr>
+          <p:cNvPr id="104" name="TextBox 103"/>
+          <p:cNvSpPr txBox="1"/>
+          <p:nvPr/>
+        </p:nvSpPr>
+        <p:spPr>
+          <a:xfrm>
+            <a:off x="2926080" y="4471416"/>
+            <a:ext cx="1920240" cy="182880"/>
+          </a:xfrm>
+          <a:prstGeom prst="rect">
+            <a:avLst/>
+          </a:prstGeom>
+          <a:noFill/>
+        </p:spPr>
+        <p:txBody>
+          <a:bodyPr wrap="square">
+            <a:spAutoFit/>
+          </a:bodyPr>
+          <a:lstStyle/>
+          <a:p>
+            <a:pPr algn="l">
+              <a:defRPr sz="1000" b="1">
+                <a:solidFill>
+                  <a:srgbClr val="FBBF24"/>
+                </a:solidFill>
+                <a:latin typeface="Calibri"/>
+              </a:defRPr>
+            </a:pPr>
+            <a:r>
+              <a:t>GDELT + 5 News APIs</a:t>
+            </a:r>
+          </a:p>
+        </p:txBody>
+      </p:sp>
+      <p:sp>
+        <p:nvSpPr>
           <p:cNvPr id="105" name="TextBox 104"/>
           <p:cNvSpPr txBox="1"/>
           <p:nvPr/>
         </p:nvSpPr>
         <p:spPr>
           <a:xfrm>
-            <a:off x="530352" y="5422392"/>
-            <a:ext cx="1097280" cy="228600"/>
-          </a:xfrm>
-          <a:prstGeom prst="rect">
-            <a:avLst/>
-          </a:prstGeom>
-          <a:noFill/>
-        </p:spPr>
-        <p:txBody>
-          <a:bodyPr wrap="square">
-            <a:spAutoFit/>
-          </a:bodyPr>
-          <a:lstStyle/>
-          <a:p>
-            <a:pPr algn="l">
-              <a:defRPr sz="800" b="1">
-                <a:solidFill>
-                  <a:srgbClr val="34D399"/>
-                </a:solidFill>
-                <a:latin typeface="Calibri"/>
-              </a:defRPr>
-            </a:pPr>
-            <a:r>
-              <a:t>Zero Trust Auth</a:t>
+            <a:off x="2926080" y="4690872"/>
+            <a:ext cx="1920240" cy="182880"/>
+          </a:xfrm>
+          <a:prstGeom prst="rect">
+            <a:avLst/>
+          </a:prstGeom>
+          <a:noFill/>
+        </p:spPr>
+        <p:txBody>
+          <a:bodyPr wrap="square">
+            <a:spAutoFit/>
+          </a:bodyPr>
+          <a:lstStyle/>
+          <a:p>
+            <a:pPr algn="l">
+              <a:defRPr sz="800" b="0">
+                <a:solidFill>
+                  <a:srgbClr val="8A8F98"/>
+                </a:solidFill>
+                <a:latin typeface="Calibri"/>
+              </a:defRPr>
+            </a:pPr>
+            <a:r>
+              <a:t>Google, Bing, NewsAPI, GNews, MediaStack</a:t>
             </a:r>
           </a:p>
         </p:txBody>
@@ -10735,8 +10736,8 @@
         </p:nvSpPr>
         <p:spPr>
           <a:xfrm>
-            <a:off x="1737360" y="5349240"/>
-            <a:ext cx="1188720" cy="365760"/>
+            <a:off x="5120640" y="4434840"/>
+            <a:ext cx="2194560" cy="548640"/>
           </a:xfrm>
           <a:prstGeom prst="roundRect">
             <a:avLst/>
@@ -10778,8 +10779,8 @@
         </p:nvSpPr>
         <p:spPr>
           <a:xfrm>
-            <a:off x="1737360" y="5349240"/>
-            <a:ext cx="1188720" cy="38100"/>
+            <a:off x="5120640" y="4434840"/>
+            <a:ext cx="38100" cy="548640"/>
           </a:xfrm>
           <a:prstGeom prst="rect">
             <a:avLst/>
@@ -10821,22 +10822,22 @@
         </p:nvSpPr>
         <p:spPr>
           <a:xfrm>
-            <a:off x="1810512" y="5422392"/>
-            <a:ext cx="1097280" cy="228600"/>
-          </a:xfrm>
-          <a:prstGeom prst="rect">
-            <a:avLst/>
-          </a:prstGeom>
-          <a:noFill/>
-        </p:spPr>
-        <p:txBody>
-          <a:bodyPr wrap="square">
-            <a:spAutoFit/>
-          </a:bodyPr>
-          <a:lstStyle/>
-          <a:p>
-            <a:pPr algn="l">
-              <a:defRPr sz="800" b="1">
+            <a:off x="5257800" y="4471416"/>
+            <a:ext cx="1920240" cy="182880"/>
+          </a:xfrm>
+          <a:prstGeom prst="rect">
+            <a:avLst/>
+          </a:prstGeom>
+          <a:noFill/>
+        </p:spPr>
+        <p:txBody>
+          <a:bodyPr wrap="square">
+            <a:spAutoFit/>
+          </a:bodyPr>
+          <a:lstStyle/>
+          <a:p>
+            <a:pPr algn="l">
+              <a:defRPr sz="1000" b="1">
                 <a:solidFill>
                   <a:srgbClr val="60A5FA"/>
                 </a:solidFill>
@@ -10844,21 +10845,57 @@
               </a:defRPr>
             </a:pPr>
             <a:r>
-              <a:t>AES-256-GCM</a:t>
-            </a:r>
-          </a:p>
-        </p:txBody>
-      </p:sp>
-      <p:sp>
-        <p:nvSpPr>
-          <p:cNvPr id="109" name="Rounded Rectangle 108"/>
+              <a:t>Auto-Match</a:t>
+            </a:r>
+          </a:p>
+        </p:txBody>
+      </p:sp>
+      <p:sp>
+        <p:nvSpPr>
+          <p:cNvPr id="109" name="TextBox 108"/>
+          <p:cNvSpPr txBox="1"/>
+          <p:nvPr/>
+        </p:nvSpPr>
+        <p:spPr>
+          <a:xfrm>
+            <a:off x="5257800" y="4690872"/>
+            <a:ext cx="1920240" cy="182880"/>
+          </a:xfrm>
+          <a:prstGeom prst="rect">
+            <a:avLst/>
+          </a:prstGeom>
+          <a:noFill/>
+        </p:spPr>
+        <p:txBody>
+          <a:bodyPr wrap="square">
+            <a:spAutoFit/>
+          </a:bodyPr>
+          <a:lstStyle/>
+          <a:p>
+            <a:pPr algn="l">
+              <a:defRPr sz="800" b="0">
+                <a:solidFill>
+                  <a:srgbClr val="8A8F98"/>
+                </a:solidFill>
+                <a:latin typeface="Calibri"/>
+              </a:defRPr>
+            </a:pPr>
+            <a:r>
+              <a:t>By industry &amp; country</a:t>
+            </a:r>
+          </a:p>
+        </p:txBody>
+      </p:sp>
+      <p:sp>
+        <p:nvSpPr>
+          <p:cNvPr id="110" name="Rounded Rectangle 109"/>
           <p:cNvSpPr/>
           <p:nvPr/>
         </p:nvSpPr>
         <p:spPr>
           <a:xfrm>
-            <a:off x="3017520" y="5349240"/>
-            <a:ext cx="1188720" cy="365760"/>
+            <a:off x="7452359" y="4434840"/>
+            <a:ext cx="2194560" cy="548640"/>
           </a:xfrm>
           <a:prstGeom prst="roundRect">
             <a:avLst/>
@@ -10894,20 +10931,20 @@
       </p:sp>
       <p:sp>
         <p:nvSpPr>
-          <p:cNvPr id="110" name="Rectangle 109"/>
+          <p:cNvPr id="111" name="Rectangle 110"/>
           <p:cNvSpPr/>
           <p:nvPr/>
         </p:nvSpPr>
         <p:spPr>
           <a:xfrm>
-            <a:off x="3017520" y="5349240"/>
-            <a:ext cx="1188720" cy="38100"/>
-          </a:xfrm>
-          <a:prstGeom prst="rect">
-            <a:avLst/>
-          </a:prstGeom>
-          <a:solidFill>
-            <a:srgbClr val="F87171"/>
+            <a:off x="7452359" y="4434840"/>
+            <a:ext cx="38100" cy="548640"/>
+          </a:xfrm>
+          <a:prstGeom prst="rect">
+            <a:avLst/>
+          </a:prstGeom>
+          <a:solidFill>
+            <a:srgbClr val="34D399"/>
           </a:solidFill>
           <a:ln>
             <a:noFill/>
@@ -10937,50 +10974,86 @@
       </p:sp>
       <p:sp>
         <p:nvSpPr>
-          <p:cNvPr id="111" name="TextBox 110"/>
-          <p:cNvSpPr txBox="1"/>
-          <p:nvPr/>
-        </p:nvSpPr>
-        <p:spPr>
-          <a:xfrm>
-            <a:off x="3090672" y="5422392"/>
-            <a:ext cx="1097280" cy="228600"/>
-          </a:xfrm>
-          <a:prstGeom prst="rect">
-            <a:avLst/>
-          </a:prstGeom>
-          <a:noFill/>
-        </p:spPr>
-        <p:txBody>
-          <a:bodyPr wrap="square">
-            <a:spAutoFit/>
-          </a:bodyPr>
-          <a:lstStyle/>
-          <a:p>
-            <a:pPr algn="l">
-              <a:defRPr sz="800" b="1">
-                <a:solidFill>
-                  <a:srgbClr val="F87171"/>
-                </a:solidFill>
-                <a:latin typeface="Calibri"/>
-              </a:defRPr>
-            </a:pPr>
-            <a:r>
-              <a:t>SSRF Block</a:t>
-            </a:r>
-          </a:p>
-        </p:txBody>
-      </p:sp>
-      <p:sp>
-        <p:nvSpPr>
-          <p:cNvPr id="112" name="Rounded Rectangle 111"/>
+          <p:cNvPr id="112" name="TextBox 111"/>
+          <p:cNvSpPr txBox="1"/>
+          <p:nvPr/>
+        </p:nvSpPr>
+        <p:spPr>
+          <a:xfrm>
+            <a:off x="7589519" y="4471416"/>
+            <a:ext cx="1920240" cy="182880"/>
+          </a:xfrm>
+          <a:prstGeom prst="rect">
+            <a:avLst/>
+          </a:prstGeom>
+          <a:noFill/>
+        </p:spPr>
+        <p:txBody>
+          <a:bodyPr wrap="square">
+            <a:spAutoFit/>
+          </a:bodyPr>
+          <a:lstStyle/>
+          <a:p>
+            <a:pPr algn="l">
+              <a:defRPr sz="1000" b="1">
+                <a:solidFill>
+                  <a:srgbClr val="34D399"/>
+                </a:solidFill>
+                <a:latin typeface="Calibri"/>
+              </a:defRPr>
+            </a:pPr>
+            <a:r>
+              <a:t>Trigger Emails</a:t>
+            </a:r>
+          </a:p>
+        </p:txBody>
+      </p:sp>
+      <p:sp>
+        <p:nvSpPr>
+          <p:cNvPr id="113" name="TextBox 112"/>
+          <p:cNvSpPr txBox="1"/>
+          <p:nvPr/>
+        </p:nvSpPr>
+        <p:spPr>
+          <a:xfrm>
+            <a:off x="7589519" y="4690872"/>
+            <a:ext cx="1920240" cy="182880"/>
+          </a:xfrm>
+          <a:prstGeom prst="rect">
+            <a:avLst/>
+          </a:prstGeom>
+          <a:noFill/>
+        </p:spPr>
+        <p:txBody>
+          <a:bodyPr wrap="square">
+            <a:spAutoFit/>
+          </a:bodyPr>
+          <a:lstStyle/>
+          <a:p>
+            <a:pPr algn="l">
+              <a:defRPr sz="800" b="0">
+                <a:solidFill>
+                  <a:srgbClr val="8A8F98"/>
+                </a:solidFill>
+                <a:latin typeface="Calibri"/>
+              </a:defRPr>
+            </a:pPr>
+            <a:r>
+              <a:t>Incident outreach</a:t>
+            </a:r>
+          </a:p>
+        </p:txBody>
+      </p:sp>
+      <p:sp>
+        <p:nvSpPr>
+          <p:cNvPr id="114" name="Rounded Rectangle 113"/>
           <p:cNvSpPr/>
           <p:nvPr/>
         </p:nvSpPr>
         <p:spPr>
           <a:xfrm>
-            <a:off x="4297679" y="5349240"/>
-            <a:ext cx="1188720" cy="365760"/>
+            <a:off x="9784080" y="4434840"/>
+            <a:ext cx="2194560" cy="548640"/>
           </a:xfrm>
           <a:prstGeom prst="roundRect">
             <a:avLst/>
@@ -11016,20 +11089,20 @@
       </p:sp>
       <p:sp>
         <p:nvSpPr>
-          <p:cNvPr id="113" name="Rectangle 112"/>
+          <p:cNvPr id="115" name="Rectangle 114"/>
           <p:cNvSpPr/>
           <p:nvPr/>
         </p:nvSpPr>
         <p:spPr>
           <a:xfrm>
-            <a:off x="4297679" y="5349240"/>
-            <a:ext cx="1188720" cy="38100"/>
-          </a:xfrm>
-          <a:prstGeom prst="rect">
-            <a:avLst/>
-          </a:prstGeom>
-          <a:solidFill>
-            <a:srgbClr val="FBBF24"/>
+            <a:off x="9784080" y="4434840"/>
+            <a:ext cx="38100" cy="548640"/>
+          </a:xfrm>
+          <a:prstGeom prst="rect">
+            <a:avLst/>
+          </a:prstGeom>
+          <a:solidFill>
+            <a:srgbClr val="A78BFA"/>
           </a:solidFill>
           <a:ln>
             <a:noFill/>
@@ -11059,50 +11132,122 @@
       </p:sp>
       <p:sp>
         <p:nvSpPr>
-          <p:cNvPr id="114" name="TextBox 113"/>
-          <p:cNvSpPr txBox="1"/>
-          <p:nvPr/>
-        </p:nvSpPr>
-        <p:spPr>
-          <a:xfrm>
-            <a:off x="4370831" y="5422392"/>
-            <a:ext cx="1097280" cy="228600"/>
-          </a:xfrm>
-          <a:prstGeom prst="rect">
-            <a:avLst/>
-          </a:prstGeom>
-          <a:noFill/>
-        </p:spPr>
-        <p:txBody>
-          <a:bodyPr wrap="square">
-            <a:spAutoFit/>
-          </a:bodyPr>
-          <a:lstStyle/>
-          <a:p>
-            <a:pPr algn="l">
-              <a:defRPr sz="800" b="1">
-                <a:solidFill>
-                  <a:srgbClr val="FBBF24"/>
-                </a:solidFill>
-                <a:latin typeface="Calibri"/>
-              </a:defRPr>
-            </a:pPr>
-            <a:r>
-              <a:t>XSS Escaped</a:t>
-            </a:r>
-          </a:p>
-        </p:txBody>
-      </p:sp>
-      <p:sp>
-        <p:nvSpPr>
-          <p:cNvPr id="115" name="Rounded Rectangle 114"/>
+          <p:cNvPr id="116" name="TextBox 115"/>
+          <p:cNvSpPr txBox="1"/>
+          <p:nvPr/>
+        </p:nvSpPr>
+        <p:spPr>
+          <a:xfrm>
+            <a:off x="9921240" y="4471416"/>
+            <a:ext cx="1920240" cy="182880"/>
+          </a:xfrm>
+          <a:prstGeom prst="rect">
+            <a:avLst/>
+          </a:prstGeom>
+          <a:noFill/>
+        </p:spPr>
+        <p:txBody>
+          <a:bodyPr wrap="square">
+            <a:spAutoFit/>
+          </a:bodyPr>
+          <a:lstStyle/>
+          <a:p>
+            <a:pPr algn="l">
+              <a:defRPr sz="1000" b="1">
+                <a:solidFill>
+                  <a:srgbClr val="A78BFA"/>
+                </a:solidFill>
+                <a:latin typeface="Calibri"/>
+              </a:defRPr>
+            </a:pPr>
+            <a:r>
+              <a:t>Nightly Cron</a:t>
+            </a:r>
+          </a:p>
+        </p:txBody>
+      </p:sp>
+      <p:sp>
+        <p:nvSpPr>
+          <p:cNvPr id="117" name="TextBox 116"/>
+          <p:cNvSpPr txBox="1"/>
+          <p:nvPr/>
+        </p:nvSpPr>
+        <p:spPr>
+          <a:xfrm>
+            <a:off x="9921240" y="4690872"/>
+            <a:ext cx="1920240" cy="182880"/>
+          </a:xfrm>
+          <a:prstGeom prst="rect">
+            <a:avLst/>
+          </a:prstGeom>
+          <a:noFill/>
+        </p:spPr>
+        <p:txBody>
+          <a:bodyPr wrap="square">
+            <a:spAutoFit/>
+          </a:bodyPr>
+          <a:lstStyle/>
+          <a:p>
+            <a:pPr algn="l">
+              <a:defRPr sz="800" b="0">
+                <a:solidFill>
+                  <a:srgbClr val="8A8F98"/>
+                </a:solidFill>
+                <a:latin typeface="Calibri"/>
+              </a:defRPr>
+            </a:pPr>
+            <a:r>
+              <a:t>Daily scan + alerts</a:t>
+            </a:r>
+          </a:p>
+        </p:txBody>
+      </p:sp>
+      <p:sp>
+        <p:nvSpPr>
+          <p:cNvPr id="118" name="TextBox 117"/>
+          <p:cNvSpPr txBox="1"/>
+          <p:nvPr/>
+        </p:nvSpPr>
+        <p:spPr>
+          <a:xfrm>
+            <a:off x="457200" y="5166360"/>
+            <a:ext cx="4572000" cy="228600"/>
+          </a:xfrm>
+          <a:prstGeom prst="rect">
+            <a:avLst/>
+          </a:prstGeom>
+          <a:noFill/>
+        </p:spPr>
+        <p:txBody>
+          <a:bodyPr wrap="square">
+            <a:spAutoFit/>
+          </a:bodyPr>
+          <a:lstStyle/>
+          <a:p>
+            <a:pPr algn="l">
+              <a:defRPr sz="900" b="1">
+                <a:solidFill>
+                  <a:srgbClr val="5A5E66"/>
+                </a:solidFill>
+                <a:latin typeface="Calibri"/>
+              </a:defRPr>
+            </a:pPr>
+            <a:r>
+              <a:t>SECURITY &amp; INTEGRATIONS (47 FIXES ACROSS 3 AUDIT ROUNDS)</a:t>
+            </a:r>
+          </a:p>
+        </p:txBody>
+      </p:sp>
+      <p:sp>
+        <p:nvSpPr>
+          <p:cNvPr id="119" name="Rounded Rectangle 118"/>
           <p:cNvSpPr/>
           <p:nvPr/>
         </p:nvSpPr>
         <p:spPr>
           <a:xfrm>
-            <a:off x="5577840" y="5349240"/>
-            <a:ext cx="1188720" cy="365760"/>
+            <a:off x="457200" y="5440680"/>
+            <a:ext cx="1097280" cy="365760"/>
           </a:xfrm>
           <a:prstGeom prst="roundRect">
             <a:avLst/>
@@ -11138,20 +11283,20 @@
       </p:sp>
       <p:sp>
         <p:nvSpPr>
-          <p:cNvPr id="116" name="Rectangle 115"/>
+          <p:cNvPr id="120" name="Rectangle 119"/>
           <p:cNvSpPr/>
           <p:nvPr/>
         </p:nvSpPr>
         <p:spPr>
           <a:xfrm>
-            <a:off x="5577840" y="5349240"/>
-            <a:ext cx="1188720" cy="38100"/>
-          </a:xfrm>
-          <a:prstGeom prst="rect">
-            <a:avLst/>
-          </a:prstGeom>
-          <a:solidFill>
-            <a:srgbClr val="A78BFA"/>
+            <a:off x="457200" y="5440680"/>
+            <a:ext cx="1097280" cy="38100"/>
+          </a:xfrm>
+          <a:prstGeom prst="rect">
+            <a:avLst/>
+          </a:prstGeom>
+          <a:solidFill>
+            <a:srgbClr val="34D399"/>
           </a:solidFill>
           <a:ln>
             <a:noFill/>
@@ -11181,14 +11326,14 @@
       </p:sp>
       <p:sp>
         <p:nvSpPr>
-          <p:cNvPr id="117" name="TextBox 116"/>
-          <p:cNvSpPr txBox="1"/>
-          <p:nvPr/>
-        </p:nvSpPr>
-        <p:spPr>
-          <a:xfrm>
-            <a:off x="5650992" y="5422392"/>
-            <a:ext cx="1097280" cy="228600"/>
+          <p:cNvPr id="121" name="TextBox 120"/>
+          <p:cNvSpPr txBox="1"/>
+          <p:nvPr/>
+        </p:nvSpPr>
+        <p:spPr>
+          <a:xfrm>
+            <a:off x="530352" y="5513832"/>
+            <a:ext cx="1005840" cy="228600"/>
           </a:xfrm>
           <a:prstGeom prst="rect">
             <a:avLst/>
@@ -11204,27 +11349,27 @@
             <a:pPr algn="l">
               <a:defRPr sz="800" b="1">
                 <a:solidFill>
-                  <a:srgbClr val="A78BFA"/>
-                </a:solidFill>
-                <a:latin typeface="Calibri"/>
-              </a:defRPr>
-            </a:pPr>
-            <a:r>
-              <a:t>SOQL Safe</a:t>
-            </a:r>
-          </a:p>
-        </p:txBody>
-      </p:sp>
-      <p:sp>
-        <p:nvSpPr>
-          <p:cNvPr id="118" name="Rounded Rectangle 117"/>
+                  <a:srgbClr val="34D399"/>
+                </a:solidFill>
+                <a:latin typeface="Calibri"/>
+              </a:defRPr>
+            </a:pPr>
+            <a:r>
+              <a:t>Access JWT</a:t>
+            </a:r>
+          </a:p>
+        </p:txBody>
+      </p:sp>
+      <p:sp>
+        <p:nvSpPr>
+          <p:cNvPr id="122" name="Rounded Rectangle 121"/>
           <p:cNvSpPr/>
           <p:nvPr/>
         </p:nvSpPr>
         <p:spPr>
           <a:xfrm>
-            <a:off x="6858000" y="5349240"/>
-            <a:ext cx="1188720" cy="365760"/>
+            <a:off x="1618488" y="5440680"/>
+            <a:ext cx="1097280" cy="365760"/>
           </a:xfrm>
           <a:prstGeom prst="roundRect">
             <a:avLst/>
@@ -11260,20 +11405,20 @@
       </p:sp>
       <p:sp>
         <p:nvSpPr>
-          <p:cNvPr id="119" name="Rectangle 118"/>
+          <p:cNvPr id="123" name="Rectangle 122"/>
           <p:cNvSpPr/>
           <p:nvPr/>
         </p:nvSpPr>
         <p:spPr>
           <a:xfrm>
-            <a:off x="6858000" y="5349240"/>
-            <a:ext cx="1188720" cy="38100"/>
-          </a:xfrm>
-          <a:prstGeom prst="rect">
-            <a:avLst/>
-          </a:prstGeom>
-          <a:solidFill>
-            <a:srgbClr val="7C7FFF"/>
+            <a:off x="1618488" y="5440680"/>
+            <a:ext cx="1097280" cy="38100"/>
+          </a:xfrm>
+          <a:prstGeom prst="rect">
+            <a:avLst/>
+          </a:prstGeom>
+          <a:solidFill>
+            <a:srgbClr val="60A5FA"/>
           </a:solidFill>
           <a:ln>
             <a:noFill/>
@@ -11303,14 +11448,14 @@
       </p:sp>
       <p:sp>
         <p:nvSpPr>
-          <p:cNvPr id="120" name="TextBox 119"/>
-          <p:cNvSpPr txBox="1"/>
-          <p:nvPr/>
-        </p:nvSpPr>
-        <p:spPr>
-          <a:xfrm>
-            <a:off x="6931152" y="5422392"/>
-            <a:ext cx="1097280" cy="228600"/>
+          <p:cNvPr id="124" name="TextBox 123"/>
+          <p:cNvSpPr txBox="1"/>
+          <p:nvPr/>
+        </p:nvSpPr>
+        <p:spPr>
+          <a:xfrm>
+            <a:off x="1691640" y="5513832"/>
+            <a:ext cx="1005840" cy="228600"/>
           </a:xfrm>
           <a:prstGeom prst="rect">
             <a:avLst/>
@@ -11326,27 +11471,27 @@
             <a:pPr algn="l">
               <a:defRPr sz="800" b="1">
                 <a:solidFill>
-                  <a:srgbClr val="7C7FFF"/>
-                </a:solidFill>
-                <a:latin typeface="Calibri"/>
-              </a:defRPr>
-            </a:pPr>
-            <a:r>
-              <a:t>CORS Locked</a:t>
-            </a:r>
-          </a:p>
-        </p:txBody>
-      </p:sp>
-      <p:sp>
-        <p:nvSpPr>
-          <p:cNvPr id="121" name="Rounded Rectangle 120"/>
+                  <a:srgbClr val="60A5FA"/>
+                </a:solidFill>
+                <a:latin typeface="Calibri"/>
+              </a:defRPr>
+            </a:pPr>
+            <a:r>
+              <a:t>AES-256-GCM</a:t>
+            </a:r>
+          </a:p>
+        </p:txBody>
+      </p:sp>
+      <p:sp>
+        <p:nvSpPr>
+          <p:cNvPr id="125" name="Rounded Rectangle 124"/>
           <p:cNvSpPr/>
           <p:nvPr/>
         </p:nvSpPr>
         <p:spPr>
           <a:xfrm>
-            <a:off x="8138159" y="5349240"/>
-            <a:ext cx="1188720" cy="365760"/>
+            <a:off x="2779776" y="5440680"/>
+            <a:ext cx="1097280" cy="365760"/>
           </a:xfrm>
           <a:prstGeom prst="roundRect">
             <a:avLst/>
@@ -11382,20 +11527,20 @@
       </p:sp>
       <p:sp>
         <p:nvSpPr>
-          <p:cNvPr id="122" name="Rectangle 121"/>
+          <p:cNvPr id="126" name="Rectangle 125"/>
           <p:cNvSpPr/>
           <p:nvPr/>
         </p:nvSpPr>
         <p:spPr>
           <a:xfrm>
-            <a:off x="8138159" y="5349240"/>
-            <a:ext cx="1188720" cy="38100"/>
-          </a:xfrm>
-          <a:prstGeom prst="rect">
-            <a:avLst/>
-          </a:prstGeom>
-          <a:solidFill>
-            <a:srgbClr val="34D399"/>
+            <a:off x="2779776" y="5440680"/>
+            <a:ext cx="1097280" cy="38100"/>
+          </a:xfrm>
+          <a:prstGeom prst="rect">
+            <a:avLst/>
+          </a:prstGeom>
+          <a:solidFill>
+            <a:srgbClr val="F87171"/>
           </a:solidFill>
           <a:ln>
             <a:noFill/>
@@ -11425,14 +11570,14 @@
       </p:sp>
       <p:sp>
         <p:nvSpPr>
-          <p:cNvPr id="123" name="TextBox 122"/>
-          <p:cNvSpPr txBox="1"/>
-          <p:nvPr/>
-        </p:nvSpPr>
-        <p:spPr>
-          <a:xfrm>
-            <a:off x="8211311" y="5422392"/>
-            <a:ext cx="1097280" cy="228600"/>
+          <p:cNvPr id="127" name="TextBox 126"/>
+          <p:cNvSpPr txBox="1"/>
+          <p:nvPr/>
+        </p:nvSpPr>
+        <p:spPr>
+          <a:xfrm>
+            <a:off x="2852928" y="5513832"/>
+            <a:ext cx="1005840" cy="228600"/>
           </a:xfrm>
           <a:prstGeom prst="rect">
             <a:avLst/>
@@ -11448,27 +11593,27 @@
             <a:pPr algn="l">
               <a:defRPr sz="800" b="1">
                 <a:solidFill>
-                  <a:srgbClr val="34D399"/>
-                </a:solidFill>
-                <a:latin typeface="Calibri"/>
-              </a:defRPr>
-            </a:pPr>
-            <a:r>
-              <a:t>Gmail OAuth</a:t>
-            </a:r>
-          </a:p>
-        </p:txBody>
-      </p:sp>
-      <p:sp>
-        <p:nvSpPr>
-          <p:cNvPr id="124" name="Rounded Rectangle 123"/>
+                  <a:srgbClr val="F87171"/>
+                </a:solidFill>
+                <a:latin typeface="Calibri"/>
+              </a:defRPr>
+            </a:pPr>
+            <a:r>
+              <a:t>SSRF Block</a:t>
+            </a:r>
+          </a:p>
+        </p:txBody>
+      </p:sp>
+      <p:sp>
+        <p:nvSpPr>
+          <p:cNvPr id="128" name="Rounded Rectangle 127"/>
           <p:cNvSpPr/>
           <p:nvPr/>
         </p:nvSpPr>
         <p:spPr>
           <a:xfrm>
-            <a:off x="9418319" y="5349240"/>
-            <a:ext cx="1188720" cy="365760"/>
+            <a:off x="3941064" y="5440680"/>
+            <a:ext cx="1097280" cy="365760"/>
           </a:xfrm>
           <a:prstGeom prst="roundRect">
             <a:avLst/>
@@ -11504,20 +11649,20 @@
       </p:sp>
       <p:sp>
         <p:nvSpPr>
-          <p:cNvPr id="125" name="Rectangle 124"/>
+          <p:cNvPr id="129" name="Rectangle 128"/>
           <p:cNvSpPr/>
           <p:nvPr/>
         </p:nvSpPr>
         <p:spPr>
           <a:xfrm>
-            <a:off x="9418319" y="5349240"/>
-            <a:ext cx="1188720" cy="38100"/>
-          </a:xfrm>
-          <a:prstGeom prst="rect">
-            <a:avLst/>
-          </a:prstGeom>
-          <a:solidFill>
-            <a:srgbClr val="60A5FA"/>
+            <a:off x="3941064" y="5440680"/>
+            <a:ext cx="1097280" cy="38100"/>
+          </a:xfrm>
+          <a:prstGeom prst="rect">
+            <a:avLst/>
+          </a:prstGeom>
+          <a:solidFill>
+            <a:srgbClr val="FBBF24"/>
           </a:solidFill>
           <a:ln>
             <a:noFill/>
@@ -11547,14 +11692,14 @@
       </p:sp>
       <p:sp>
         <p:nvSpPr>
-          <p:cNvPr id="126" name="TextBox 125"/>
-          <p:cNvSpPr txBox="1"/>
-          <p:nvPr/>
-        </p:nvSpPr>
-        <p:spPr>
-          <a:xfrm>
-            <a:off x="9491471" y="5422392"/>
-            <a:ext cx="1097280" cy="228600"/>
+          <p:cNvPr id="130" name="TextBox 129"/>
+          <p:cNvSpPr txBox="1"/>
+          <p:nvPr/>
+        </p:nvSpPr>
+        <p:spPr>
+          <a:xfrm>
+            <a:off x="4014216" y="5513832"/>
+            <a:ext cx="1005840" cy="228600"/>
           </a:xfrm>
           <a:prstGeom prst="rect">
             <a:avLst/>
@@ -11570,27 +11715,27 @@
             <a:pPr algn="l">
               <a:defRPr sz="800" b="1">
                 <a:solidFill>
-                  <a:srgbClr val="60A5FA"/>
-                </a:solidFill>
-                <a:latin typeface="Calibri"/>
-              </a:defRPr>
-            </a:pPr>
-            <a:r>
-              <a:t>Salesforce OAuth</a:t>
-            </a:r>
-          </a:p>
-        </p:txBody>
-      </p:sp>
-      <p:sp>
-        <p:nvSpPr>
-          <p:cNvPr id="127" name="Rounded Rectangle 126"/>
+                  <a:srgbClr val="FBBF24"/>
+                </a:solidFill>
+                <a:latin typeface="Calibri"/>
+              </a:defRPr>
+            </a:pPr>
+            <a:r>
+              <a:t>XSS Escaped</a:t>
+            </a:r>
+          </a:p>
+        </p:txBody>
+      </p:sp>
+      <p:sp>
+        <p:nvSpPr>
+          <p:cNvPr id="131" name="Rounded Rectangle 130"/>
           <p:cNvSpPr/>
           <p:nvPr/>
         </p:nvSpPr>
         <p:spPr>
           <a:xfrm>
-            <a:off x="10698480" y="5349240"/>
-            <a:ext cx="1188720" cy="365760"/>
+            <a:off x="5102352" y="5440680"/>
+            <a:ext cx="1097280" cy="365760"/>
           </a:xfrm>
           <a:prstGeom prst="roundRect">
             <a:avLst/>
@@ -11626,14 +11771,14 @@
       </p:sp>
       <p:sp>
         <p:nvSpPr>
-          <p:cNvPr id="128" name="Rectangle 127"/>
+          <p:cNvPr id="132" name="Rectangle 131"/>
           <p:cNvSpPr/>
           <p:nvPr/>
         </p:nvSpPr>
         <p:spPr>
           <a:xfrm>
-            <a:off x="10698480" y="5349240"/>
-            <a:ext cx="1188720" cy="38100"/>
+            <a:off x="5102352" y="5440680"/>
+            <a:ext cx="1097280" cy="38100"/>
           </a:xfrm>
           <a:prstGeom prst="rect">
             <a:avLst/>
@@ -11669,14 +11814,14 @@
       </p:sp>
       <p:sp>
         <p:nvSpPr>
-          <p:cNvPr id="129" name="TextBox 128"/>
-          <p:cNvSpPr txBox="1"/>
-          <p:nvPr/>
-        </p:nvSpPr>
-        <p:spPr>
-          <a:xfrm>
-            <a:off x="10771632" y="5422392"/>
-            <a:ext cx="1097280" cy="228600"/>
+          <p:cNvPr id="133" name="TextBox 132"/>
+          <p:cNvSpPr txBox="1"/>
+          <p:nvPr/>
+        </p:nvSpPr>
+        <p:spPr>
+          <a:xfrm>
+            <a:off x="5175504" y="5513832"/>
+            <a:ext cx="1005840" cy="228600"/>
           </a:xfrm>
           <a:prstGeom prst="rect">
             <a:avLst/>
@@ -11698,7 +11843,617 @@
               </a:defRPr>
             </a:pPr>
             <a:r>
+              <a:t>SOQL Safe</a:t>
+            </a:r>
+          </a:p>
+        </p:txBody>
+      </p:sp>
+      <p:sp>
+        <p:nvSpPr>
+          <p:cNvPr id="134" name="Rounded Rectangle 133"/>
+          <p:cNvSpPr/>
+          <p:nvPr/>
+        </p:nvSpPr>
+        <p:spPr>
+          <a:xfrm>
+            <a:off x="6263640" y="5440680"/>
+            <a:ext cx="1097280" cy="365760"/>
+          </a:xfrm>
+          <a:prstGeom prst="roundRect">
+            <a:avLst/>
+          </a:prstGeom>
+          <a:solidFill>
+            <a:srgbClr val="161718"/>
+          </a:solidFill>
+          <a:ln>
+            <a:noFill/>
+          </a:ln>
+        </p:spPr>
+        <p:style>
+          <a:lnRef idx="1">
+            <a:schemeClr val="accent1"/>
+          </a:lnRef>
+          <a:fillRef idx="3">
+            <a:schemeClr val="accent1"/>
+          </a:fillRef>
+          <a:effectRef idx="2">
+            <a:schemeClr val="accent1"/>
+          </a:effectRef>
+          <a:fontRef idx="minor">
+            <a:schemeClr val="lt1"/>
+          </a:fontRef>
+        </p:style>
+        <p:txBody>
+          <a:bodyPr rtlCol="0" anchor="ctr"/>
+          <a:lstStyle/>
+          <a:p>
+            <a:pPr algn="ctr"/>
+          </a:p>
+        </p:txBody>
+      </p:sp>
+      <p:sp>
+        <p:nvSpPr>
+          <p:cNvPr id="135" name="Rectangle 134"/>
+          <p:cNvSpPr/>
+          <p:nvPr/>
+        </p:nvSpPr>
+        <p:spPr>
+          <a:xfrm>
+            <a:off x="6263640" y="5440680"/>
+            <a:ext cx="1097280" cy="38100"/>
+          </a:xfrm>
+          <a:prstGeom prst="rect">
+            <a:avLst/>
+          </a:prstGeom>
+          <a:solidFill>
+            <a:srgbClr val="7C7FFF"/>
+          </a:solidFill>
+          <a:ln>
+            <a:noFill/>
+          </a:ln>
+        </p:spPr>
+        <p:style>
+          <a:lnRef idx="1">
+            <a:schemeClr val="accent1"/>
+          </a:lnRef>
+          <a:fillRef idx="3">
+            <a:schemeClr val="accent1"/>
+          </a:fillRef>
+          <a:effectRef idx="2">
+            <a:schemeClr val="accent1"/>
+          </a:effectRef>
+          <a:fontRef idx="minor">
+            <a:schemeClr val="lt1"/>
+          </a:fontRef>
+        </p:style>
+        <p:txBody>
+          <a:bodyPr rtlCol="0" anchor="ctr"/>
+          <a:lstStyle/>
+          <a:p>
+            <a:pPr algn="ctr"/>
+          </a:p>
+        </p:txBody>
+      </p:sp>
+      <p:sp>
+        <p:nvSpPr>
+          <p:cNvPr id="136" name="TextBox 135"/>
+          <p:cNvSpPr txBox="1"/>
+          <p:nvPr/>
+        </p:nvSpPr>
+        <p:spPr>
+          <a:xfrm>
+            <a:off x="6336792" y="5513832"/>
+            <a:ext cx="1005840" cy="228600"/>
+          </a:xfrm>
+          <a:prstGeom prst="rect">
+            <a:avLst/>
+          </a:prstGeom>
+          <a:noFill/>
+        </p:spPr>
+        <p:txBody>
+          <a:bodyPr wrap="square">
+            <a:spAutoFit/>
+          </a:bodyPr>
+          <a:lstStyle/>
+          <a:p>
+            <a:pPr algn="l">
+              <a:defRPr sz="800" b="1">
+                <a:solidFill>
+                  <a:srgbClr val="7C7FFF"/>
+                </a:solidFill>
+                <a:latin typeface="Calibri"/>
+              </a:defRPr>
+            </a:pPr>
+            <a:r>
+              <a:t>CORS Locked</a:t>
+            </a:r>
+          </a:p>
+        </p:txBody>
+      </p:sp>
+      <p:sp>
+        <p:nvSpPr>
+          <p:cNvPr id="137" name="Rounded Rectangle 136"/>
+          <p:cNvSpPr/>
+          <p:nvPr/>
+        </p:nvSpPr>
+        <p:spPr>
+          <a:xfrm>
+            <a:off x="7424928" y="5440680"/>
+            <a:ext cx="1097280" cy="365760"/>
+          </a:xfrm>
+          <a:prstGeom prst="roundRect">
+            <a:avLst/>
+          </a:prstGeom>
+          <a:solidFill>
+            <a:srgbClr val="161718"/>
+          </a:solidFill>
+          <a:ln>
+            <a:noFill/>
+          </a:ln>
+        </p:spPr>
+        <p:style>
+          <a:lnRef idx="1">
+            <a:schemeClr val="accent1"/>
+          </a:lnRef>
+          <a:fillRef idx="3">
+            <a:schemeClr val="accent1"/>
+          </a:fillRef>
+          <a:effectRef idx="2">
+            <a:schemeClr val="accent1"/>
+          </a:effectRef>
+          <a:fontRef idx="minor">
+            <a:schemeClr val="lt1"/>
+          </a:fontRef>
+        </p:style>
+        <p:txBody>
+          <a:bodyPr rtlCol="0" anchor="ctr"/>
+          <a:lstStyle/>
+          <a:p>
+            <a:pPr algn="ctr"/>
+          </a:p>
+        </p:txBody>
+      </p:sp>
+      <p:sp>
+        <p:nvSpPr>
+          <p:cNvPr id="138" name="Rectangle 137"/>
+          <p:cNvSpPr/>
+          <p:nvPr/>
+        </p:nvSpPr>
+        <p:spPr>
+          <a:xfrm>
+            <a:off x="7424928" y="5440680"/>
+            <a:ext cx="1097280" cy="38100"/>
+          </a:xfrm>
+          <a:prstGeom prst="rect">
+            <a:avLst/>
+          </a:prstGeom>
+          <a:solidFill>
+            <a:srgbClr val="34D399"/>
+          </a:solidFill>
+          <a:ln>
+            <a:noFill/>
+          </a:ln>
+        </p:spPr>
+        <p:style>
+          <a:lnRef idx="1">
+            <a:schemeClr val="accent1"/>
+          </a:lnRef>
+          <a:fillRef idx="3">
+            <a:schemeClr val="accent1"/>
+          </a:fillRef>
+          <a:effectRef idx="2">
+            <a:schemeClr val="accent1"/>
+          </a:effectRef>
+          <a:fontRef idx="minor">
+            <a:schemeClr val="lt1"/>
+          </a:fontRef>
+        </p:style>
+        <p:txBody>
+          <a:bodyPr rtlCol="0" anchor="ctr"/>
+          <a:lstStyle/>
+          <a:p>
+            <a:pPr algn="ctr"/>
+          </a:p>
+        </p:txBody>
+      </p:sp>
+      <p:sp>
+        <p:nvSpPr>
+          <p:cNvPr id="139" name="TextBox 138"/>
+          <p:cNvSpPr txBox="1"/>
+          <p:nvPr/>
+        </p:nvSpPr>
+        <p:spPr>
+          <a:xfrm>
+            <a:off x="7498080" y="5513832"/>
+            <a:ext cx="1005840" cy="228600"/>
+          </a:xfrm>
+          <a:prstGeom prst="rect">
+            <a:avLst/>
+          </a:prstGeom>
+          <a:noFill/>
+        </p:spPr>
+        <p:txBody>
+          <a:bodyPr wrap="square">
+            <a:spAutoFit/>
+          </a:bodyPr>
+          <a:lstStyle/>
+          <a:p>
+            <a:pPr algn="l">
+              <a:defRPr sz="800" b="1">
+                <a:solidFill>
+                  <a:srgbClr val="34D399"/>
+                </a:solidFill>
+                <a:latin typeface="Calibri"/>
+              </a:defRPr>
+            </a:pPr>
+            <a:r>
+              <a:t>Gmail OAuth</a:t>
+            </a:r>
+          </a:p>
+        </p:txBody>
+      </p:sp>
+      <p:sp>
+        <p:nvSpPr>
+          <p:cNvPr id="140" name="Rounded Rectangle 139"/>
+          <p:cNvSpPr/>
+          <p:nvPr/>
+        </p:nvSpPr>
+        <p:spPr>
+          <a:xfrm>
+            <a:off x="8586216" y="5440680"/>
+            <a:ext cx="1097280" cy="365760"/>
+          </a:xfrm>
+          <a:prstGeom prst="roundRect">
+            <a:avLst/>
+          </a:prstGeom>
+          <a:solidFill>
+            <a:srgbClr val="161718"/>
+          </a:solidFill>
+          <a:ln>
+            <a:noFill/>
+          </a:ln>
+        </p:spPr>
+        <p:style>
+          <a:lnRef idx="1">
+            <a:schemeClr val="accent1"/>
+          </a:lnRef>
+          <a:fillRef idx="3">
+            <a:schemeClr val="accent1"/>
+          </a:fillRef>
+          <a:effectRef idx="2">
+            <a:schemeClr val="accent1"/>
+          </a:effectRef>
+          <a:fontRef idx="minor">
+            <a:schemeClr val="lt1"/>
+          </a:fontRef>
+        </p:style>
+        <p:txBody>
+          <a:bodyPr rtlCol="0" anchor="ctr"/>
+          <a:lstStyle/>
+          <a:p>
+            <a:pPr algn="ctr"/>
+          </a:p>
+        </p:txBody>
+      </p:sp>
+      <p:sp>
+        <p:nvSpPr>
+          <p:cNvPr id="141" name="Rectangle 140"/>
+          <p:cNvSpPr/>
+          <p:nvPr/>
+        </p:nvSpPr>
+        <p:spPr>
+          <a:xfrm>
+            <a:off x="8586216" y="5440680"/>
+            <a:ext cx="1097280" cy="38100"/>
+          </a:xfrm>
+          <a:prstGeom prst="rect">
+            <a:avLst/>
+          </a:prstGeom>
+          <a:solidFill>
+            <a:srgbClr val="60A5FA"/>
+          </a:solidFill>
+          <a:ln>
+            <a:noFill/>
+          </a:ln>
+        </p:spPr>
+        <p:style>
+          <a:lnRef idx="1">
+            <a:schemeClr val="accent1"/>
+          </a:lnRef>
+          <a:fillRef idx="3">
+            <a:schemeClr val="accent1"/>
+          </a:fillRef>
+          <a:effectRef idx="2">
+            <a:schemeClr val="accent1"/>
+          </a:effectRef>
+          <a:fontRef idx="minor">
+            <a:schemeClr val="lt1"/>
+          </a:fontRef>
+        </p:style>
+        <p:txBody>
+          <a:bodyPr rtlCol="0" anchor="ctr"/>
+          <a:lstStyle/>
+          <a:p>
+            <a:pPr algn="ctr"/>
+          </a:p>
+        </p:txBody>
+      </p:sp>
+      <p:sp>
+        <p:nvSpPr>
+          <p:cNvPr id="142" name="TextBox 141"/>
+          <p:cNvSpPr txBox="1"/>
+          <p:nvPr/>
+        </p:nvSpPr>
+        <p:spPr>
+          <a:xfrm>
+            <a:off x="8659368" y="5513832"/>
+            <a:ext cx="1005840" cy="228600"/>
+          </a:xfrm>
+          <a:prstGeom prst="rect">
+            <a:avLst/>
+          </a:prstGeom>
+          <a:noFill/>
+        </p:spPr>
+        <p:txBody>
+          <a:bodyPr wrap="square">
+            <a:spAutoFit/>
+          </a:bodyPr>
+          <a:lstStyle/>
+          <a:p>
+            <a:pPr algn="l">
+              <a:defRPr sz="800" b="1">
+                <a:solidFill>
+                  <a:srgbClr val="60A5FA"/>
+                </a:solidFill>
+                <a:latin typeface="Calibri"/>
+              </a:defRPr>
+            </a:pPr>
+            <a:r>
+              <a:t>SF OAuth</a:t>
+            </a:r>
+          </a:p>
+        </p:txBody>
+      </p:sp>
+      <p:sp>
+        <p:nvSpPr>
+          <p:cNvPr id="143" name="Rounded Rectangle 142"/>
+          <p:cNvSpPr/>
+          <p:nvPr/>
+        </p:nvSpPr>
+        <p:spPr>
+          <a:xfrm>
+            <a:off x="9747504" y="5440680"/>
+            <a:ext cx="1097280" cy="365760"/>
+          </a:xfrm>
+          <a:prstGeom prst="roundRect">
+            <a:avLst/>
+          </a:prstGeom>
+          <a:solidFill>
+            <a:srgbClr val="161718"/>
+          </a:solidFill>
+          <a:ln>
+            <a:noFill/>
+          </a:ln>
+        </p:spPr>
+        <p:style>
+          <a:lnRef idx="1">
+            <a:schemeClr val="accent1"/>
+          </a:lnRef>
+          <a:fillRef idx="3">
+            <a:schemeClr val="accent1"/>
+          </a:fillRef>
+          <a:effectRef idx="2">
+            <a:schemeClr val="accent1"/>
+          </a:effectRef>
+          <a:fontRef idx="minor">
+            <a:schemeClr val="lt1"/>
+          </a:fontRef>
+        </p:style>
+        <p:txBody>
+          <a:bodyPr rtlCol="0" anchor="ctr"/>
+          <a:lstStyle/>
+          <a:p>
+            <a:pPr algn="ctr"/>
+          </a:p>
+        </p:txBody>
+      </p:sp>
+      <p:sp>
+        <p:nvSpPr>
+          <p:cNvPr id="144" name="Rectangle 143"/>
+          <p:cNvSpPr/>
+          <p:nvPr/>
+        </p:nvSpPr>
+        <p:spPr>
+          <a:xfrm>
+            <a:off x="9747504" y="5440680"/>
+            <a:ext cx="1097280" cy="38100"/>
+          </a:xfrm>
+          <a:prstGeom prst="rect">
+            <a:avLst/>
+          </a:prstGeom>
+          <a:solidFill>
+            <a:srgbClr val="A78BFA"/>
+          </a:solidFill>
+          <a:ln>
+            <a:noFill/>
+          </a:ln>
+        </p:spPr>
+        <p:style>
+          <a:lnRef idx="1">
+            <a:schemeClr val="accent1"/>
+          </a:lnRef>
+          <a:fillRef idx="3">
+            <a:schemeClr val="accent1"/>
+          </a:fillRef>
+          <a:effectRef idx="2">
+            <a:schemeClr val="accent1"/>
+          </a:effectRef>
+          <a:fontRef idx="minor">
+            <a:schemeClr val="lt1"/>
+          </a:fontRef>
+        </p:style>
+        <p:txBody>
+          <a:bodyPr rtlCol="0" anchor="ctr"/>
+          <a:lstStyle/>
+          <a:p>
+            <a:pPr algn="ctr"/>
+          </a:p>
+        </p:txBody>
+      </p:sp>
+      <p:sp>
+        <p:nvSpPr>
+          <p:cNvPr id="145" name="TextBox 144"/>
+          <p:cNvSpPr txBox="1"/>
+          <p:nvPr/>
+        </p:nvSpPr>
+        <p:spPr>
+          <a:xfrm>
+            <a:off x="9820656" y="5513832"/>
+            <a:ext cx="1005840" cy="228600"/>
+          </a:xfrm>
+          <a:prstGeom prst="rect">
+            <a:avLst/>
+          </a:prstGeom>
+          <a:noFill/>
+        </p:spPr>
+        <p:txBody>
+          <a:bodyPr wrap="square">
+            <a:spAutoFit/>
+          </a:bodyPr>
+          <a:lstStyle/>
+          <a:p>
+            <a:pPr algn="l">
+              <a:defRPr sz="800" b="1">
+                <a:solidFill>
+                  <a:srgbClr val="A78BFA"/>
+                </a:solidFill>
+                <a:latin typeface="Calibri"/>
+              </a:defRPr>
+            </a:pPr>
+            <a:r>
               <a:t>Share Links</a:t>
+            </a:r>
+          </a:p>
+        </p:txBody>
+      </p:sp>
+      <p:sp>
+        <p:nvSpPr>
+          <p:cNvPr id="146" name="Rounded Rectangle 145"/>
+          <p:cNvSpPr/>
+          <p:nvPr/>
+        </p:nvSpPr>
+        <p:spPr>
+          <a:xfrm>
+            <a:off x="10908792" y="5440680"/>
+            <a:ext cx="1097280" cy="365760"/>
+          </a:xfrm>
+          <a:prstGeom prst="roundRect">
+            <a:avLst/>
+          </a:prstGeom>
+          <a:solidFill>
+            <a:srgbClr val="161718"/>
+          </a:solidFill>
+          <a:ln>
+            <a:noFill/>
+          </a:ln>
+        </p:spPr>
+        <p:style>
+          <a:lnRef idx="1">
+            <a:schemeClr val="accent1"/>
+          </a:lnRef>
+          <a:fillRef idx="3">
+            <a:schemeClr val="accent1"/>
+          </a:fillRef>
+          <a:effectRef idx="2">
+            <a:schemeClr val="accent1"/>
+          </a:effectRef>
+          <a:fontRef idx="minor">
+            <a:schemeClr val="lt1"/>
+          </a:fontRef>
+        </p:style>
+        <p:txBody>
+          <a:bodyPr rtlCol="0" anchor="ctr"/>
+          <a:lstStyle/>
+          <a:p>
+            <a:pPr algn="ctr"/>
+          </a:p>
+        </p:txBody>
+      </p:sp>
+      <p:sp>
+        <p:nvSpPr>
+          <p:cNvPr id="147" name="Rectangle 146"/>
+          <p:cNvSpPr/>
+          <p:nvPr/>
+        </p:nvSpPr>
+        <p:spPr>
+          <a:xfrm>
+            <a:off x="10908792" y="5440680"/>
+            <a:ext cx="1097280" cy="38100"/>
+          </a:xfrm>
+          <a:prstGeom prst="rect">
+            <a:avLst/>
+          </a:prstGeom>
+          <a:solidFill>
+            <a:srgbClr val="FB923C"/>
+          </a:solidFill>
+          <a:ln>
+            <a:noFill/>
+          </a:ln>
+        </p:spPr>
+        <p:style>
+          <a:lnRef idx="1">
+            <a:schemeClr val="accent1"/>
+          </a:lnRef>
+          <a:fillRef idx="3">
+            <a:schemeClr val="accent1"/>
+          </a:fillRef>
+          <a:effectRef idx="2">
+            <a:schemeClr val="accent1"/>
+          </a:effectRef>
+          <a:fontRef idx="minor">
+            <a:schemeClr val="lt1"/>
+          </a:fontRef>
+        </p:style>
+        <p:txBody>
+          <a:bodyPr rtlCol="0" anchor="ctr"/>
+          <a:lstStyle/>
+          <a:p>
+            <a:pPr algn="ctr"/>
+          </a:p>
+        </p:txBody>
+      </p:sp>
+      <p:sp>
+        <p:nvSpPr>
+          <p:cNvPr id="148" name="TextBox 147"/>
+          <p:cNvSpPr txBox="1"/>
+          <p:nvPr/>
+        </p:nvSpPr>
+        <p:spPr>
+          <a:xfrm>
+            <a:off x="10981944" y="5513832"/>
+            <a:ext cx="1005840" cy="228600"/>
+          </a:xfrm>
+          <a:prstGeom prst="rect">
+            <a:avLst/>
+          </a:prstGeom>
+          <a:noFill/>
+        </p:spPr>
+        <p:txBody>
+          <a:bodyPr wrap="square">
+            <a:spAutoFit/>
+          </a:bodyPr>
+          <a:lstStyle/>
+          <a:p>
+            <a:pPr algn="l">
+              <a:defRPr sz="800" b="1">
+                <a:solidFill>
+                  <a:srgbClr val="FB923C"/>
+                </a:solidFill>
+                <a:latin typeface="Calibri"/>
+              </a:defRPr>
+            </a:pPr>
+            <a:r>
+              <a:t>MCP Secure</a:t>
             </a:r>
           </a:p>
         </p:txBody>
@@ -12073,20 +12828,20 @@
       <p:grpSpPr/>
       <p:sp>
         <p:nvSpPr>
-          <p:cNvPr id="2" name="Oval 1"/>
+          <p:cNvPr id="2" name="Rectangle 1"/>
           <p:cNvSpPr/>
           <p:nvPr/>
         </p:nvSpPr>
         <p:spPr>
           <a:xfrm>
-            <a:off x="2743200" y="0"/>
-            <a:ext cx="6400800" cy="4572000"/>
-          </a:xfrm>
-          <a:prstGeom prst="ellipse">
-            <a:avLst/>
-          </a:prstGeom>
-          <a:solidFill>
-            <a:srgbClr val="1A1D3A"/>
+            <a:off x="457200" y="365760"/>
+            <a:ext cx="1371600" cy="38100"/>
+          </a:xfrm>
+          <a:prstGeom prst="rect">
+            <a:avLst/>
+          </a:prstGeom>
+          <a:solidFill>
+            <a:srgbClr val="7C7FFF"/>
           </a:solidFill>
           <a:ln>
             <a:noFill/>
@@ -12116,20 +12871,92 @@
       </p:sp>
       <p:sp>
         <p:nvSpPr>
-          <p:cNvPr id="3" name="Rectangle 2"/>
+          <p:cNvPr id="3" name="TextBox 2"/>
+          <p:cNvSpPr txBox="1"/>
+          <p:nvPr/>
+        </p:nvSpPr>
+        <p:spPr>
+          <a:xfrm>
+            <a:off x="457200" y="502920"/>
+            <a:ext cx="10972800" cy="457200"/>
+          </a:xfrm>
+          <a:prstGeom prst="rect">
+            <a:avLst/>
+          </a:prstGeom>
+          <a:noFill/>
+        </p:spPr>
+        <p:txBody>
+          <a:bodyPr wrap="square">
+            <a:spAutoFit/>
+          </a:bodyPr>
+          <a:lstStyle/>
+          <a:p>
+            <a:pPr algn="l">
+              <a:defRPr sz="2800" b="1">
+                <a:solidFill>
+                  <a:srgbClr val="F7F8F8"/>
+                </a:solidFill>
+                <a:latin typeface="Calibri"/>
+              </a:defRPr>
+            </a:pPr>
+            <a:r>
+              <a:t>Open Ecosystem, Compliant Outreach, Conversational AI</a:t>
+            </a:r>
+          </a:p>
+        </p:txBody>
+      </p:sp>
+      <p:sp>
+        <p:nvSpPr>
+          <p:cNvPr id="4" name="TextBox 3"/>
+          <p:cNvSpPr txBox="1"/>
+          <p:nvPr/>
+        </p:nvSpPr>
+        <p:spPr>
+          <a:xfrm>
+            <a:off x="457200" y="1005840"/>
+            <a:ext cx="10972800" cy="274320"/>
+          </a:xfrm>
+          <a:prstGeom prst="rect">
+            <a:avLst/>
+          </a:prstGeom>
+          <a:noFill/>
+        </p:spPr>
+        <p:txBody>
+          <a:bodyPr wrap="square">
+            <a:spAutoFit/>
+          </a:bodyPr>
+          <a:lstStyle/>
+          <a:p>
+            <a:pPr algn="l">
+              <a:defRPr sz="1200" b="0">
+                <a:solidFill>
+                  <a:srgbClr val="8A8F98"/>
+                </a:solidFill>
+                <a:latin typeface="Calibri"/>
+              </a:defRPr>
+            </a:pPr>
+            <a:r>
+              <a:t>Four new capabilities bringing RevFlare from standalone tool to enterprise platform.</a:t>
+            </a:r>
+          </a:p>
+        </p:txBody>
+      </p:sp>
+      <p:sp>
+        <p:nvSpPr>
+          <p:cNvPr id="5" name="Rounded Rectangle 4"/>
           <p:cNvSpPr/>
           <p:nvPr/>
         </p:nvSpPr>
         <p:spPr>
           <a:xfrm>
-            <a:off x="914400" y="731520"/>
-            <a:ext cx="1371600" cy="38100"/>
-          </a:xfrm>
-          <a:prstGeom prst="rect">
-            <a:avLst/>
-          </a:prstGeom>
-          <a:solidFill>
-            <a:srgbClr val="7C7FFF"/>
+            <a:off x="457200" y="1463040"/>
+            <a:ext cx="5669280" cy="2514600"/>
+          </a:xfrm>
+          <a:prstGeom prst="roundRect">
+            <a:avLst/>
+          </a:prstGeom>
+          <a:solidFill>
+            <a:srgbClr val="1E1F21"/>
           </a:solidFill>
           <a:ln>
             <a:noFill/>
@@ -12159,56 +12986,20 @@
       </p:sp>
       <p:sp>
         <p:nvSpPr>
-          <p:cNvPr id="4" name="TextBox 3"/>
-          <p:cNvSpPr txBox="1"/>
-          <p:nvPr/>
-        </p:nvSpPr>
-        <p:spPr>
-          <a:xfrm>
-            <a:off x="914400" y="914400"/>
-            <a:ext cx="9144000" cy="548640"/>
-          </a:xfrm>
-          <a:prstGeom prst="rect">
-            <a:avLst/>
-          </a:prstGeom>
-          <a:noFill/>
-        </p:spPr>
-        <p:txBody>
-          <a:bodyPr wrap="square">
-            <a:spAutoFit/>
-          </a:bodyPr>
-          <a:lstStyle/>
-          <a:p>
-            <a:pPr algn="l">
-              <a:defRPr sz="4000" b="1">
-                <a:solidFill>
-                  <a:srgbClr val="F7F8F8"/>
-                </a:solidFill>
-                <a:latin typeface="Calibri"/>
-              </a:defRPr>
-            </a:pPr>
-            <a:r>
-              <a:t>RevFlare by the Numbers</a:t>
-            </a:r>
-          </a:p>
-        </p:txBody>
-      </p:sp>
-      <p:sp>
-        <p:nvSpPr>
-          <p:cNvPr id="5" name="Rounded Rectangle 4"/>
+          <p:cNvPr id="6" name="Rectangle 5"/>
           <p:cNvSpPr/>
           <p:nvPr/>
         </p:nvSpPr>
         <p:spPr>
           <a:xfrm>
-            <a:off x="640080" y="1828800"/>
-            <a:ext cx="2011680" cy="1005840"/>
-          </a:xfrm>
-          <a:prstGeom prst="roundRect">
-            <a:avLst/>
-          </a:prstGeom>
-          <a:solidFill>
-            <a:srgbClr val="1E1F21"/>
+            <a:off x="457200" y="1463040"/>
+            <a:ext cx="5669280" cy="38100"/>
+          </a:xfrm>
+          <a:prstGeom prst="rect">
+            <a:avLst/>
+          </a:prstGeom>
+          <a:solidFill>
+            <a:srgbClr val="FB923C"/>
           </a:solidFill>
           <a:ln>
             <a:noFill/>
@@ -12238,20 +13029,596 @@
       </p:sp>
       <p:sp>
         <p:nvSpPr>
-          <p:cNvPr id="6" name="Rectangle 5"/>
+          <p:cNvPr id="7" name="TextBox 6"/>
+          <p:cNvSpPr txBox="1"/>
+          <p:nvPr/>
+        </p:nvSpPr>
+        <p:spPr>
+          <a:xfrm>
+            <a:off x="640080" y="1554480"/>
+            <a:ext cx="5303520" cy="274320"/>
+          </a:xfrm>
+          <a:prstGeom prst="rect">
+            <a:avLst/>
+          </a:prstGeom>
+          <a:noFill/>
+        </p:spPr>
+        <p:txBody>
+          <a:bodyPr wrap="square">
+            <a:spAutoFit/>
+          </a:bodyPr>
+          <a:lstStyle/>
+          <a:p>
+            <a:pPr algn="l">
+              <a:defRPr sz="1400" b="1">
+                <a:solidFill>
+                  <a:srgbClr val="FB923C"/>
+                </a:solidFill>
+                <a:latin typeface="Calibri"/>
+              </a:defRPr>
+            </a:pPr>
+            <a:r>
+              <a:t>MCP (Model Context Protocol)</a:t>
+            </a:r>
+          </a:p>
+        </p:txBody>
+      </p:sp>
+      <p:sp>
+        <p:nvSpPr>
+          <p:cNvPr id="8" name="TextBox 7"/>
+          <p:cNvSpPr txBox="1"/>
+          <p:nvPr/>
+        </p:nvSpPr>
+        <p:spPr>
+          <a:xfrm>
+            <a:off x="640080" y="1828800"/>
+            <a:ext cx="5303520" cy="274320"/>
+          </a:xfrm>
+          <a:prstGeom prst="rect">
+            <a:avLst/>
+          </a:prstGeom>
+          <a:noFill/>
+        </p:spPr>
+        <p:txBody>
+          <a:bodyPr wrap="square">
+            <a:spAutoFit/>
+          </a:bodyPr>
+          <a:lstStyle/>
+          <a:p>
+            <a:pPr algn="l">
+              <a:defRPr sz="1000" b="0">
+                <a:solidFill>
+                  <a:srgbClr val="8A8F98"/>
+                </a:solidFill>
+                <a:latin typeface="Calibri"/>
+              </a:defRPr>
+            </a:pPr>
+            <a:r>
+              <a:t>Bi-directional. Client + Server.</a:t>
+            </a:r>
+          </a:p>
+        </p:txBody>
+      </p:sp>
+      <p:sp>
+        <p:nvSpPr>
+          <p:cNvPr id="9" name="TextBox 8"/>
+          <p:cNvSpPr txBox="1"/>
+          <p:nvPr/>
+        </p:nvSpPr>
+        <p:spPr>
+          <a:xfrm>
+            <a:off x="640080" y="2148840"/>
+            <a:ext cx="2560320" cy="201168"/>
+          </a:xfrm>
+          <a:prstGeom prst="rect">
+            <a:avLst/>
+          </a:prstGeom>
+          <a:noFill/>
+        </p:spPr>
+        <p:txBody>
+          <a:bodyPr wrap="square">
+            <a:spAutoFit/>
+          </a:bodyPr>
+          <a:lstStyle/>
+          <a:p>
+            <a:pPr algn="l">
+              <a:defRPr sz="900" b="1">
+                <a:solidFill>
+                  <a:srgbClr val="5A5E66"/>
+                </a:solidFill>
+                <a:latin typeface="Calibri"/>
+              </a:defRPr>
+            </a:pPr>
+            <a:r>
+              <a:t>AS CLIENT</a:t>
+            </a:r>
+          </a:p>
+        </p:txBody>
+      </p:sp>
+      <p:sp>
+        <p:nvSpPr>
+          <p:cNvPr id="10" name="TextBox 9"/>
+          <p:cNvSpPr txBox="1"/>
+          <p:nvPr/>
+        </p:nvSpPr>
+        <p:spPr>
+          <a:xfrm>
+            <a:off x="640080" y="2331720"/>
+            <a:ext cx="2743200" cy="182880"/>
+          </a:xfrm>
+          <a:prstGeom prst="rect">
+            <a:avLst/>
+          </a:prstGeom>
+          <a:noFill/>
+        </p:spPr>
+        <p:txBody>
+          <a:bodyPr wrap="square">
+            <a:spAutoFit/>
+          </a:bodyPr>
+          <a:lstStyle/>
+          <a:p>
+            <a:pPr algn="l">
+              <a:defRPr sz="800" b="0">
+                <a:solidFill>
+                  <a:srgbClr val="C4C9D4"/>
+                </a:solidFill>
+                <a:latin typeface="Calibri"/>
+              </a:defRPr>
+            </a:pPr>
+            <a:r>
+              <a:t>+ Netstrat (network + strategy)</a:t>
+            </a:r>
+          </a:p>
+        </p:txBody>
+      </p:sp>
+      <p:sp>
+        <p:nvSpPr>
+          <p:cNvPr id="11" name="TextBox 10"/>
+          <p:cNvSpPr txBox="1"/>
+          <p:nvPr/>
+        </p:nvSpPr>
+        <p:spPr>
+          <a:xfrm>
+            <a:off x="640080" y="2532888"/>
+            <a:ext cx="2743200" cy="182880"/>
+          </a:xfrm>
+          <a:prstGeom prst="rect">
+            <a:avLst/>
+          </a:prstGeom>
+          <a:noFill/>
+        </p:spPr>
+        <p:txBody>
+          <a:bodyPr wrap="square">
+            <a:spAutoFit/>
+          </a:bodyPr>
+          <a:lstStyle/>
+          <a:p>
+            <a:pPr algn="l">
+              <a:defRPr sz="800" b="0">
+                <a:solidFill>
+                  <a:srgbClr val="C4C9D4"/>
+                </a:solidFill>
+                <a:latin typeface="Calibri"/>
+              </a:defRPr>
+            </a:pPr>
+            <a:r>
+              <a:t>+ Google Workspace (calendar, contacts)</a:t>
+            </a:r>
+          </a:p>
+        </p:txBody>
+      </p:sp>
+      <p:sp>
+        <p:nvSpPr>
+          <p:cNvPr id="12" name="TextBox 11"/>
+          <p:cNvSpPr txBox="1"/>
+          <p:nvPr/>
+        </p:nvSpPr>
+        <p:spPr>
+          <a:xfrm>
+            <a:off x="640080" y="2734056"/>
+            <a:ext cx="2743200" cy="182880"/>
+          </a:xfrm>
+          <a:prstGeom prst="rect">
+            <a:avLst/>
+          </a:prstGeom>
+          <a:noFill/>
+        </p:spPr>
+        <p:txBody>
+          <a:bodyPr wrap="square">
+            <a:spAutoFit/>
+          </a:bodyPr>
+          <a:lstStyle/>
+          <a:p>
+            <a:pPr algn="l">
+              <a:defRPr sz="800" b="0">
+                <a:solidFill>
+                  <a:srgbClr val="C4C9D4"/>
+                </a:solidFill>
+                <a:latin typeface="Calibri"/>
+              </a:defRPr>
+            </a:pPr>
+            <a:r>
+              <a:t>+ Wiki (internal knowledge)</a:t>
+            </a:r>
+          </a:p>
+        </p:txBody>
+      </p:sp>
+      <p:sp>
+        <p:nvSpPr>
+          <p:cNvPr id="13" name="TextBox 12"/>
+          <p:cNvSpPr txBox="1"/>
+          <p:nvPr/>
+        </p:nvSpPr>
+        <p:spPr>
+          <a:xfrm>
+            <a:off x="640080" y="2935224"/>
+            <a:ext cx="2743200" cy="182880"/>
+          </a:xfrm>
+          <a:prstGeom prst="rect">
+            <a:avLst/>
+          </a:prstGeom>
+          <a:noFill/>
+        </p:spPr>
+        <p:txBody>
+          <a:bodyPr wrap="square">
+            <a:spAutoFit/>
+          </a:bodyPr>
+          <a:lstStyle/>
+          <a:p>
+            <a:pPr algn="l">
+              <a:defRPr sz="800" b="0">
+                <a:solidFill>
+                  <a:srgbClr val="C4C9D4"/>
+                </a:solidFill>
+                <a:latin typeface="Calibri"/>
+              </a:defRPr>
+            </a:pPr>
+            <a:r>
+              <a:t>+ Jira (issue context)</a:t>
+            </a:r>
+          </a:p>
+        </p:txBody>
+      </p:sp>
+      <p:sp>
+        <p:nvSpPr>
+          <p:cNvPr id="14" name="TextBox 13"/>
+          <p:cNvSpPr txBox="1"/>
+          <p:nvPr/>
+        </p:nvSpPr>
+        <p:spPr>
+          <a:xfrm>
+            <a:off x="640080" y="3136391"/>
+            <a:ext cx="2743200" cy="182880"/>
+          </a:xfrm>
+          <a:prstGeom prst="rect">
+            <a:avLst/>
+          </a:prstGeom>
+          <a:noFill/>
+        </p:spPr>
+        <p:txBody>
+          <a:bodyPr wrap="square">
+            <a:spAutoFit/>
+          </a:bodyPr>
+          <a:lstStyle/>
+          <a:p>
+            <a:pPr algn="l">
+              <a:defRPr sz="800" b="0">
+                <a:solidFill>
+                  <a:srgbClr val="C4C9D4"/>
+                </a:solidFill>
+                <a:latin typeface="Calibri"/>
+              </a:defRPr>
+            </a:pPr>
+            <a:r>
+              <a:t>+ Cloudflare Docs (product lookup)</a:t>
+            </a:r>
+          </a:p>
+        </p:txBody>
+      </p:sp>
+      <p:sp>
+        <p:nvSpPr>
+          <p:cNvPr id="15" name="TextBox 14"/>
+          <p:cNvSpPr txBox="1"/>
+          <p:nvPr/>
+        </p:nvSpPr>
+        <p:spPr>
+          <a:xfrm>
+            <a:off x="640080" y="3337560"/>
+            <a:ext cx="2743200" cy="182880"/>
+          </a:xfrm>
+          <a:prstGeom prst="rect">
+            <a:avLst/>
+          </a:prstGeom>
+          <a:noFill/>
+        </p:spPr>
+        <p:txBody>
+          <a:bodyPr wrap="square">
+            <a:spAutoFit/>
+          </a:bodyPr>
+          <a:lstStyle/>
+          <a:p>
+            <a:pPr algn="l">
+              <a:defRPr sz="800" b="0">
+                <a:solidFill>
+                  <a:srgbClr val="C4C9D4"/>
+                </a:solidFill>
+                <a:latin typeface="Calibri"/>
+              </a:defRPr>
+            </a:pPr>
+            <a:r>
+              <a:t>+ SSRF-hardened URL validator</a:t>
+            </a:r>
+          </a:p>
+        </p:txBody>
+      </p:sp>
+      <p:sp>
+        <p:nvSpPr>
+          <p:cNvPr id="16" name="TextBox 15"/>
+          <p:cNvSpPr txBox="1"/>
+          <p:nvPr/>
+        </p:nvSpPr>
+        <p:spPr>
+          <a:xfrm>
+            <a:off x="3474720" y="2148840"/>
+            <a:ext cx="2560320" cy="201168"/>
+          </a:xfrm>
+          <a:prstGeom prst="rect">
+            <a:avLst/>
+          </a:prstGeom>
+          <a:noFill/>
+        </p:spPr>
+        <p:txBody>
+          <a:bodyPr wrap="square">
+            <a:spAutoFit/>
+          </a:bodyPr>
+          <a:lstStyle/>
+          <a:p>
+            <a:pPr algn="l">
+              <a:defRPr sz="900" b="1">
+                <a:solidFill>
+                  <a:srgbClr val="5A5E66"/>
+                </a:solidFill>
+                <a:latin typeface="Calibri"/>
+              </a:defRPr>
+            </a:pPr>
+            <a:r>
+              <a:t>AS SERVER</a:t>
+            </a:r>
+          </a:p>
+        </p:txBody>
+      </p:sp>
+      <p:sp>
+        <p:nvSpPr>
+          <p:cNvPr id="17" name="TextBox 16"/>
+          <p:cNvSpPr txBox="1"/>
+          <p:nvPr/>
+        </p:nvSpPr>
+        <p:spPr>
+          <a:xfrm>
+            <a:off x="3474720" y="2331720"/>
+            <a:ext cx="2743200" cy="182880"/>
+          </a:xfrm>
+          <a:prstGeom prst="rect">
+            <a:avLst/>
+          </a:prstGeom>
+          <a:noFill/>
+        </p:spPr>
+        <p:txBody>
+          <a:bodyPr wrap="square">
+            <a:spAutoFit/>
+          </a:bodyPr>
+          <a:lstStyle/>
+          <a:p>
+            <a:pPr algn="l">
+              <a:defRPr sz="800" b="0">
+                <a:solidFill>
+                  <a:srgbClr val="C4C9D4"/>
+                </a:solidFill>
+                <a:latin typeface="Calibri"/>
+              </a:defRPr>
+            </a:pPr>
+            <a:r>
+              <a:t>+ lookup_account</a:t>
+            </a:r>
+          </a:p>
+        </p:txBody>
+      </p:sp>
+      <p:sp>
+        <p:nvSpPr>
+          <p:cNvPr id="18" name="TextBox 17"/>
+          <p:cNvSpPr txBox="1"/>
+          <p:nvPr/>
+        </p:nvSpPr>
+        <p:spPr>
+          <a:xfrm>
+            <a:off x="3474720" y="2532888"/>
+            <a:ext cx="2743200" cy="182880"/>
+          </a:xfrm>
+          <a:prstGeom prst="rect">
+            <a:avLst/>
+          </a:prstGeom>
+          <a:noFill/>
+        </p:spPr>
+        <p:txBody>
+          <a:bodyPr wrap="square">
+            <a:spAutoFit/>
+          </a:bodyPr>
+          <a:lstStyle/>
+          <a:p>
+            <a:pPr algn="l">
+              <a:defRPr sz="800" b="0">
+                <a:solidFill>
+                  <a:srgbClr val="C4C9D4"/>
+                </a:solidFill>
+                <a:latin typeface="Calibri"/>
+              </a:defRPr>
+            </a:pPr>
+            <a:r>
+              <a:t>+ get_lead_score</a:t>
+            </a:r>
+          </a:p>
+        </p:txBody>
+      </p:sp>
+      <p:sp>
+        <p:nvSpPr>
+          <p:cNvPr id="19" name="TextBox 18"/>
+          <p:cNvSpPr txBox="1"/>
+          <p:nvPr/>
+        </p:nvSpPr>
+        <p:spPr>
+          <a:xfrm>
+            <a:off x="3474720" y="2734056"/>
+            <a:ext cx="2743200" cy="182880"/>
+          </a:xfrm>
+          <a:prstGeom prst="rect">
+            <a:avLst/>
+          </a:prstGeom>
+          <a:noFill/>
+        </p:spPr>
+        <p:txBody>
+          <a:bodyPr wrap="square">
+            <a:spAutoFit/>
+          </a:bodyPr>
+          <a:lstStyle/>
+          <a:p>
+            <a:pPr algn="l">
+              <a:defRPr sz="800" b="0">
+                <a:solidFill>
+                  <a:srgbClr val="C4C9D4"/>
+                </a:solidFill>
+                <a:latin typeface="Calibri"/>
+              </a:defRPr>
+            </a:pPr>
+            <a:r>
+              <a:t>+ get_account_research</a:t>
+            </a:r>
+          </a:p>
+        </p:txBody>
+      </p:sp>
+      <p:sp>
+        <p:nvSpPr>
+          <p:cNvPr id="20" name="TextBox 19"/>
+          <p:cNvSpPr txBox="1"/>
+          <p:nvPr/>
+        </p:nvSpPr>
+        <p:spPr>
+          <a:xfrm>
+            <a:off x="3474720" y="2935224"/>
+            <a:ext cx="2743200" cy="182880"/>
+          </a:xfrm>
+          <a:prstGeom prst="rect">
+            <a:avLst/>
+          </a:prstGeom>
+          <a:noFill/>
+        </p:spPr>
+        <p:txBody>
+          <a:bodyPr wrap="square">
+            <a:spAutoFit/>
+          </a:bodyPr>
+          <a:lstStyle/>
+          <a:p>
+            <a:pPr algn="l">
+              <a:defRPr sz="800" b="0">
+                <a:solidFill>
+                  <a:srgbClr val="C4C9D4"/>
+                </a:solidFill>
+                <a:latin typeface="Calibri"/>
+              </a:defRPr>
+            </a:pPr>
+            <a:r>
+              <a:t>+ get_pipeline</a:t>
+            </a:r>
+          </a:p>
+        </p:txBody>
+      </p:sp>
+      <p:sp>
+        <p:nvSpPr>
+          <p:cNvPr id="21" name="TextBox 20"/>
+          <p:cNvSpPr txBox="1"/>
+          <p:nvPr/>
+        </p:nvSpPr>
+        <p:spPr>
+          <a:xfrm>
+            <a:off x="3474720" y="3136391"/>
+            <a:ext cx="2743200" cy="182880"/>
+          </a:xfrm>
+          <a:prstGeom prst="rect">
+            <a:avLst/>
+          </a:prstGeom>
+          <a:noFill/>
+        </p:spPr>
+        <p:txBody>
+          <a:bodyPr wrap="square">
+            <a:spAutoFit/>
+          </a:bodyPr>
+          <a:lstStyle/>
+          <a:p>
+            <a:pPr algn="l">
+              <a:defRPr sz="800" b="0">
+                <a:solidFill>
+                  <a:srgbClr val="C4C9D4"/>
+                </a:solidFill>
+                <a:latin typeface="Calibri"/>
+              </a:defRPr>
+            </a:pPr>
+            <a:r>
+              <a:t>+ get_alerts</a:t>
+            </a:r>
+          </a:p>
+        </p:txBody>
+      </p:sp>
+      <p:sp>
+        <p:nvSpPr>
+          <p:cNvPr id="22" name="TextBox 21"/>
+          <p:cNvSpPr txBox="1"/>
+          <p:nvPr/>
+        </p:nvSpPr>
+        <p:spPr>
+          <a:xfrm>
+            <a:off x="3474720" y="3337560"/>
+            <a:ext cx="2743200" cy="182880"/>
+          </a:xfrm>
+          <a:prstGeom prst="rect">
+            <a:avLst/>
+          </a:prstGeom>
+          <a:noFill/>
+        </p:spPr>
+        <p:txBody>
+          <a:bodyPr wrap="square">
+            <a:spAutoFit/>
+          </a:bodyPr>
+          <a:lstStyle/>
+          <a:p>
+            <a:pPr algn="l">
+              <a:defRPr sz="800" b="0">
+                <a:solidFill>
+                  <a:srgbClr val="C4C9D4"/>
+                </a:solidFill>
+                <a:latin typeface="Calibri"/>
+              </a:defRPr>
+            </a:pPr>
+            <a:r>
+              <a:t>+ get_email_stats</a:t>
+            </a:r>
+          </a:p>
+        </p:txBody>
+      </p:sp>
+      <p:sp>
+        <p:nvSpPr>
+          <p:cNvPr id="23" name="Rounded Rectangle 22"/>
           <p:cNvSpPr/>
           <p:nvPr/>
         </p:nvSpPr>
         <p:spPr>
           <a:xfrm>
-            <a:off x="640080" y="1828800"/>
-            <a:ext cx="2011680" cy="38100"/>
-          </a:xfrm>
-          <a:prstGeom prst="rect">
-            <a:avLst/>
-          </a:prstGeom>
-          <a:solidFill>
-            <a:srgbClr val="34D399"/>
+            <a:off x="6263640" y="1463040"/>
+            <a:ext cx="5669280" cy="2514600"/>
+          </a:xfrm>
+          <a:prstGeom prst="roundRect">
+            <a:avLst/>
+          </a:prstGeom>
+          <a:solidFill>
+            <a:srgbClr val="1E1F21"/>
           </a:solidFill>
           <a:ln>
             <a:noFill/>
@@ -12281,92 +13648,20 @@
       </p:sp>
       <p:sp>
         <p:nvSpPr>
-          <p:cNvPr id="7" name="TextBox 6"/>
-          <p:cNvSpPr txBox="1"/>
-          <p:nvPr/>
-        </p:nvSpPr>
-        <p:spPr>
-          <a:xfrm>
-            <a:off x="822960" y="2011680"/>
-            <a:ext cx="1645920" cy="457200"/>
-          </a:xfrm>
-          <a:prstGeom prst="rect">
-            <a:avLst/>
-          </a:prstGeom>
-          <a:noFill/>
-        </p:spPr>
-        <p:txBody>
-          <a:bodyPr wrap="square">
-            <a:spAutoFit/>
-          </a:bodyPr>
-          <a:lstStyle/>
-          <a:p>
-            <a:pPr algn="l">
-              <a:defRPr sz="2600" b="1">
-                <a:solidFill>
-                  <a:srgbClr val="34D399"/>
-                </a:solidFill>
-                <a:latin typeface="Calibri"/>
-              </a:defRPr>
-            </a:pPr>
-            <a:r>
-              <a:t>~8,600</a:t>
-            </a:r>
-          </a:p>
-        </p:txBody>
-      </p:sp>
-      <p:sp>
-        <p:nvSpPr>
-          <p:cNvPr id="8" name="TextBox 7"/>
-          <p:cNvSpPr txBox="1"/>
-          <p:nvPr/>
-        </p:nvSpPr>
-        <p:spPr>
-          <a:xfrm>
-            <a:off x="822960" y="2468880"/>
-            <a:ext cx="1645920" cy="274320"/>
-          </a:xfrm>
-          <a:prstGeom prst="rect">
-            <a:avLst/>
-          </a:prstGeom>
-          <a:noFill/>
-        </p:spPr>
-        <p:txBody>
-          <a:bodyPr wrap="square">
-            <a:spAutoFit/>
-          </a:bodyPr>
-          <a:lstStyle/>
-          <a:p>
-            <a:pPr algn="l">
-              <a:defRPr sz="1000" b="0">
-                <a:solidFill>
-                  <a:srgbClr val="8A8F98"/>
-                </a:solidFill>
-                <a:latin typeface="Calibri"/>
-              </a:defRPr>
-            </a:pPr>
-            <a:r>
-              <a:t>Lines of Code</a:t>
-            </a:r>
-          </a:p>
-        </p:txBody>
-      </p:sp>
-      <p:sp>
-        <p:nvSpPr>
-          <p:cNvPr id="9" name="Rounded Rectangle 8"/>
+          <p:cNvPr id="24" name="Rectangle 23"/>
           <p:cNvSpPr/>
           <p:nvPr/>
         </p:nvSpPr>
         <p:spPr>
           <a:xfrm>
-            <a:off x="2880360" y="1828800"/>
-            <a:ext cx="2011680" cy="1005840"/>
-          </a:xfrm>
-          <a:prstGeom prst="roundRect">
-            <a:avLst/>
-          </a:prstGeom>
-          <a:solidFill>
-            <a:srgbClr val="1E1F21"/>
+            <a:off x="6263640" y="1463040"/>
+            <a:ext cx="5669280" cy="38100"/>
+          </a:xfrm>
+          <a:prstGeom prst="rect">
+            <a:avLst/>
+          </a:prstGeom>
+          <a:solidFill>
+            <a:srgbClr val="60A5FA"/>
           </a:solidFill>
           <a:ln>
             <a:noFill/>
@@ -12396,20 +13691,308 @@
       </p:sp>
       <p:sp>
         <p:nvSpPr>
-          <p:cNvPr id="10" name="Rectangle 9"/>
+          <p:cNvPr id="25" name="TextBox 24"/>
+          <p:cNvSpPr txBox="1"/>
+          <p:nvPr/>
+        </p:nvSpPr>
+        <p:spPr>
+          <a:xfrm>
+            <a:off x="6446520" y="1554480"/>
+            <a:ext cx="5303520" cy="274320"/>
+          </a:xfrm>
+          <a:prstGeom prst="rect">
+            <a:avLst/>
+          </a:prstGeom>
+          <a:noFill/>
+        </p:spPr>
+        <p:txBody>
+          <a:bodyPr wrap="square">
+            <a:spAutoFit/>
+          </a:bodyPr>
+          <a:lstStyle/>
+          <a:p>
+            <a:pPr algn="l">
+              <a:defRPr sz="1400" b="1">
+                <a:solidFill>
+                  <a:srgbClr val="60A5FA"/>
+                </a:solidFill>
+                <a:latin typeface="Calibri"/>
+              </a:defRPr>
+            </a:pPr>
+            <a:r>
+              <a:t>AI Chat Email Refinement</a:t>
+            </a:r>
+          </a:p>
+        </p:txBody>
+      </p:sp>
+      <p:sp>
+        <p:nvSpPr>
+          <p:cNvPr id="26" name="TextBox 25"/>
+          <p:cNvSpPr txBox="1"/>
+          <p:nvPr/>
+        </p:nvSpPr>
+        <p:spPr>
+          <a:xfrm>
+            <a:off x="6446520" y="1828800"/>
+            <a:ext cx="5303520" cy="274320"/>
+          </a:xfrm>
+          <a:prstGeom prst="rect">
+            <a:avLst/>
+          </a:prstGeom>
+          <a:noFill/>
+        </p:spPr>
+        <p:txBody>
+          <a:bodyPr wrap="square">
+            <a:spAutoFit/>
+          </a:bodyPr>
+          <a:lstStyle/>
+          <a:p>
+            <a:pPr algn="l">
+              <a:defRPr sz="1000" b="0">
+                <a:solidFill>
+                  <a:srgbClr val="8A8F98"/>
+                </a:solidFill>
+                <a:latin typeface="Calibri"/>
+              </a:defRPr>
+            </a:pPr>
+            <a:r>
+              <a:t>Conversational rewrites. Full turn history.</a:t>
+            </a:r>
+          </a:p>
+        </p:txBody>
+      </p:sp>
+      <p:sp>
+        <p:nvSpPr>
+          <p:cNvPr id="27" name="TextBox 26"/>
+          <p:cNvSpPr txBox="1"/>
+          <p:nvPr/>
+        </p:nvSpPr>
+        <p:spPr>
+          <a:xfrm>
+            <a:off x="6446520" y="2194560"/>
+            <a:ext cx="5486400" cy="228600"/>
+          </a:xfrm>
+          <a:prstGeom prst="rect">
+            <a:avLst/>
+          </a:prstGeom>
+          <a:noFill/>
+        </p:spPr>
+        <p:txBody>
+          <a:bodyPr wrap="square">
+            <a:spAutoFit/>
+          </a:bodyPr>
+          <a:lstStyle/>
+          <a:p>
+            <a:pPr algn="l">
+              <a:defRPr sz="900" b="0">
+                <a:solidFill>
+                  <a:srgbClr val="C4C9D4"/>
+                </a:solidFill>
+                <a:latin typeface="Calibri"/>
+              </a:defRPr>
+            </a:pPr>
+            <a:r>
+              <a:t>+ Plain-English instructions: "make it shorter, lead with ROI"</a:t>
+            </a:r>
+          </a:p>
+        </p:txBody>
+      </p:sp>
+      <p:sp>
+        <p:nvSpPr>
+          <p:cNvPr id="28" name="TextBox 27"/>
+          <p:cNvSpPr txBox="1"/>
+          <p:nvPr/>
+        </p:nvSpPr>
+        <p:spPr>
+          <a:xfrm>
+            <a:off x="6446520" y="2450591"/>
+            <a:ext cx="5486400" cy="228600"/>
+          </a:xfrm>
+          <a:prstGeom prst="rect">
+            <a:avLst/>
+          </a:prstGeom>
+          <a:noFill/>
+        </p:spPr>
+        <p:txBody>
+          <a:bodyPr wrap="square">
+            <a:spAutoFit/>
+          </a:bodyPr>
+          <a:lstStyle/>
+          <a:p>
+            <a:pPr algn="l">
+              <a:defRPr sz="900" b="0">
+                <a:solidFill>
+                  <a:srgbClr val="C4C9D4"/>
+                </a:solidFill>
+                <a:latin typeface="Calibri"/>
+              </a:defRPr>
+            </a:pPr>
+            <a:r>
+              <a:t>+ Llama 3.3 70B multi-turn with context memory (20 prior turns)</a:t>
+            </a:r>
+          </a:p>
+        </p:txBody>
+      </p:sp>
+      <p:sp>
+        <p:nvSpPr>
+          <p:cNvPr id="29" name="TextBox 28"/>
+          <p:cNvSpPr txBox="1"/>
+          <p:nvPr/>
+        </p:nvSpPr>
+        <p:spPr>
+          <a:xfrm>
+            <a:off x="6446520" y="2706624"/>
+            <a:ext cx="5486400" cy="228600"/>
+          </a:xfrm>
+          <a:prstGeom prst="rect">
+            <a:avLst/>
+          </a:prstGeom>
+          <a:noFill/>
+        </p:spPr>
+        <p:txBody>
+          <a:bodyPr wrap="square">
+            <a:spAutoFit/>
+          </a:bodyPr>
+          <a:lstStyle/>
+          <a:p>
+            <a:pPr algn="l">
+              <a:defRPr sz="900" b="0">
+                <a:solidFill>
+                  <a:srgbClr val="C4C9D4"/>
+                </a:solidFill>
+                <a:latin typeface="Calibri"/>
+              </a:defRPr>
+            </a:pPr>
+            <a:r>
+              <a:t>+ Rewrites in place, resets to pending_approval for re-review</a:t>
+            </a:r>
+          </a:p>
+        </p:txBody>
+      </p:sp>
+      <p:sp>
+        <p:nvSpPr>
+          <p:cNvPr id="30" name="TextBox 29"/>
+          <p:cNvSpPr txBox="1"/>
+          <p:nvPr/>
+        </p:nvSpPr>
+        <p:spPr>
+          <a:xfrm>
+            <a:off x="6446520" y="2962656"/>
+            <a:ext cx="5486400" cy="228600"/>
+          </a:xfrm>
+          <a:prstGeom prst="rect">
+            <a:avLst/>
+          </a:prstGeom>
+          <a:noFill/>
+        </p:spPr>
+        <p:txBody>
+          <a:bodyPr wrap="square">
+            <a:spAutoFit/>
+          </a:bodyPr>
+          <a:lstStyle/>
+          <a:p>
+            <a:pPr algn="l">
+              <a:defRPr sz="900" b="0">
+                <a:solidFill>
+                  <a:srgbClr val="C4C9D4"/>
+                </a:solidFill>
+                <a:latin typeface="Calibri"/>
+              </a:defRPr>
+            </a:pPr>
+            <a:r>
+              <a:t>+ Full chat history persisted per message for auditability</a:t>
+            </a:r>
+          </a:p>
+        </p:txBody>
+      </p:sp>
+      <p:sp>
+        <p:nvSpPr>
+          <p:cNvPr id="31" name="TextBox 30"/>
+          <p:cNvSpPr txBox="1"/>
+          <p:nvPr/>
+        </p:nvSpPr>
+        <p:spPr>
+          <a:xfrm>
+            <a:off x="6446520" y="3218688"/>
+            <a:ext cx="5486400" cy="228600"/>
+          </a:xfrm>
+          <a:prstGeom prst="rect">
+            <a:avLst/>
+          </a:prstGeom>
+          <a:noFill/>
+        </p:spPr>
+        <p:txBody>
+          <a:bodyPr wrap="square">
+            <a:spAutoFit/>
+          </a:bodyPr>
+          <a:lstStyle/>
+          <a:p>
+            <a:pPr algn="l">
+              <a:defRPr sz="900" b="0">
+                <a:solidFill>
+                  <a:srgbClr val="C4C9D4"/>
+                </a:solidFill>
+                <a:latin typeface="Calibri"/>
+              </a:defRPr>
+            </a:pPr>
+            <a:r>
+              <a:t>+ Works on persona messages AND campaign emails</a:t>
+            </a:r>
+          </a:p>
+        </p:txBody>
+      </p:sp>
+      <p:sp>
+        <p:nvSpPr>
+          <p:cNvPr id="32" name="TextBox 31"/>
+          <p:cNvSpPr txBox="1"/>
+          <p:nvPr/>
+        </p:nvSpPr>
+        <p:spPr>
+          <a:xfrm>
+            <a:off x="6446520" y="3474720"/>
+            <a:ext cx="5486400" cy="228600"/>
+          </a:xfrm>
+          <a:prstGeom prst="rect">
+            <a:avLst/>
+          </a:prstGeom>
+          <a:noFill/>
+        </p:spPr>
+        <p:txBody>
+          <a:bodyPr wrap="square">
+            <a:spAutoFit/>
+          </a:bodyPr>
+          <a:lstStyle/>
+          <a:p>
+            <a:pPr algn="l">
+              <a:defRPr sz="900" b="0">
+                <a:solidFill>
+                  <a:srgbClr val="C4C9D4"/>
+                </a:solidFill>
+                <a:latin typeface="Calibri"/>
+              </a:defRPr>
+            </a:pPr>
+            <a:r>
+              <a:t>+ Subject line auto-extracted and updated alongside body</a:t>
+            </a:r>
+          </a:p>
+        </p:txBody>
+      </p:sp>
+      <p:sp>
+        <p:nvSpPr>
+          <p:cNvPr id="33" name="Rounded Rectangle 32"/>
           <p:cNvSpPr/>
           <p:nvPr/>
         </p:nvSpPr>
         <p:spPr>
           <a:xfrm>
-            <a:off x="2880360" y="1828800"/>
-            <a:ext cx="2011680" cy="38100"/>
-          </a:xfrm>
-          <a:prstGeom prst="rect">
-            <a:avLst/>
-          </a:prstGeom>
-          <a:solidFill>
-            <a:srgbClr val="60A5FA"/>
+            <a:off x="457200" y="4114800"/>
+            <a:ext cx="5669280" cy="2514600"/>
+          </a:xfrm>
+          <a:prstGeom prst="roundRect">
+            <a:avLst/>
+          </a:prstGeom>
+          <a:solidFill>
+            <a:srgbClr val="1E1F21"/>
           </a:solidFill>
           <a:ln>
             <a:noFill/>
@@ -12439,92 +14022,20 @@
       </p:sp>
       <p:sp>
         <p:nvSpPr>
-          <p:cNvPr id="11" name="TextBox 10"/>
-          <p:cNvSpPr txBox="1"/>
-          <p:nvPr/>
-        </p:nvSpPr>
-        <p:spPr>
-          <a:xfrm>
-            <a:off x="3063240" y="2011680"/>
-            <a:ext cx="1645920" cy="457200"/>
-          </a:xfrm>
-          <a:prstGeom prst="rect">
-            <a:avLst/>
-          </a:prstGeom>
-          <a:noFill/>
-        </p:spPr>
-        <p:txBody>
-          <a:bodyPr wrap="square">
-            <a:spAutoFit/>
-          </a:bodyPr>
-          <a:lstStyle/>
-          <a:p>
-            <a:pPr algn="l">
-              <a:defRPr sz="2600" b="1">
-                <a:solidFill>
-                  <a:srgbClr val="60A5FA"/>
-                </a:solidFill>
-                <a:latin typeface="Calibri"/>
-              </a:defRPr>
-            </a:pPr>
-            <a:r>
-              <a:t>17</a:t>
-            </a:r>
-          </a:p>
-        </p:txBody>
-      </p:sp>
-      <p:sp>
-        <p:nvSpPr>
-          <p:cNvPr id="12" name="TextBox 11"/>
-          <p:cNvSpPr txBox="1"/>
-          <p:nvPr/>
-        </p:nvSpPr>
-        <p:spPr>
-          <a:xfrm>
-            <a:off x="3063240" y="2468880"/>
-            <a:ext cx="1645920" cy="274320"/>
-          </a:xfrm>
-          <a:prstGeom prst="rect">
-            <a:avLst/>
-          </a:prstGeom>
-          <a:noFill/>
-        </p:spPr>
-        <p:txBody>
-          <a:bodyPr wrap="square">
-            <a:spAutoFit/>
-          </a:bodyPr>
-          <a:lstStyle/>
-          <a:p>
-            <a:pPr algn="l">
-              <a:defRPr sz="1000" b="0">
-                <a:solidFill>
-                  <a:srgbClr val="8A8F98"/>
-                </a:solidFill>
-                <a:latin typeface="Calibri"/>
-              </a:defRPr>
-            </a:pPr>
-            <a:r>
-              <a:t>DB Tables</a:t>
-            </a:r>
-          </a:p>
-        </p:txBody>
-      </p:sp>
-      <p:sp>
-        <p:nvSpPr>
-          <p:cNvPr id="13" name="Rounded Rectangle 12"/>
+          <p:cNvPr id="34" name="Rectangle 33"/>
           <p:cNvSpPr/>
           <p:nvPr/>
         </p:nvSpPr>
         <p:spPr>
           <a:xfrm>
-            <a:off x="5120640" y="1828800"/>
-            <a:ext cx="2011680" cy="1005840"/>
-          </a:xfrm>
-          <a:prstGeom prst="roundRect">
-            <a:avLst/>
-          </a:prstGeom>
-          <a:solidFill>
-            <a:srgbClr val="1E1F21"/>
+            <a:off x="457200" y="4114800"/>
+            <a:ext cx="5669280" cy="38100"/>
+          </a:xfrm>
+          <a:prstGeom prst="rect">
+            <a:avLst/>
+          </a:prstGeom>
+          <a:solidFill>
+            <a:srgbClr val="A78BFA"/>
           </a:solidFill>
           <a:ln>
             <a:noFill/>
@@ -12554,20 +14065,308 @@
       </p:sp>
       <p:sp>
         <p:nvSpPr>
-          <p:cNvPr id="14" name="Rectangle 13"/>
+          <p:cNvPr id="35" name="TextBox 34"/>
+          <p:cNvSpPr txBox="1"/>
+          <p:nvPr/>
+        </p:nvSpPr>
+        <p:spPr>
+          <a:xfrm>
+            <a:off x="640080" y="4206240"/>
+            <a:ext cx="5303520" cy="274320"/>
+          </a:xfrm>
+          <a:prstGeom prst="rect">
+            <a:avLst/>
+          </a:prstGeom>
+          <a:noFill/>
+        </p:spPr>
+        <p:txBody>
+          <a:bodyPr wrap="square">
+            <a:spAutoFit/>
+          </a:bodyPr>
+          <a:lstStyle/>
+          <a:p>
+            <a:pPr algn="l">
+              <a:defRPr sz="1400" b="1">
+                <a:solidFill>
+                  <a:srgbClr val="A78BFA"/>
+                </a:solidFill>
+                <a:latin typeface="Calibri"/>
+              </a:defRPr>
+            </a:pPr>
+            <a:r>
+              <a:t>Email Tracking &amp; CAN-SPAM</a:t>
+            </a:r>
+          </a:p>
+        </p:txBody>
+      </p:sp>
+      <p:sp>
+        <p:nvSpPr>
+          <p:cNvPr id="36" name="TextBox 35"/>
+          <p:cNvSpPr txBox="1"/>
+          <p:nvPr/>
+        </p:nvSpPr>
+        <p:spPr>
+          <a:xfrm>
+            <a:off x="640080" y="4480560"/>
+            <a:ext cx="5303520" cy="274320"/>
+          </a:xfrm>
+          <a:prstGeom prst="rect">
+            <a:avLst/>
+          </a:prstGeom>
+          <a:noFill/>
+        </p:spPr>
+        <p:txBody>
+          <a:bodyPr wrap="square">
+            <a:spAutoFit/>
+          </a:bodyPr>
+          <a:lstStyle/>
+          <a:p>
+            <a:pPr algn="l">
+              <a:defRPr sz="1000" b="0">
+                <a:solidFill>
+                  <a:srgbClr val="8A8F98"/>
+                </a:solidFill>
+                <a:latin typeface="Calibri"/>
+              </a:defRPr>
+            </a:pPr>
+            <a:r>
+              <a:t>Opens, unsubscribes, suppression - built in.</a:t>
+            </a:r>
+          </a:p>
+        </p:txBody>
+      </p:sp>
+      <p:sp>
+        <p:nvSpPr>
+          <p:cNvPr id="37" name="TextBox 36"/>
+          <p:cNvSpPr txBox="1"/>
+          <p:nvPr/>
+        </p:nvSpPr>
+        <p:spPr>
+          <a:xfrm>
+            <a:off x="640080" y="4846320"/>
+            <a:ext cx="5486400" cy="228600"/>
+          </a:xfrm>
+          <a:prstGeom prst="rect">
+            <a:avLst/>
+          </a:prstGeom>
+          <a:noFill/>
+        </p:spPr>
+        <p:txBody>
+          <a:bodyPr wrap="square">
+            <a:spAutoFit/>
+          </a:bodyPr>
+          <a:lstStyle/>
+          <a:p>
+            <a:pPr algn="l">
+              <a:defRPr sz="900" b="0">
+                <a:solidFill>
+                  <a:srgbClr val="C4C9D4"/>
+                </a:solidFill>
+                <a:latin typeface="Calibri"/>
+              </a:defRPr>
+            </a:pPr>
+            <a:r>
+              <a:t>+ 1x1 tracking pixel per email (unique tracking_id)</a:t>
+            </a:r>
+          </a:p>
+        </p:txBody>
+      </p:sp>
+      <p:sp>
+        <p:nvSpPr>
+          <p:cNvPr id="38" name="TextBox 37"/>
+          <p:cNvSpPr txBox="1"/>
+          <p:nvPr/>
+        </p:nvSpPr>
+        <p:spPr>
+          <a:xfrm>
+            <a:off x="640080" y="5102352"/>
+            <a:ext cx="5486400" cy="228600"/>
+          </a:xfrm>
+          <a:prstGeom prst="rect">
+            <a:avLst/>
+          </a:prstGeom>
+          <a:noFill/>
+        </p:spPr>
+        <p:txBody>
+          <a:bodyPr wrap="square">
+            <a:spAutoFit/>
+          </a:bodyPr>
+          <a:lstStyle/>
+          <a:p>
+            <a:pPr algn="l">
+              <a:defRPr sz="900" b="0">
+                <a:solidFill>
+                  <a:srgbClr val="C4C9D4"/>
+                </a:solidFill>
+                <a:latin typeface="Calibri"/>
+              </a:defRPr>
+            </a:pPr>
+            <a:r>
+              <a:t>+ One-click List-Unsubscribe header + landing page</a:t>
+            </a:r>
+          </a:p>
+        </p:txBody>
+      </p:sp>
+      <p:sp>
+        <p:nvSpPr>
+          <p:cNvPr id="39" name="TextBox 38"/>
+          <p:cNvSpPr txBox="1"/>
+          <p:nvPr/>
+        </p:nvSpPr>
+        <p:spPr>
+          <a:xfrm>
+            <a:off x="640080" y="5358383"/>
+            <a:ext cx="5486400" cy="228600"/>
+          </a:xfrm>
+          <a:prstGeom prst="rect">
+            <a:avLst/>
+          </a:prstGeom>
+          <a:noFill/>
+        </p:spPr>
+        <p:txBody>
+          <a:bodyPr wrap="square">
+            <a:spAutoFit/>
+          </a:bodyPr>
+          <a:lstStyle/>
+          <a:p>
+            <a:pPr algn="l">
+              <a:defRPr sz="900" b="0">
+                <a:solidFill>
+                  <a:srgbClr val="C4C9D4"/>
+                </a:solidFill>
+                <a:latin typeface="Calibri"/>
+              </a:defRPr>
+            </a:pPr>
+            <a:r>
+              <a:t>+ Per-user suppression list (bounces, complaints)</a:t>
+            </a:r>
+          </a:p>
+        </p:txBody>
+      </p:sp>
+      <p:sp>
+        <p:nvSpPr>
+          <p:cNvPr id="40" name="TextBox 39"/>
+          <p:cNvSpPr txBox="1"/>
+          <p:nvPr/>
+        </p:nvSpPr>
+        <p:spPr>
+          <a:xfrm>
+            <a:off x="640080" y="5614416"/>
+            <a:ext cx="5486400" cy="228600"/>
+          </a:xfrm>
+          <a:prstGeom prst="rect">
+            <a:avLst/>
+          </a:prstGeom>
+          <a:noFill/>
+        </p:spPr>
+        <p:txBody>
+          <a:bodyPr wrap="square">
+            <a:spAutoFit/>
+          </a:bodyPr>
+          <a:lstStyle/>
+          <a:p>
+            <a:pPr algn="l">
+              <a:defRPr sz="900" b="0">
+                <a:solidFill>
+                  <a:srgbClr val="C4C9D4"/>
+                </a:solidFill>
+                <a:latin typeface="Calibri"/>
+              </a:defRPr>
+            </a:pPr>
+            <a:r>
+              <a:t>+ Auto-block of suppressed addresses before send</a:t>
+            </a:r>
+          </a:p>
+        </p:txBody>
+      </p:sp>
+      <p:sp>
+        <p:nvSpPr>
+          <p:cNvPr id="41" name="TextBox 40"/>
+          <p:cNvSpPr txBox="1"/>
+          <p:nvPr/>
+        </p:nvSpPr>
+        <p:spPr>
+          <a:xfrm>
+            <a:off x="640080" y="5870448"/>
+            <a:ext cx="5486400" cy="228600"/>
+          </a:xfrm>
+          <a:prstGeom prst="rect">
+            <a:avLst/>
+          </a:prstGeom>
+          <a:noFill/>
+        </p:spPr>
+        <p:txBody>
+          <a:bodyPr wrap="square">
+            <a:spAutoFit/>
+          </a:bodyPr>
+          <a:lstStyle/>
+          <a:p>
+            <a:pPr algn="l">
+              <a:defRPr sz="900" b="0">
+                <a:solidFill>
+                  <a:srgbClr val="C4C9D4"/>
+                </a:solidFill>
+                <a:latin typeface="Calibri"/>
+              </a:defRPr>
+            </a:pPr>
+            <a:r>
+              <a:t>+ Public endpoints bypass Access for deliverability</a:t>
+            </a:r>
+          </a:p>
+        </p:txBody>
+      </p:sp>
+      <p:sp>
+        <p:nvSpPr>
+          <p:cNvPr id="42" name="TextBox 41"/>
+          <p:cNvSpPr txBox="1"/>
+          <p:nvPr/>
+        </p:nvSpPr>
+        <p:spPr>
+          <a:xfrm>
+            <a:off x="640080" y="6126480"/>
+            <a:ext cx="5486400" cy="228600"/>
+          </a:xfrm>
+          <a:prstGeom prst="rect">
+            <a:avLst/>
+          </a:prstGeom>
+          <a:noFill/>
+        </p:spPr>
+        <p:txBody>
+          <a:bodyPr wrap="square">
+            <a:spAutoFit/>
+          </a:bodyPr>
+          <a:lstStyle/>
+          <a:p>
+            <a:pPr algn="l">
+              <a:defRPr sz="900" b="0">
+                <a:solidFill>
+                  <a:srgbClr val="C4C9D4"/>
+                </a:solidFill>
+                <a:latin typeface="Calibri"/>
+              </a:defRPr>
+            </a:pPr>
+            <a:r>
+              <a:t>+ Gmail signature auto-appended to every outbound</a:t>
+            </a:r>
+          </a:p>
+        </p:txBody>
+      </p:sp>
+      <p:sp>
+        <p:nvSpPr>
+          <p:cNvPr id="43" name="Rounded Rectangle 42"/>
           <p:cNvSpPr/>
           <p:nvPr/>
         </p:nvSpPr>
         <p:spPr>
           <a:xfrm>
-            <a:off x="5120640" y="1828800"/>
-            <a:ext cx="2011680" cy="38100"/>
-          </a:xfrm>
-          <a:prstGeom prst="rect">
-            <a:avLst/>
-          </a:prstGeom>
-          <a:solidFill>
-            <a:srgbClr val="A78BFA"/>
+            <a:off x="6263640" y="4114800"/>
+            <a:ext cx="5669280" cy="2514600"/>
+          </a:xfrm>
+          <a:prstGeom prst="roundRect">
+            <a:avLst/>
+          </a:prstGeom>
+          <a:solidFill>
+            <a:srgbClr val="1E1F21"/>
           </a:solidFill>
           <a:ln>
             <a:noFill/>
@@ -12597,6 +14396,887 @@
       </p:sp>
       <p:sp>
         <p:nvSpPr>
+          <p:cNvPr id="44" name="Rectangle 43"/>
+          <p:cNvSpPr/>
+          <p:nvPr/>
+        </p:nvSpPr>
+        <p:spPr>
+          <a:xfrm>
+            <a:off x="6263640" y="4114800"/>
+            <a:ext cx="5669280" cy="38100"/>
+          </a:xfrm>
+          <a:prstGeom prst="rect">
+            <a:avLst/>
+          </a:prstGeom>
+          <a:solidFill>
+            <a:srgbClr val="34D399"/>
+          </a:solidFill>
+          <a:ln>
+            <a:noFill/>
+          </a:ln>
+        </p:spPr>
+        <p:style>
+          <a:lnRef idx="1">
+            <a:schemeClr val="accent1"/>
+          </a:lnRef>
+          <a:fillRef idx="3">
+            <a:schemeClr val="accent1"/>
+          </a:fillRef>
+          <a:effectRef idx="2">
+            <a:schemeClr val="accent1"/>
+          </a:effectRef>
+          <a:fontRef idx="minor">
+            <a:schemeClr val="lt1"/>
+          </a:fontRef>
+        </p:style>
+        <p:txBody>
+          <a:bodyPr rtlCol="0" anchor="ctr"/>
+          <a:lstStyle/>
+          <a:p>
+            <a:pPr algn="ctr"/>
+          </a:p>
+        </p:txBody>
+      </p:sp>
+      <p:sp>
+        <p:nvSpPr>
+          <p:cNvPr id="45" name="TextBox 44"/>
+          <p:cNvSpPr txBox="1"/>
+          <p:nvPr/>
+        </p:nvSpPr>
+        <p:spPr>
+          <a:xfrm>
+            <a:off x="6446520" y="4206240"/>
+            <a:ext cx="5303520" cy="274320"/>
+          </a:xfrm>
+          <a:prstGeom prst="rect">
+            <a:avLst/>
+          </a:prstGeom>
+          <a:noFill/>
+        </p:spPr>
+        <p:txBody>
+          <a:bodyPr wrap="square">
+            <a:spAutoFit/>
+          </a:bodyPr>
+          <a:lstStyle/>
+          <a:p>
+            <a:pPr algn="l">
+              <a:defRPr sz="1400" b="1">
+                <a:solidFill>
+                  <a:srgbClr val="34D399"/>
+                </a:solidFill>
+                <a:latin typeface="Calibri"/>
+              </a:defRPr>
+            </a:pPr>
+            <a:r>
+              <a:t>Email Performance Dashboard</a:t>
+            </a:r>
+          </a:p>
+        </p:txBody>
+      </p:sp>
+      <p:sp>
+        <p:nvSpPr>
+          <p:cNvPr id="46" name="TextBox 45"/>
+          <p:cNvSpPr txBox="1"/>
+          <p:nvPr/>
+        </p:nvSpPr>
+        <p:spPr>
+          <a:xfrm>
+            <a:off x="6446520" y="4480560"/>
+            <a:ext cx="5303520" cy="274320"/>
+          </a:xfrm>
+          <a:prstGeom prst="rect">
+            <a:avLst/>
+          </a:prstGeom>
+          <a:noFill/>
+        </p:spPr>
+        <p:txBody>
+          <a:bodyPr wrap="square">
+            <a:spAutoFit/>
+          </a:bodyPr>
+          <a:lstStyle/>
+          <a:p>
+            <a:pPr algn="l">
+              <a:defRPr sz="1000" b="0">
+                <a:solidFill>
+                  <a:srgbClr val="8A8F98"/>
+                </a:solidFill>
+                <a:latin typeface="Calibri"/>
+              </a:defRPr>
+            </a:pPr>
+            <a:r>
+              <a:t>Funnel, trends, suppression - one screen.</a:t>
+            </a:r>
+          </a:p>
+        </p:txBody>
+      </p:sp>
+      <p:sp>
+        <p:nvSpPr>
+          <p:cNvPr id="47" name="TextBox 46"/>
+          <p:cNvSpPr txBox="1"/>
+          <p:nvPr/>
+        </p:nvSpPr>
+        <p:spPr>
+          <a:xfrm>
+            <a:off x="6446520" y="4846320"/>
+            <a:ext cx="5486400" cy="228600"/>
+          </a:xfrm>
+          <a:prstGeom prst="rect">
+            <a:avLst/>
+          </a:prstGeom>
+          <a:noFill/>
+        </p:spPr>
+        <p:txBody>
+          <a:bodyPr wrap="square">
+            <a:spAutoFit/>
+          </a:bodyPr>
+          <a:lstStyle/>
+          <a:p>
+            <a:pPr algn="l">
+              <a:defRPr sz="900" b="0">
+                <a:solidFill>
+                  <a:srgbClr val="C4C9D4"/>
+                </a:solidFill>
+                <a:latin typeface="Calibri"/>
+              </a:defRPr>
+            </a:pPr>
+            <a:r>
+              <a:t>+ Sent / opened / replied rates per user</a:t>
+            </a:r>
+          </a:p>
+        </p:txBody>
+      </p:sp>
+      <p:sp>
+        <p:nvSpPr>
+          <p:cNvPr id="48" name="TextBox 47"/>
+          <p:cNvSpPr txBox="1"/>
+          <p:nvPr/>
+        </p:nvSpPr>
+        <p:spPr>
+          <a:xfrm>
+            <a:off x="6446520" y="5102352"/>
+            <a:ext cx="5486400" cy="228600"/>
+          </a:xfrm>
+          <a:prstGeom prst="rect">
+            <a:avLst/>
+          </a:prstGeom>
+          <a:noFill/>
+        </p:spPr>
+        <p:txBody>
+          <a:bodyPr wrap="square">
+            <a:spAutoFit/>
+          </a:bodyPr>
+          <a:lstStyle/>
+          <a:p>
+            <a:pPr algn="l">
+              <a:defRPr sz="900" b="0">
+                <a:solidFill>
+                  <a:srgbClr val="C4C9D4"/>
+                </a:solidFill>
+                <a:latin typeface="Calibri"/>
+              </a:defRPr>
+            </a:pPr>
+            <a:r>
+              <a:t>+ Daily send trend (last 14 days) with cap tracking</a:t>
+            </a:r>
+          </a:p>
+        </p:txBody>
+      </p:sp>
+      <p:sp>
+        <p:nvSpPr>
+          <p:cNvPr id="49" name="TextBox 48"/>
+          <p:cNvSpPr txBox="1"/>
+          <p:nvPr/>
+        </p:nvSpPr>
+        <p:spPr>
+          <a:xfrm>
+            <a:off x="6446520" y="5358383"/>
+            <a:ext cx="5486400" cy="228600"/>
+          </a:xfrm>
+          <a:prstGeom prst="rect">
+            <a:avLst/>
+          </a:prstGeom>
+          <a:noFill/>
+        </p:spPr>
+        <p:txBody>
+          <a:bodyPr wrap="square">
+            <a:spAutoFit/>
+          </a:bodyPr>
+          <a:lstStyle/>
+          <a:p>
+            <a:pPr algn="l">
+              <a:defRPr sz="900" b="0">
+                <a:solidFill>
+                  <a:srgbClr val="C4C9D4"/>
+                </a:solidFill>
+                <a:latin typeface="Calibri"/>
+              </a:defRPr>
+            </a:pPr>
+            <a:r>
+              <a:t>+ Per-campaign funnel (last 20 campaigns)</a:t>
+            </a:r>
+          </a:p>
+        </p:txBody>
+      </p:sp>
+      <p:sp>
+        <p:nvSpPr>
+          <p:cNvPr id="50" name="TextBox 49"/>
+          <p:cNvSpPr txBox="1"/>
+          <p:nvPr/>
+        </p:nvSpPr>
+        <p:spPr>
+          <a:xfrm>
+            <a:off x="6446520" y="5614416"/>
+            <a:ext cx="5486400" cy="228600"/>
+          </a:xfrm>
+          <a:prstGeom prst="rect">
+            <a:avLst/>
+          </a:prstGeom>
+          <a:noFill/>
+        </p:spPr>
+        <p:txBody>
+          <a:bodyPr wrap="square">
+            <a:spAutoFit/>
+          </a:bodyPr>
+          <a:lstStyle/>
+          <a:p>
+            <a:pPr algn="l">
+              <a:defRPr sz="900" b="0">
+                <a:solidFill>
+                  <a:srgbClr val="C4C9D4"/>
+                </a:solidFill>
+                <a:latin typeface="Calibri"/>
+              </a:defRPr>
+            </a:pPr>
+            <a:r>
+              <a:t>+ Suppression list management with remove button</a:t>
+            </a:r>
+          </a:p>
+        </p:txBody>
+      </p:sp>
+      <p:sp>
+        <p:nvSpPr>
+          <p:cNvPr id="51" name="TextBox 50"/>
+          <p:cNvSpPr txBox="1"/>
+          <p:nvPr/>
+        </p:nvSpPr>
+        <p:spPr>
+          <a:xfrm>
+            <a:off x="6446520" y="5870448"/>
+            <a:ext cx="5486400" cy="228600"/>
+          </a:xfrm>
+          <a:prstGeom prst="rect">
+            <a:avLst/>
+          </a:prstGeom>
+          <a:noFill/>
+        </p:spPr>
+        <p:txBody>
+          <a:bodyPr wrap="square">
+            <a:spAutoFit/>
+          </a:bodyPr>
+          <a:lstStyle/>
+          <a:p>
+            <a:pPr algn="l">
+              <a:defRPr sz="900" b="0">
+                <a:solidFill>
+                  <a:srgbClr val="C4C9D4"/>
+                </a:solidFill>
+                <a:latin typeface="Calibri"/>
+              </a:defRPr>
+            </a:pPr>
+            <a:r>
+              <a:t>+ Today's usage vs 100/day cap (reputation protection)</a:t>
+            </a:r>
+          </a:p>
+        </p:txBody>
+      </p:sp>
+      <p:sp>
+        <p:nvSpPr>
+          <p:cNvPr id="52" name="TextBox 51"/>
+          <p:cNvSpPr txBox="1"/>
+          <p:nvPr/>
+        </p:nvSpPr>
+        <p:spPr>
+          <a:xfrm>
+            <a:off x="6446520" y="6126480"/>
+            <a:ext cx="5486400" cy="228600"/>
+          </a:xfrm>
+          <a:prstGeom prst="rect">
+            <a:avLst/>
+          </a:prstGeom>
+          <a:noFill/>
+        </p:spPr>
+        <p:txBody>
+          <a:bodyPr wrap="square">
+            <a:spAutoFit/>
+          </a:bodyPr>
+          <a:lstStyle/>
+          <a:p>
+            <a:pPr algn="l">
+              <a:defRPr sz="900" b="0">
+                <a:solidFill>
+                  <a:srgbClr val="C4C9D4"/>
+                </a:solidFill>
+                <a:latin typeface="Calibri"/>
+              </a:defRPr>
+            </a:pPr>
+            <a:r>
+              <a:t>+ Per-message open count + reply flag on every email</a:t>
+            </a:r>
+          </a:p>
+        </p:txBody>
+      </p:sp>
+    </p:spTree>
+  </p:cSld>
+  <p:clrMapOvr>
+    <a:masterClrMapping/>
+  </p:clrMapOvr>
+</p:sld>
+</file>
+
+<file path=ppt/slides/slide8.xml><?xml version="1.0" encoding="utf-8"?>
+<p:sld xmlns:a="http://schemas.openxmlformats.org/drawingml/2006/main" xmlns:p="http://schemas.openxmlformats.org/presentationml/2006/main" xmlns:r="http://schemas.openxmlformats.org/officeDocument/2006/relationships">
+  <p:cSld>
+    <p:bg>
+      <p:bgPr>
+        <a:solidFill>
+          <a:srgbClr val="08090A"/>
+        </a:solidFill>
+        <a:effectLst/>
+      </p:bgPr>
+    </p:bg>
+    <p:spTree>
+      <p:nvGrpSpPr>
+        <p:cNvPr id="1" name=""/>
+        <p:cNvGrpSpPr/>
+        <p:nvPr/>
+      </p:nvGrpSpPr>
+      <p:grpSpPr/>
+      <p:sp>
+        <p:nvSpPr>
+          <p:cNvPr id="2" name="Oval 1"/>
+          <p:cNvSpPr/>
+          <p:nvPr/>
+        </p:nvSpPr>
+        <p:spPr>
+          <a:xfrm>
+            <a:off x="2743200" y="0"/>
+            <a:ext cx="6400800" cy="4572000"/>
+          </a:xfrm>
+          <a:prstGeom prst="ellipse">
+            <a:avLst/>
+          </a:prstGeom>
+          <a:solidFill>
+            <a:srgbClr val="1A1D3A"/>
+          </a:solidFill>
+          <a:ln>
+            <a:noFill/>
+          </a:ln>
+        </p:spPr>
+        <p:style>
+          <a:lnRef idx="1">
+            <a:schemeClr val="accent1"/>
+          </a:lnRef>
+          <a:fillRef idx="3">
+            <a:schemeClr val="accent1"/>
+          </a:fillRef>
+          <a:effectRef idx="2">
+            <a:schemeClr val="accent1"/>
+          </a:effectRef>
+          <a:fontRef idx="minor">
+            <a:schemeClr val="lt1"/>
+          </a:fontRef>
+        </p:style>
+        <p:txBody>
+          <a:bodyPr rtlCol="0" anchor="ctr"/>
+          <a:lstStyle/>
+          <a:p>
+            <a:pPr algn="ctr"/>
+          </a:p>
+        </p:txBody>
+      </p:sp>
+      <p:sp>
+        <p:nvSpPr>
+          <p:cNvPr id="3" name="Rectangle 2"/>
+          <p:cNvSpPr/>
+          <p:nvPr/>
+        </p:nvSpPr>
+        <p:spPr>
+          <a:xfrm>
+            <a:off x="914400" y="731520"/>
+            <a:ext cx="1371600" cy="38100"/>
+          </a:xfrm>
+          <a:prstGeom prst="rect">
+            <a:avLst/>
+          </a:prstGeom>
+          <a:solidFill>
+            <a:srgbClr val="7C7FFF"/>
+          </a:solidFill>
+          <a:ln>
+            <a:noFill/>
+          </a:ln>
+        </p:spPr>
+        <p:style>
+          <a:lnRef idx="1">
+            <a:schemeClr val="accent1"/>
+          </a:lnRef>
+          <a:fillRef idx="3">
+            <a:schemeClr val="accent1"/>
+          </a:fillRef>
+          <a:effectRef idx="2">
+            <a:schemeClr val="accent1"/>
+          </a:effectRef>
+          <a:fontRef idx="minor">
+            <a:schemeClr val="lt1"/>
+          </a:fontRef>
+        </p:style>
+        <p:txBody>
+          <a:bodyPr rtlCol="0" anchor="ctr"/>
+          <a:lstStyle/>
+          <a:p>
+            <a:pPr algn="ctr"/>
+          </a:p>
+        </p:txBody>
+      </p:sp>
+      <p:sp>
+        <p:nvSpPr>
+          <p:cNvPr id="4" name="TextBox 3"/>
+          <p:cNvSpPr txBox="1"/>
+          <p:nvPr/>
+        </p:nvSpPr>
+        <p:spPr>
+          <a:xfrm>
+            <a:off x="914400" y="914400"/>
+            <a:ext cx="9144000" cy="548640"/>
+          </a:xfrm>
+          <a:prstGeom prst="rect">
+            <a:avLst/>
+          </a:prstGeom>
+          <a:noFill/>
+        </p:spPr>
+        <p:txBody>
+          <a:bodyPr wrap="square">
+            <a:spAutoFit/>
+          </a:bodyPr>
+          <a:lstStyle/>
+          <a:p>
+            <a:pPr algn="l">
+              <a:defRPr sz="4000" b="1">
+                <a:solidFill>
+                  <a:srgbClr val="F7F8F8"/>
+                </a:solidFill>
+                <a:latin typeface="Calibri"/>
+              </a:defRPr>
+            </a:pPr>
+            <a:r>
+              <a:t>RevFlare by the Numbers</a:t>
+            </a:r>
+          </a:p>
+        </p:txBody>
+      </p:sp>
+      <p:sp>
+        <p:nvSpPr>
+          <p:cNvPr id="5" name="Rounded Rectangle 4"/>
+          <p:cNvSpPr/>
+          <p:nvPr/>
+        </p:nvSpPr>
+        <p:spPr>
+          <a:xfrm>
+            <a:off x="640080" y="1828800"/>
+            <a:ext cx="2011680" cy="1005840"/>
+          </a:xfrm>
+          <a:prstGeom prst="roundRect">
+            <a:avLst/>
+          </a:prstGeom>
+          <a:solidFill>
+            <a:srgbClr val="1E1F21"/>
+          </a:solidFill>
+          <a:ln>
+            <a:noFill/>
+          </a:ln>
+        </p:spPr>
+        <p:style>
+          <a:lnRef idx="1">
+            <a:schemeClr val="accent1"/>
+          </a:lnRef>
+          <a:fillRef idx="3">
+            <a:schemeClr val="accent1"/>
+          </a:fillRef>
+          <a:effectRef idx="2">
+            <a:schemeClr val="accent1"/>
+          </a:effectRef>
+          <a:fontRef idx="minor">
+            <a:schemeClr val="lt1"/>
+          </a:fontRef>
+        </p:style>
+        <p:txBody>
+          <a:bodyPr rtlCol="0" anchor="ctr"/>
+          <a:lstStyle/>
+          <a:p>
+            <a:pPr algn="ctr"/>
+          </a:p>
+        </p:txBody>
+      </p:sp>
+      <p:sp>
+        <p:nvSpPr>
+          <p:cNvPr id="6" name="Rectangle 5"/>
+          <p:cNvSpPr/>
+          <p:nvPr/>
+        </p:nvSpPr>
+        <p:spPr>
+          <a:xfrm>
+            <a:off x="640080" y="1828800"/>
+            <a:ext cx="2011680" cy="38100"/>
+          </a:xfrm>
+          <a:prstGeom prst="rect">
+            <a:avLst/>
+          </a:prstGeom>
+          <a:solidFill>
+            <a:srgbClr val="34D399"/>
+          </a:solidFill>
+          <a:ln>
+            <a:noFill/>
+          </a:ln>
+        </p:spPr>
+        <p:style>
+          <a:lnRef idx="1">
+            <a:schemeClr val="accent1"/>
+          </a:lnRef>
+          <a:fillRef idx="3">
+            <a:schemeClr val="accent1"/>
+          </a:fillRef>
+          <a:effectRef idx="2">
+            <a:schemeClr val="accent1"/>
+          </a:effectRef>
+          <a:fontRef idx="minor">
+            <a:schemeClr val="lt1"/>
+          </a:fontRef>
+        </p:style>
+        <p:txBody>
+          <a:bodyPr rtlCol="0" anchor="ctr"/>
+          <a:lstStyle/>
+          <a:p>
+            <a:pPr algn="ctr"/>
+          </a:p>
+        </p:txBody>
+      </p:sp>
+      <p:sp>
+        <p:nvSpPr>
+          <p:cNvPr id="7" name="TextBox 6"/>
+          <p:cNvSpPr txBox="1"/>
+          <p:nvPr/>
+        </p:nvSpPr>
+        <p:spPr>
+          <a:xfrm>
+            <a:off x="822960" y="2011680"/>
+            <a:ext cx="1645920" cy="457200"/>
+          </a:xfrm>
+          <a:prstGeom prst="rect">
+            <a:avLst/>
+          </a:prstGeom>
+          <a:noFill/>
+        </p:spPr>
+        <p:txBody>
+          <a:bodyPr wrap="square">
+            <a:spAutoFit/>
+          </a:bodyPr>
+          <a:lstStyle/>
+          <a:p>
+            <a:pPr algn="l">
+              <a:defRPr sz="2600" b="1">
+                <a:solidFill>
+                  <a:srgbClr val="34D399"/>
+                </a:solidFill>
+                <a:latin typeface="Calibri"/>
+              </a:defRPr>
+            </a:pPr>
+            <a:r>
+              <a:t>~12,700</a:t>
+            </a:r>
+          </a:p>
+        </p:txBody>
+      </p:sp>
+      <p:sp>
+        <p:nvSpPr>
+          <p:cNvPr id="8" name="TextBox 7"/>
+          <p:cNvSpPr txBox="1"/>
+          <p:nvPr/>
+        </p:nvSpPr>
+        <p:spPr>
+          <a:xfrm>
+            <a:off x="822960" y="2468880"/>
+            <a:ext cx="1645920" cy="274320"/>
+          </a:xfrm>
+          <a:prstGeom prst="rect">
+            <a:avLst/>
+          </a:prstGeom>
+          <a:noFill/>
+        </p:spPr>
+        <p:txBody>
+          <a:bodyPr wrap="square">
+            <a:spAutoFit/>
+          </a:bodyPr>
+          <a:lstStyle/>
+          <a:p>
+            <a:pPr algn="l">
+              <a:defRPr sz="1000" b="0">
+                <a:solidFill>
+                  <a:srgbClr val="8A8F98"/>
+                </a:solidFill>
+                <a:latin typeface="Calibri"/>
+              </a:defRPr>
+            </a:pPr>
+            <a:r>
+              <a:t>Lines of Code</a:t>
+            </a:r>
+          </a:p>
+        </p:txBody>
+      </p:sp>
+      <p:sp>
+        <p:nvSpPr>
+          <p:cNvPr id="9" name="Rounded Rectangle 8"/>
+          <p:cNvSpPr/>
+          <p:nvPr/>
+        </p:nvSpPr>
+        <p:spPr>
+          <a:xfrm>
+            <a:off x="2880360" y="1828800"/>
+            <a:ext cx="2011680" cy="1005840"/>
+          </a:xfrm>
+          <a:prstGeom prst="roundRect">
+            <a:avLst/>
+          </a:prstGeom>
+          <a:solidFill>
+            <a:srgbClr val="1E1F21"/>
+          </a:solidFill>
+          <a:ln>
+            <a:noFill/>
+          </a:ln>
+        </p:spPr>
+        <p:style>
+          <a:lnRef idx="1">
+            <a:schemeClr val="accent1"/>
+          </a:lnRef>
+          <a:fillRef idx="3">
+            <a:schemeClr val="accent1"/>
+          </a:fillRef>
+          <a:effectRef idx="2">
+            <a:schemeClr val="accent1"/>
+          </a:effectRef>
+          <a:fontRef idx="minor">
+            <a:schemeClr val="lt1"/>
+          </a:fontRef>
+        </p:style>
+        <p:txBody>
+          <a:bodyPr rtlCol="0" anchor="ctr"/>
+          <a:lstStyle/>
+          <a:p>
+            <a:pPr algn="ctr"/>
+          </a:p>
+        </p:txBody>
+      </p:sp>
+      <p:sp>
+        <p:nvSpPr>
+          <p:cNvPr id="10" name="Rectangle 9"/>
+          <p:cNvSpPr/>
+          <p:nvPr/>
+        </p:nvSpPr>
+        <p:spPr>
+          <a:xfrm>
+            <a:off x="2880360" y="1828800"/>
+            <a:ext cx="2011680" cy="38100"/>
+          </a:xfrm>
+          <a:prstGeom prst="rect">
+            <a:avLst/>
+          </a:prstGeom>
+          <a:solidFill>
+            <a:srgbClr val="60A5FA"/>
+          </a:solidFill>
+          <a:ln>
+            <a:noFill/>
+          </a:ln>
+        </p:spPr>
+        <p:style>
+          <a:lnRef idx="1">
+            <a:schemeClr val="accent1"/>
+          </a:lnRef>
+          <a:fillRef idx="3">
+            <a:schemeClr val="accent1"/>
+          </a:fillRef>
+          <a:effectRef idx="2">
+            <a:schemeClr val="accent1"/>
+          </a:effectRef>
+          <a:fontRef idx="minor">
+            <a:schemeClr val="lt1"/>
+          </a:fontRef>
+        </p:style>
+        <p:txBody>
+          <a:bodyPr rtlCol="0" anchor="ctr"/>
+          <a:lstStyle/>
+          <a:p>
+            <a:pPr algn="ctr"/>
+          </a:p>
+        </p:txBody>
+      </p:sp>
+      <p:sp>
+        <p:nvSpPr>
+          <p:cNvPr id="11" name="TextBox 10"/>
+          <p:cNvSpPr txBox="1"/>
+          <p:nvPr/>
+        </p:nvSpPr>
+        <p:spPr>
+          <a:xfrm>
+            <a:off x="3063240" y="2011680"/>
+            <a:ext cx="1645920" cy="457200"/>
+          </a:xfrm>
+          <a:prstGeom prst="rect">
+            <a:avLst/>
+          </a:prstGeom>
+          <a:noFill/>
+        </p:spPr>
+        <p:txBody>
+          <a:bodyPr wrap="square">
+            <a:spAutoFit/>
+          </a:bodyPr>
+          <a:lstStyle/>
+          <a:p>
+            <a:pPr algn="l">
+              <a:defRPr sz="2600" b="1">
+                <a:solidFill>
+                  <a:srgbClr val="60A5FA"/>
+                </a:solidFill>
+                <a:latin typeface="Calibri"/>
+              </a:defRPr>
+            </a:pPr>
+            <a:r>
+              <a:t>29</a:t>
+            </a:r>
+          </a:p>
+        </p:txBody>
+      </p:sp>
+      <p:sp>
+        <p:nvSpPr>
+          <p:cNvPr id="12" name="TextBox 11"/>
+          <p:cNvSpPr txBox="1"/>
+          <p:nvPr/>
+        </p:nvSpPr>
+        <p:spPr>
+          <a:xfrm>
+            <a:off x="3063240" y="2468880"/>
+            <a:ext cx="1645920" cy="274320"/>
+          </a:xfrm>
+          <a:prstGeom prst="rect">
+            <a:avLst/>
+          </a:prstGeom>
+          <a:noFill/>
+        </p:spPr>
+        <p:txBody>
+          <a:bodyPr wrap="square">
+            <a:spAutoFit/>
+          </a:bodyPr>
+          <a:lstStyle/>
+          <a:p>
+            <a:pPr algn="l">
+              <a:defRPr sz="1000" b="0">
+                <a:solidFill>
+                  <a:srgbClr val="8A8F98"/>
+                </a:solidFill>
+                <a:latin typeface="Calibri"/>
+              </a:defRPr>
+            </a:pPr>
+            <a:r>
+              <a:t>DB Tables</a:t>
+            </a:r>
+          </a:p>
+        </p:txBody>
+      </p:sp>
+      <p:sp>
+        <p:nvSpPr>
+          <p:cNvPr id="13" name="Rounded Rectangle 12"/>
+          <p:cNvSpPr/>
+          <p:nvPr/>
+        </p:nvSpPr>
+        <p:spPr>
+          <a:xfrm>
+            <a:off x="5120640" y="1828800"/>
+            <a:ext cx="2011680" cy="1005840"/>
+          </a:xfrm>
+          <a:prstGeom prst="roundRect">
+            <a:avLst/>
+          </a:prstGeom>
+          <a:solidFill>
+            <a:srgbClr val="1E1F21"/>
+          </a:solidFill>
+          <a:ln>
+            <a:noFill/>
+          </a:ln>
+        </p:spPr>
+        <p:style>
+          <a:lnRef idx="1">
+            <a:schemeClr val="accent1"/>
+          </a:lnRef>
+          <a:fillRef idx="3">
+            <a:schemeClr val="accent1"/>
+          </a:fillRef>
+          <a:effectRef idx="2">
+            <a:schemeClr val="accent1"/>
+          </a:effectRef>
+          <a:fontRef idx="minor">
+            <a:schemeClr val="lt1"/>
+          </a:fontRef>
+        </p:style>
+        <p:txBody>
+          <a:bodyPr rtlCol="0" anchor="ctr"/>
+          <a:lstStyle/>
+          <a:p>
+            <a:pPr algn="ctr"/>
+          </a:p>
+        </p:txBody>
+      </p:sp>
+      <p:sp>
+        <p:nvSpPr>
+          <p:cNvPr id="14" name="Rectangle 13"/>
+          <p:cNvSpPr/>
+          <p:nvPr/>
+        </p:nvSpPr>
+        <p:spPr>
+          <a:xfrm>
+            <a:off x="5120640" y="1828800"/>
+            <a:ext cx="2011680" cy="38100"/>
+          </a:xfrm>
+          <a:prstGeom prst="rect">
+            <a:avLst/>
+          </a:prstGeom>
+          <a:solidFill>
+            <a:srgbClr val="A78BFA"/>
+          </a:solidFill>
+          <a:ln>
+            <a:noFill/>
+          </a:ln>
+        </p:spPr>
+        <p:style>
+          <a:lnRef idx="1">
+            <a:schemeClr val="accent1"/>
+          </a:lnRef>
+          <a:fillRef idx="3">
+            <a:schemeClr val="accent1"/>
+          </a:fillRef>
+          <a:effectRef idx="2">
+            <a:schemeClr val="accent1"/>
+          </a:effectRef>
+          <a:fontRef idx="minor">
+            <a:schemeClr val="lt1"/>
+          </a:fontRef>
+        </p:style>
+        <p:txBody>
+          <a:bodyPr rtlCol="0" anchor="ctr"/>
+          <a:lstStyle/>
+          <a:p>
+            <a:pPr algn="ctr"/>
+          </a:p>
+        </p:txBody>
+      </p:sp>
+      <p:sp>
+        <p:nvSpPr>
           <p:cNvPr id="15" name="TextBox 14"/>
           <p:cNvSpPr txBox="1"/>
           <p:nvPr/>
@@ -12626,7 +15306,7 @@
               </a:defRPr>
             </a:pPr>
             <a:r>
-              <a:t>60+</a:t>
+              <a:t>108</a:t>
             </a:r>
           </a:p>
         </p:txBody>
